--- a/presentation/presentation.pptx
+++ b/presentation/presentation.pptx
@@ -4,6 +4,9 @@
   <p:sldMasterIdLst>
     <p:sldMasterId id="2147483648" r:id="rId1"/>
   </p:sldMasterIdLst>
+  <p:notesMasterIdLst>
+    <p:notesMasterId r:id="rId18"/>
+  </p:notesMasterIdLst>
   <p:sldIdLst>
     <p:sldId id="256" r:id="rId2"/>
     <p:sldId id="257" r:id="rId3"/>
@@ -22,10 +25,7 @@
     <p:sldId id="270" r:id="rId16"/>
     <p:sldId id="271" r:id="rId17"/>
   </p:sldIdLst>
-  <p:notesMasterIdLst>
-    <p:notesMasterId r:id="rId18"/>
-  </p:notesMasterIdLst>
-  <p:sldSz cx="9144000" cy="5143500"/>
+  <p:sldSz cx="9144000" cy="5143500" type="screen16x9"/>
   <p:notesSz cx="5143500" cy="9144000"/>
   <p:defaultTextStyle>
     <a:lvl1pPr marL="0" algn="l" defTabSz="914400" rtl="0" eaLnBrk="1" latinLnBrk="0" hangingPunct="1">
@@ -119,7 +119,57 @@
       </a:defRPr>
     </a:lvl9pPr>
   </p:defaultTextStyle>
+  <p:extLst>
+    <p:ext uri="{EFAFB233-063F-42B5-8137-9DF3F51BA10A}">
+      <p15:sldGuideLst xmlns:p15="http://schemas.microsoft.com/office/powerpoint/2012/main"/>
+    </p:ext>
+  </p:extLst>
 </p:presentation>
+</file>
+
+<file path=ppt/changesInfos/changesInfo1.xml><?xml version="1.0" encoding="utf-8"?>
+<pc:chgInfo xmlns:a="http://schemas.openxmlformats.org/drawingml/2006/main" xmlns:r="http://schemas.openxmlformats.org/officeDocument/2006/relationships" xmlns:ac="http://schemas.microsoft.com/office/drawing/2013/main/command" xmlns:pc="http://schemas.microsoft.com/office/powerpoint/2013/main/command">
+  <pc:docChgLst>
+    <pc:chgData name="V4V ..." userId="cb63ec986d86812e" providerId="LiveId" clId="{0872702A-717C-449D-BDA4-066A9CD70380}"/>
+    <pc:docChg chg="undo custSel modSld">
+      <pc:chgData name="V4V ..." userId="cb63ec986d86812e" providerId="LiveId" clId="{0872702A-717C-449D-BDA4-066A9CD70380}" dt="2026-05-26T15:43:46.635" v="17" actId="1076"/>
+      <pc:docMkLst>
+        <pc:docMk/>
+      </pc:docMkLst>
+      <pc:sldChg chg="addSp delSp modSp mod">
+        <pc:chgData name="V4V ..." userId="cb63ec986d86812e" providerId="LiveId" clId="{0872702A-717C-449D-BDA4-066A9CD70380}" dt="2026-05-26T15:43:46.635" v="17" actId="1076"/>
+        <pc:sldMkLst>
+          <pc:docMk/>
+          <pc:sldMk cId="0" sldId="270"/>
+        </pc:sldMkLst>
+        <pc:picChg chg="del">
+          <ac:chgData name="V4V ..." userId="cb63ec986d86812e" providerId="LiveId" clId="{0872702A-717C-449D-BDA4-066A9CD70380}" dt="2026-05-26T15:42:45.448" v="10" actId="478"/>
+          <ac:picMkLst>
+            <pc:docMk/>
+            <pc:sldMk cId="0" sldId="270"/>
+            <ac:picMk id="4" creationId="{00000000-0000-0000-0000-000000000000}"/>
+          </ac:picMkLst>
+        </pc:picChg>
+        <pc:picChg chg="add del">
+          <ac:chgData name="V4V ..." userId="cb63ec986d86812e" providerId="LiveId" clId="{0872702A-717C-449D-BDA4-066A9CD70380}" dt="2026-05-26T15:42:04.047" v="1" actId="22"/>
+          <ac:picMkLst>
+            <pc:docMk/>
+            <pc:sldMk cId="0" sldId="270"/>
+            <ac:picMk id="7" creationId="{EAE8040C-090E-5B43-2739-93DFDCEFF296}"/>
+          </ac:picMkLst>
+        </pc:picChg>
+        <pc:picChg chg="add mod">
+          <ac:chgData name="V4V ..." userId="cb63ec986d86812e" providerId="LiveId" clId="{0872702A-717C-449D-BDA4-066A9CD70380}" dt="2026-05-26T15:43:46.635" v="17" actId="1076"/>
+          <ac:picMkLst>
+            <pc:docMk/>
+            <pc:sldMk cId="0" sldId="270"/>
+            <ac:picMk id="9" creationId="{176934C7-4796-DDFA-E1D9-E4C0C0FE07CF}"/>
+          </ac:picMkLst>
+        </pc:picChg>
+      </pc:sldChg>
+    </pc:docChg>
+  </pc:docChgLst>
+</pc:chgInfo>
 </file>
 
 <file path=ppt/notesMasters/notesMaster1.xml><?xml version="1.0" encoding="utf-8"?>
@@ -144,234 +194,10 @@
           <a:chExt cx="0" cy="0"/>
         </a:xfrm>
       </p:grpSpPr>
-      <p:sp>
-        <p:nvSpPr>
-          <p:cNvPr id="2" name="Header Placeholder 1"/>
-          <p:cNvSpPr>
-            <a:spLocks noGrp="1"/>
-          </p:cNvSpPr>
-          <p:nvPr>
-            <p:ph type="hdr" sz="quarter"/>
-          </p:nvPr>
-        </p:nvSpPr>
-        <p:spPr>
-          <a:xfrm>
-            <a:off x="0" y="0"/>
-            <a:ext cx="2971800" cy="458788"/>
-          </a:xfrm>
-          <a:prstGeom prst="rect">
-            <a:avLst/>
-          </a:prstGeom>
-        </p:spPr>
-        <p:txBody>
-          <a:bodyPr vert="horz" lIns="91440" tIns="45720" rIns="91440" bIns="45720" rtlCol="0"/>
-          <a:lstStyle>
-            <a:lvl1pPr algn="l">
-              <a:defRPr sz="1200"/>
-            </a:lvl1pPr>
-          </a:lstStyle>
-          <a:p>
-            <a:endParaRPr lang="en-US"/>
-          </a:p>
-        </p:txBody>
-      </p:sp>
-      <p:sp>
-        <p:nvSpPr>
-          <p:cNvPr id="3" name="Date Placeholder 2"/>
-          <p:cNvSpPr>
-            <a:spLocks noGrp="1"/>
-          </p:cNvSpPr>
-          <p:nvPr>
-            <p:ph type="dt" idx="1"/>
-          </p:nvPr>
-        </p:nvSpPr>
-        <p:spPr>
-          <a:xfrm>
-            <a:off x="3884613" y="0"/>
-            <a:ext cx="2971800" cy="458788"/>
-          </a:xfrm>
-          <a:prstGeom prst="rect">
-            <a:avLst/>
-          </a:prstGeom>
-        </p:spPr>
-        <p:txBody>
-          <a:bodyPr vert="horz" lIns="91440" tIns="45720" rIns="91440" bIns="45720" rtlCol="0"/>
-          <a:lstStyle>
-            <a:lvl1pPr algn="r">
-              <a:defRPr sz="1200"/>
-            </a:lvl1pPr>
-          </a:lstStyle>
-          <a:p>
-            <a:fld id="{5282F153-3F37-0F45-9E97-73ACFA13230C}" type="datetimeFigureOut">
-              <a:rPr lang="en-US"/>
-              <a:t>7/23/19</a:t>
-            </a:fld>
-            <a:endParaRPr lang="en-US"/>
-          </a:p>
-        </p:txBody>
-      </p:sp>
-      <p:sp>
-        <p:nvSpPr>
-          <p:cNvPr id="4" name="Slide Image Placeholder 3"/>
-          <p:cNvSpPr>
-            <a:spLocks noGrp="1" noRot="1" noChangeAspect="1"/>
-          </p:cNvSpPr>
-          <p:nvPr>
-            <p:ph type="sldImg" idx="2"/>
-          </p:nvPr>
-        </p:nvSpPr>
-        <p:spPr>
-          <a:xfrm>
-            <a:off x="685800" y="1143000"/>
-            <a:ext cx="5486400" cy="3086100"/>
-          </a:xfrm>
-          <a:prstGeom prst="rect">
-            <a:avLst/>
-          </a:prstGeom>
-          <a:noFill/>
-          <a:ln w="12700">
-            <a:solidFill>
-              <a:prstClr val="black"/>
-            </a:solidFill>
-          </a:ln>
-        </p:spPr>
-        <p:txBody>
-          <a:bodyPr vert="horz" lIns="91440" tIns="45720" rIns="91440" bIns="45720" rtlCol="0" anchor="ctr"/>
-          <a:lstStyle/>
-          <a:p>
-            <a:endParaRPr lang="en-US"/>
-          </a:p>
-        </p:txBody>
-      </p:sp>
-      <p:sp>
-        <p:nvSpPr>
-          <p:cNvPr id="5" name="Notes Placeholder 4"/>
-          <p:cNvSpPr>
-            <a:spLocks noGrp="1"/>
-          </p:cNvSpPr>
-          <p:nvPr>
-            <p:ph type="body" sz="quarter" idx="3"/>
-          </p:nvPr>
-        </p:nvSpPr>
-        <p:spPr>
-          <a:xfrm>
-            <a:off x="685800" y="4400550"/>
-            <a:ext cx="5486400" cy="3600450"/>
-          </a:xfrm>
-          <a:prstGeom prst="rect">
-            <a:avLst/>
-          </a:prstGeom>
-        </p:spPr>
-        <p:txBody>
-          <a:bodyPr vert="horz" lIns="91440" tIns="45720" rIns="91440" bIns="45720" rtlCol="0"/>
-          <a:lstStyle/>
-          <a:p>
-            <a:pPr lvl="0"/>
-            <a:r>
-              <a:rPr lang="en-US"/>
-              <a:t>Click to edit Master text styles</a:t>
-            </a:r>
-          </a:p>
-          <a:p>
-            <a:pPr lvl="1"/>
-            <a:r>
-              <a:rPr lang="en-US"/>
-              <a:t>Second level</a:t>
-            </a:r>
-          </a:p>
-          <a:p>
-            <a:pPr lvl="2"/>
-            <a:r>
-              <a:rPr lang="en-US"/>
-              <a:t>Third level</a:t>
-            </a:r>
-          </a:p>
-          <a:p>
-            <a:pPr lvl="3"/>
-            <a:r>
-              <a:rPr lang="en-US"/>
-              <a:t>Fourth level</a:t>
-            </a:r>
-          </a:p>
-          <a:p>
-            <a:pPr lvl="4"/>
-            <a:r>
-              <a:rPr lang="en-US"/>
-              <a:t>Fifth level</a:t>
-            </a:r>
-          </a:p>
-        </p:txBody>
-      </p:sp>
-      <p:sp>
-        <p:nvSpPr>
-          <p:cNvPr id="6" name="Footer Placeholder 5"/>
-          <p:cNvSpPr>
-            <a:spLocks noGrp="1"/>
-          </p:cNvSpPr>
-          <p:nvPr>
-            <p:ph type="ftr" sz="quarter" idx="4"/>
-          </p:nvPr>
-        </p:nvSpPr>
-        <p:spPr>
-          <a:xfrm>
-            <a:off x="0" y="8685213"/>
-            <a:ext cx="2971800" cy="458787"/>
-          </a:xfrm>
-          <a:prstGeom prst="rect">
-            <a:avLst/>
-          </a:prstGeom>
-        </p:spPr>
-        <p:txBody>
-          <a:bodyPr vert="horz" lIns="91440" tIns="45720" rIns="91440" bIns="45720" rtlCol="0" anchor="b"/>
-          <a:lstStyle>
-            <a:lvl1pPr algn="l">
-              <a:defRPr sz="1200"/>
-            </a:lvl1pPr>
-          </a:lstStyle>
-          <a:p>
-            <a:endParaRPr lang="en-US"/>
-          </a:p>
-        </p:txBody>
-      </p:sp>
-      <p:sp>
-        <p:nvSpPr>
-          <p:cNvPr id="7" name="Slide Number Placeholder 6"/>
-          <p:cNvSpPr>
-            <a:spLocks noGrp="1"/>
-          </p:cNvSpPr>
-          <p:nvPr>
-            <p:ph type="sldNum" sz="quarter" idx="5"/>
-          </p:nvPr>
-        </p:nvSpPr>
-        <p:spPr>
-          <a:xfrm>
-            <a:off x="3884613" y="8685213"/>
-            <a:ext cx="2971800" cy="458787"/>
-          </a:xfrm>
-          <a:prstGeom prst="rect">
-            <a:avLst/>
-          </a:prstGeom>
-        </p:spPr>
-        <p:txBody>
-          <a:bodyPr vert="horz" lIns="91440" tIns="45720" rIns="91440" bIns="45720" rtlCol="0" anchor="b"/>
-          <a:lstStyle>
-            <a:lvl1pPr algn="r">
-              <a:defRPr sz="1200"/>
-            </a:lvl1pPr>
-          </a:lstStyle>
-          <a:p>
-            <a:fld id="{CE5E9CC1-C706-0F49-92D6-E571CC5EEA8F}" type="slidenum">
-              <a:rPr lang="en-US"/>
-              <a:t>‹#›</a:t>
-            </a:fld>
-            <a:endParaRPr lang="en-US"/>
-          </a:p>
-        </p:txBody>
-      </p:sp>
     </p:spTree>
     <p:extLst>
       <p:ext uri="{BB962C8B-B14F-4D97-AF65-F5344CB8AC3E}">
-        <p14:creationId xmlns:p14="http://schemas.microsoft.com/office/powerpoint/2010/main" val="1024086991"/>
+        <p14:creationId xmlns:p14="http://schemas.microsoft.com/office/powerpoint/2010/main" val="2125578504"/>
       </p:ext>
     </p:extLst>
   </p:cSld>
@@ -515,10 +341,6 @@
           <a:bodyPr/>
           <a:lstStyle/>
           <a:p>
-            <a:r>
-              <a:rPr lang="en-US" dirty="0"/>
-              <a:t/>
-            </a:r>
             <a:endParaRPr lang="en-US" dirty="0"/>
           </a:p>
         </p:txBody>
@@ -603,10 +425,6 @@
           <a:bodyPr/>
           <a:lstStyle/>
           <a:p>
-            <a:r>
-              <a:rPr lang="en-US" dirty="0"/>
-              <a:t/>
-            </a:r>
             <a:endParaRPr lang="en-US" dirty="0"/>
           </a:p>
         </p:txBody>
@@ -691,10 +509,6 @@
           <a:bodyPr/>
           <a:lstStyle/>
           <a:p>
-            <a:r>
-              <a:rPr lang="en-US" dirty="0"/>
-              <a:t/>
-            </a:r>
             <a:endParaRPr lang="en-US" dirty="0"/>
           </a:p>
         </p:txBody>
@@ -779,10 +593,6 @@
           <a:bodyPr/>
           <a:lstStyle/>
           <a:p>
-            <a:r>
-              <a:rPr lang="en-US" dirty="0"/>
-              <a:t/>
-            </a:r>
             <a:endParaRPr lang="en-US" dirty="0"/>
           </a:p>
         </p:txBody>
@@ -867,10 +677,6 @@
           <a:bodyPr/>
           <a:lstStyle/>
           <a:p>
-            <a:r>
-              <a:rPr lang="en-US" dirty="0"/>
-              <a:t/>
-            </a:r>
             <a:endParaRPr lang="en-US" dirty="0"/>
           </a:p>
         </p:txBody>
@@ -955,10 +761,6 @@
           <a:bodyPr/>
           <a:lstStyle/>
           <a:p>
-            <a:r>
-              <a:rPr lang="en-US" dirty="0"/>
-              <a:t/>
-            </a:r>
             <a:endParaRPr lang="en-US" dirty="0"/>
           </a:p>
         </p:txBody>
@@ -1043,10 +845,6 @@
           <a:bodyPr/>
           <a:lstStyle/>
           <a:p>
-            <a:r>
-              <a:rPr lang="en-US" dirty="0"/>
-              <a:t/>
-            </a:r>
             <a:endParaRPr lang="en-US" dirty="0"/>
           </a:p>
         </p:txBody>
@@ -1131,10 +929,6 @@
           <a:bodyPr/>
           <a:lstStyle/>
           <a:p>
-            <a:r>
-              <a:rPr lang="en-US" dirty="0"/>
-              <a:t/>
-            </a:r>
             <a:endParaRPr lang="en-US" dirty="0"/>
           </a:p>
         </p:txBody>
@@ -1219,10 +1013,6 @@
           <a:bodyPr/>
           <a:lstStyle/>
           <a:p>
-            <a:r>
-              <a:rPr lang="en-US" dirty="0"/>
-              <a:t/>
-            </a:r>
             <a:endParaRPr lang="en-US" dirty="0"/>
           </a:p>
         </p:txBody>
@@ -1307,10 +1097,6 @@
           <a:bodyPr/>
           <a:lstStyle/>
           <a:p>
-            <a:r>
-              <a:rPr lang="en-US" dirty="0"/>
-              <a:t/>
-            </a:r>
             <a:endParaRPr lang="en-US" dirty="0"/>
           </a:p>
         </p:txBody>
@@ -1395,10 +1181,6 @@
           <a:bodyPr/>
           <a:lstStyle/>
           <a:p>
-            <a:r>
-              <a:rPr lang="en-US" dirty="0"/>
-              <a:t/>
-            </a:r>
             <a:endParaRPr lang="en-US" dirty="0"/>
           </a:p>
         </p:txBody>
@@ -1483,10 +1265,6 @@
           <a:bodyPr/>
           <a:lstStyle/>
           <a:p>
-            <a:r>
-              <a:rPr lang="en-US" dirty="0"/>
-              <a:t/>
-            </a:r>
             <a:endParaRPr lang="en-US" dirty="0"/>
           </a:p>
         </p:txBody>
@@ -1571,10 +1349,6 @@
           <a:bodyPr/>
           <a:lstStyle/>
           <a:p>
-            <a:r>
-              <a:rPr lang="en-US" dirty="0"/>
-              <a:t/>
-            </a:r>
             <a:endParaRPr lang="en-US" dirty="0"/>
           </a:p>
         </p:txBody>
@@ -1659,10 +1433,6 @@
           <a:bodyPr/>
           <a:lstStyle/>
           <a:p>
-            <a:r>
-              <a:rPr lang="en-US" dirty="0"/>
-              <a:t/>
-            </a:r>
             <a:endParaRPr lang="en-US" dirty="0"/>
           </a:p>
         </p:txBody>
@@ -1747,10 +1517,6 @@
           <a:bodyPr/>
           <a:lstStyle/>
           <a:p>
-            <a:r>
-              <a:rPr lang="en-US" dirty="0"/>
-              <a:t/>
-            </a:r>
             <a:endParaRPr lang="en-US" dirty="0"/>
           </a:p>
         </p:txBody>
@@ -1835,10 +1601,6 @@
           <a:bodyPr/>
           <a:lstStyle/>
           <a:p>
-            <a:r>
-              <a:rPr lang="en-US" dirty="0"/>
-              <a:t/>
-            </a:r>
             <a:endParaRPr lang="en-US" dirty="0"/>
           </a:p>
         </p:txBody>
@@ -1912,6 +1674,11 @@
 <file path=ppt/slideMasters/slideMaster1.xml><?xml version="1.0" encoding="utf-8"?>
 <p:sldMaster xmlns:a="http://schemas.openxmlformats.org/drawingml/2006/main" xmlns:r="http://schemas.openxmlformats.org/officeDocument/2006/relationships" xmlns:p="http://schemas.openxmlformats.org/presentationml/2006/main">
   <p:cSld>
+    <p:bg>
+      <p:bgRef idx="1001">
+        <a:schemeClr val="bg1"/>
+      </p:bgRef>
+    </p:bg>
     <p:spTree>
       <p:nvGrpSpPr>
         <p:cNvPr id="1" name=""/>
@@ -2194,6 +1961,7 @@
         <a:solidFill>
           <a:srgbClr val="21295C"/>
         </a:solidFill>
+        <a:effectLst/>
       </p:bgPr>
     </p:bg>
     <p:spTree>
@@ -2231,7 +1999,7 @@
           <a:bodyPr wrap="square" lIns="0" tIns="0" rIns="0" bIns="0" rtlCol="0" anchor="ctr"/>
           <a:lstStyle/>
           <a:p>
-            <a:pPr algn="l" indent="0" marL="0">
+            <a:pPr marL="0" indent="0" algn="l">
               <a:buNone/>
             </a:pPr>
             <a:r>
@@ -2248,7 +2016,7 @@
             <a:endParaRPr lang="en-US" sz="4000" dirty="0"/>
           </a:p>
           <a:p>
-            <a:pPr algn="l" indent="0" marL="0">
+            <a:pPr marL="0" indent="0" algn="l">
               <a:buNone/>
             </a:pPr>
             <a:r>
@@ -2287,7 +2055,7 @@
           <a:bodyPr wrap="square" lIns="0" tIns="0" rIns="0" bIns="0" rtlCol="0" anchor="ctr"/>
           <a:lstStyle/>
           <a:p>
-            <a:pPr indent="0" marL="0">
+            <a:pPr marL="0" indent="0">
               <a:buNone/>
             </a:pPr>
             <a:r>
@@ -2324,6 +2092,13 @@
           </a:solidFill>
           <a:ln/>
         </p:spPr>
+        <p:txBody>
+          <a:bodyPr/>
+          <a:lstStyle/>
+          <a:p>
+            <a:endParaRPr lang="en-US"/>
+          </a:p>
+        </p:txBody>
       </p:sp>
       <p:sp>
         <p:nvSpPr>
@@ -2346,7 +2121,7 @@
           <a:bodyPr wrap="square" lIns="0" tIns="0" rIns="0" bIns="0" rtlCol="0" anchor="ctr"/>
           <a:lstStyle/>
           <a:p>
-            <a:pPr indent="0" marL="0">
+            <a:pPr marL="0" indent="0">
               <a:buNone/>
             </a:pPr>
             <a:r>
@@ -2385,7 +2160,7 @@
           <a:bodyPr wrap="square" lIns="0" tIns="0" rIns="0" bIns="0" rtlCol="0" anchor="ctr"/>
           <a:lstStyle/>
           <a:p>
-            <a:pPr indent="0" marL="0">
+            <a:pPr marL="0" indent="0">
               <a:buNone/>
             </a:pPr>
             <a:r>
@@ -2419,6 +2194,7 @@
         <a:solidFill>
           <a:srgbClr val="F8FAFC"/>
         </a:solidFill>
+        <a:effectLst/>
       </p:bgPr>
     </p:bg>
     <p:spTree>
@@ -2456,7 +2232,7 @@
           <a:bodyPr wrap="square" lIns="0" tIns="0" rIns="0" bIns="0" rtlCol="0" anchor="ctr"/>
           <a:lstStyle/>
           <a:p>
-            <a:pPr indent="0" marL="0">
+            <a:pPr marL="0" indent="0">
               <a:buNone/>
             </a:pPr>
             <a:r>
@@ -2493,18 +2269,25 @@
           </a:solidFill>
           <a:ln/>
         </p:spPr>
+        <p:txBody>
+          <a:bodyPr/>
+          <a:lstStyle/>
+          <a:p>
+            <a:endParaRPr lang="en-US"/>
+          </a:p>
+        </p:txBody>
       </p:sp>
       <p:pic>
         <p:nvPicPr>
-          <p:cNvPr id="4" name="Image 0" descr="/home/claude/screenshots_cropped/dashboard.png">    </p:cNvPr>
+          <p:cNvPr id="4" name="Image 0" descr="/home/claude/screenshots_cropped/dashboard.png"/>
           <p:cNvPicPr>
             <a:picLocks noChangeAspect="1"/>
           </p:cNvPicPr>
           <p:nvPr/>
         </p:nvPicPr>
         <p:blipFill>
-          <a:blip r:embed="rId1"/>
-          <a:srcRect l="0" r="0" t="0" b="0"/>
+          <a:blip r:embed="rId3"/>
+          <a:srcRect/>
           <a:stretch/>
         </p:blipFill>
         <p:spPr>
@@ -2538,7 +2321,7 @@
           <a:bodyPr wrap="square" lIns="0" tIns="0" rIns="0" bIns="0" rtlCol="0" anchor="ctr"/>
           <a:lstStyle/>
           <a:p>
-            <a:pPr indent="0" marL="0">
+            <a:pPr marL="0" indent="0">
               <a:buNone/>
             </a:pPr>
             <a:r>
@@ -2572,6 +2355,7 @@
         <a:solidFill>
           <a:srgbClr val="F8FAFC"/>
         </a:solidFill>
+        <a:effectLst/>
       </p:bgPr>
     </p:bg>
     <p:spTree>
@@ -2609,7 +2393,7 @@
           <a:bodyPr wrap="square" lIns="0" tIns="0" rIns="0" bIns="0" rtlCol="0" anchor="ctr"/>
           <a:lstStyle/>
           <a:p>
-            <a:pPr indent="0" marL="0">
+            <a:pPr marL="0" indent="0">
               <a:buNone/>
             </a:pPr>
             <a:r>
@@ -2646,18 +2430,25 @@
           </a:solidFill>
           <a:ln/>
         </p:spPr>
+        <p:txBody>
+          <a:bodyPr/>
+          <a:lstStyle/>
+          <a:p>
+            <a:endParaRPr lang="en-US"/>
+          </a:p>
+        </p:txBody>
       </p:sp>
       <p:pic>
         <p:nvPicPr>
-          <p:cNvPr id="4" name="Image 0" descr="/home/claude/screenshots_cropped/books.png">    </p:cNvPr>
+          <p:cNvPr id="4" name="Image 0" descr="/home/claude/screenshots_cropped/books.png"/>
           <p:cNvPicPr>
             <a:picLocks noChangeAspect="1"/>
           </p:cNvPicPr>
           <p:nvPr/>
         </p:nvPicPr>
         <p:blipFill>
-          <a:blip r:embed="rId1"/>
-          <a:srcRect l="0" r="0" t="0" b="0"/>
+          <a:blip r:embed="rId3"/>
+          <a:srcRect/>
           <a:stretch/>
         </p:blipFill>
         <p:spPr>
@@ -2691,7 +2482,7 @@
           <a:bodyPr wrap="square" lIns="0" tIns="0" rIns="0" bIns="0" rtlCol="0" anchor="ctr"/>
           <a:lstStyle/>
           <a:p>
-            <a:pPr indent="0" marL="0">
+            <a:pPr marL="0" indent="0">
               <a:buNone/>
             </a:pPr>
             <a:r>
@@ -2725,6 +2516,7 @@
         <a:solidFill>
           <a:srgbClr val="F8FAFC"/>
         </a:solidFill>
+        <a:effectLst/>
       </p:bgPr>
     </p:bg>
     <p:spTree>
@@ -2762,7 +2554,7 @@
           <a:bodyPr wrap="square" lIns="0" tIns="0" rIns="0" bIns="0" rtlCol="0" anchor="ctr"/>
           <a:lstStyle/>
           <a:p>
-            <a:pPr indent="0" marL="0">
+            <a:pPr marL="0" indent="0">
               <a:buNone/>
             </a:pPr>
             <a:r>
@@ -2799,18 +2591,25 @@
           </a:solidFill>
           <a:ln/>
         </p:spPr>
+        <p:txBody>
+          <a:bodyPr/>
+          <a:lstStyle/>
+          <a:p>
+            <a:endParaRPr lang="en-US"/>
+          </a:p>
+        </p:txBody>
       </p:sp>
       <p:pic>
         <p:nvPicPr>
-          <p:cNvPr id="4" name="Image 0" descr="/home/claude/screenshots_cropped/members.png">    </p:cNvPr>
+          <p:cNvPr id="4" name="Image 0" descr="/home/claude/screenshots_cropped/members.png"/>
           <p:cNvPicPr>
             <a:picLocks noChangeAspect="1"/>
           </p:cNvPicPr>
           <p:nvPr/>
         </p:nvPicPr>
         <p:blipFill>
-          <a:blip r:embed="rId1"/>
-          <a:srcRect l="0" r="0" t="0" b="0"/>
+          <a:blip r:embed="rId3"/>
+          <a:srcRect/>
           <a:stretch/>
         </p:blipFill>
         <p:spPr>
@@ -2844,7 +2643,7 @@
           <a:bodyPr wrap="square" lIns="0" tIns="0" rIns="0" bIns="0" rtlCol="0" anchor="ctr"/>
           <a:lstStyle/>
           <a:p>
-            <a:pPr indent="0" marL="0">
+            <a:pPr marL="0" indent="0">
               <a:buNone/>
             </a:pPr>
             <a:r>
@@ -2878,6 +2677,7 @@
         <a:solidFill>
           <a:srgbClr val="F8FAFC"/>
         </a:solidFill>
+        <a:effectLst/>
       </p:bgPr>
     </p:bg>
     <p:spTree>
@@ -2915,7 +2715,7 @@
           <a:bodyPr wrap="square" lIns="0" tIns="0" rIns="0" bIns="0" rtlCol="0" anchor="ctr"/>
           <a:lstStyle/>
           <a:p>
-            <a:pPr indent="0" marL="0">
+            <a:pPr marL="0" indent="0">
               <a:buNone/>
             </a:pPr>
             <a:r>
@@ -2952,18 +2752,25 @@
           </a:solidFill>
           <a:ln/>
         </p:spPr>
+        <p:txBody>
+          <a:bodyPr/>
+          <a:lstStyle/>
+          <a:p>
+            <a:endParaRPr lang="en-US"/>
+          </a:p>
+        </p:txBody>
       </p:sp>
       <p:pic>
         <p:nvPicPr>
-          <p:cNvPr id="4" name="Image 0" descr="/home/claude/screenshots_cropped/loans.png">    </p:cNvPr>
+          <p:cNvPr id="4" name="Image 0" descr="/home/claude/screenshots_cropped/loans.png"/>
           <p:cNvPicPr>
             <a:picLocks noChangeAspect="1"/>
           </p:cNvPicPr>
           <p:nvPr/>
         </p:nvPicPr>
         <p:blipFill>
-          <a:blip r:embed="rId1"/>
-          <a:srcRect l="0" r="0" t="0" b="0"/>
+          <a:blip r:embed="rId3"/>
+          <a:srcRect/>
           <a:stretch/>
         </p:blipFill>
         <p:spPr>
@@ -2997,7 +2804,7 @@
           <a:bodyPr wrap="square" lIns="0" tIns="0" rIns="0" bIns="0" rtlCol="0" anchor="ctr"/>
           <a:lstStyle/>
           <a:p>
-            <a:pPr indent="0" marL="0">
+            <a:pPr marL="0" indent="0">
               <a:buNone/>
             </a:pPr>
             <a:r>
@@ -3031,6 +2838,7 @@
         <a:solidFill>
           <a:srgbClr val="F8FAFC"/>
         </a:solidFill>
+        <a:effectLst/>
       </p:bgPr>
     </p:bg>
     <p:spTree>
@@ -3068,7 +2876,7 @@
           <a:bodyPr wrap="square" lIns="0" tIns="0" rIns="0" bIns="0" rtlCol="0" anchor="ctr"/>
           <a:lstStyle/>
           <a:p>
-            <a:pPr indent="0" marL="0">
+            <a:pPr marL="0" indent="0">
               <a:buNone/>
             </a:pPr>
             <a:r>
@@ -3105,18 +2913,25 @@
           </a:solidFill>
           <a:ln/>
         </p:spPr>
+        <p:txBody>
+          <a:bodyPr/>
+          <a:lstStyle/>
+          <a:p>
+            <a:endParaRPr lang="en-US"/>
+          </a:p>
+        </p:txBody>
       </p:sp>
       <p:pic>
         <p:nvPicPr>
-          <p:cNvPr id="4" name="Image 0" descr="/home/claude/screenshots_cropped/recommend.png">    </p:cNvPr>
+          <p:cNvPr id="4" name="Image 0" descr="/home/claude/screenshots_cropped/recommend.png"/>
           <p:cNvPicPr>
             <a:picLocks noChangeAspect="1"/>
           </p:cNvPicPr>
           <p:nvPr/>
         </p:nvPicPr>
         <p:blipFill>
-          <a:blip r:embed="rId1"/>
-          <a:srcRect l="0" r="0" t="0" b="0"/>
+          <a:blip r:embed="rId3"/>
+          <a:srcRect/>
           <a:stretch/>
         </p:blipFill>
         <p:spPr>
@@ -3150,7 +2965,7 @@
           <a:bodyPr wrap="square" lIns="0" tIns="0" rIns="0" bIns="0" rtlCol="0" anchor="ctr"/>
           <a:lstStyle/>
           <a:p>
-            <a:pPr indent="0" marL="0">
+            <a:pPr marL="0" indent="0">
               <a:buNone/>
             </a:pPr>
             <a:r>
@@ -3184,6 +2999,7 @@
         <a:solidFill>
           <a:srgbClr val="F8FAFC"/>
         </a:solidFill>
+        <a:effectLst/>
       </p:bgPr>
     </p:bg>
     <p:spTree>
@@ -3221,7 +3037,7 @@
           <a:bodyPr wrap="square" lIns="0" tIns="0" rIns="0" bIns="0" rtlCol="0" anchor="ctr"/>
           <a:lstStyle/>
           <a:p>
-            <a:pPr indent="0" marL="0">
+            <a:pPr marL="0" indent="0">
               <a:buNone/>
             </a:pPr>
             <a:r>
@@ -3258,69 +3074,83 @@
           </a:solidFill>
           <a:ln/>
         </p:spPr>
+        <p:txBody>
+          <a:bodyPr/>
+          <a:lstStyle/>
+          <a:p>
+            <a:endParaRPr lang="en-US"/>
+          </a:p>
+        </p:txBody>
+      </p:sp>
+      <p:sp>
+        <p:nvSpPr>
+          <p:cNvPr id="5" name="Text 2"/>
+          <p:cNvSpPr/>
+          <p:nvPr/>
+        </p:nvSpPr>
+        <p:spPr>
+          <a:xfrm>
+            <a:off x="457200" y="4800600"/>
+            <a:ext cx="8229600" cy="274320"/>
+          </a:xfrm>
+          <a:prstGeom prst="rect">
+            <a:avLst/>
+          </a:prstGeom>
+          <a:noFill/>
+          <a:ln/>
+        </p:spPr>
+        <p:txBody>
+          <a:bodyPr wrap="square" lIns="0" tIns="0" rIns="0" bIns="0" rtlCol="0" anchor="ctr"/>
+          <a:lstStyle/>
+          <a:p>
+            <a:pPr marL="0" indent="0">
+              <a:buNone/>
+            </a:pPr>
+            <a:r>
+              <a:rPr lang="en-US" sz="1000" i="1" dirty="0">
+                <a:solidFill>
+                  <a:srgbClr val="64748B"/>
+                </a:solidFill>
+                <a:latin typeface="Calibri" pitchFamily="34" charset="0"/>
+                <a:ea typeface="Calibri" pitchFamily="34" charset="-122"/>
+                <a:cs typeface="Calibri" pitchFamily="34" charset="-120"/>
+              </a:rPr>
+              <a:t>Πέντε ενότητες ανάλυσης — δανεισμοί ανά μέλος/κατηγορία/συγγραφέα/ηλικία/φύλο.</a:t>
+            </a:r>
+            <a:endParaRPr lang="en-US" sz="1000" dirty="0"/>
+          </a:p>
+        </p:txBody>
       </p:sp>
       <p:pic>
         <p:nvPicPr>
-          <p:cNvPr id="4" name="Image 0" descr="/home/claude/screenshots_cropped/statistics.png">    </p:cNvPr>
+          <p:cNvPr id="9" name="Picture 8">
+            <a:extLst>
+              <a:ext uri="{FF2B5EF4-FFF2-40B4-BE49-F238E27FC236}">
+                <a16:creationId xmlns:a16="http://schemas.microsoft.com/office/drawing/2014/main" id="{176934C7-4796-DDFA-E1D9-E4C0C0FE07CF}"/>
+              </a:ext>
+            </a:extLst>
+          </p:cNvPr>
           <p:cNvPicPr>
             <a:picLocks noChangeAspect="1"/>
           </p:cNvPicPr>
           <p:nvPr/>
         </p:nvPicPr>
         <p:blipFill>
-          <a:blip r:embed="rId1"/>
-          <a:srcRect l="0" r="0" t="0" b="0"/>
-          <a:stretch/>
+          <a:blip r:embed="rId3"/>
+          <a:stretch>
+            <a:fillRect/>
+          </a:stretch>
         </p:blipFill>
         <p:spPr>
           <a:xfrm>
-            <a:off x="731520" y="914400"/>
-            <a:ext cx="7680960" cy="3657600"/>
+            <a:off x="745066" y="920044"/>
+            <a:ext cx="7653867" cy="3646311"/>
           </a:xfrm>
           <a:prstGeom prst="rect">
             <a:avLst/>
           </a:prstGeom>
         </p:spPr>
       </p:pic>
-      <p:sp>
-        <p:nvSpPr>
-          <p:cNvPr id="5" name="Text 2"/>
-          <p:cNvSpPr/>
-          <p:nvPr/>
-        </p:nvSpPr>
-        <p:spPr>
-          <a:xfrm>
-            <a:off x="457200" y="4800600"/>
-            <a:ext cx="8229600" cy="274320"/>
-          </a:xfrm>
-          <a:prstGeom prst="rect">
-            <a:avLst/>
-          </a:prstGeom>
-          <a:noFill/>
-          <a:ln/>
-        </p:spPr>
-        <p:txBody>
-          <a:bodyPr wrap="square" lIns="0" tIns="0" rIns="0" bIns="0" rtlCol="0" anchor="ctr"/>
-          <a:lstStyle/>
-          <a:p>
-            <a:pPr indent="0" marL="0">
-              <a:buNone/>
-            </a:pPr>
-            <a:r>
-              <a:rPr lang="en-US" sz="1000" i="1" dirty="0">
-                <a:solidFill>
-                  <a:srgbClr val="64748B"/>
-                </a:solidFill>
-                <a:latin typeface="Calibri" pitchFamily="34" charset="0"/>
-                <a:ea typeface="Calibri" pitchFamily="34" charset="-122"/>
-                <a:cs typeface="Calibri" pitchFamily="34" charset="-120"/>
-              </a:rPr>
-              <a:t>Πέντε ενότητες ανάλυσης — δανεισμοί ανά μέλος/κατηγορία/συγγραφέα/ηλικία/φύλο.</a:t>
-            </a:r>
-            <a:endParaRPr lang="en-US" sz="1000" dirty="0"/>
-          </a:p>
-        </p:txBody>
-      </p:sp>
     </p:spTree>
   </p:cSld>
   <p:clrMapOvr>
@@ -3337,6 +3167,7 @@
         <a:solidFill>
           <a:srgbClr val="21295C"/>
         </a:solidFill>
+        <a:effectLst/>
       </p:bgPr>
     </p:bg>
     <p:spTree>
@@ -3374,7 +3205,7 @@
           <a:bodyPr wrap="square" lIns="0" tIns="0" rIns="0" bIns="0" rtlCol="0" anchor="ctr"/>
           <a:lstStyle/>
           <a:p>
-            <a:pPr indent="0" marL="0">
+            <a:pPr marL="0" indent="0">
               <a:buNone/>
             </a:pPr>
             <a:r>
@@ -3411,6 +3242,13 @@
           </a:solidFill>
           <a:ln/>
         </p:spPr>
+        <p:txBody>
+          <a:bodyPr/>
+          <a:lstStyle/>
+          <a:p>
+            <a:endParaRPr lang="en-US"/>
+          </a:p>
+        </p:txBody>
       </p:sp>
       <p:sp>
         <p:nvSpPr>
@@ -3433,7 +3271,7 @@
           <a:bodyPr wrap="square" lIns="0" tIns="0" rIns="0" bIns="0" rtlCol="0" anchor="t"/>
           <a:lstStyle/>
           <a:p>
-            <a:pPr algn="l" indent="0" marL="0">
+            <a:pPr marL="0" indent="0" algn="l">
               <a:buNone/>
             </a:pPr>
             <a:r>
@@ -3472,7 +3310,7 @@
           <a:bodyPr wrap="square" lIns="0" tIns="0" rIns="0" bIns="0" rtlCol="0" anchor="ctr"/>
           <a:lstStyle/>
           <a:p>
-            <a:pPr indent="0" marL="0">
+            <a:pPr marL="0" indent="0">
               <a:buNone/>
             </a:pPr>
             <a:r>
@@ -3511,7 +3349,7 @@
           <a:bodyPr wrap="square" lIns="0" tIns="0" rIns="0" bIns="0" rtlCol="0" anchor="ctr"/>
           <a:lstStyle/>
           <a:p>
-            <a:pPr indent="0" marL="0">
+            <a:pPr marL="0" indent="0">
               <a:buNone/>
             </a:pPr>
             <a:r>
@@ -3550,7 +3388,7 @@
           <a:bodyPr wrap="square" lIns="0" tIns="0" rIns="0" bIns="0" rtlCol="0" anchor="t"/>
           <a:lstStyle/>
           <a:p>
-            <a:pPr algn="l" indent="0" marL="0">
+            <a:pPr marL="0" indent="0" algn="l">
               <a:buNone/>
             </a:pPr>
             <a:r>
@@ -3589,7 +3427,7 @@
           <a:bodyPr wrap="square" lIns="0" tIns="0" rIns="0" bIns="0" rtlCol="0" anchor="ctr"/>
           <a:lstStyle/>
           <a:p>
-            <a:pPr indent="0" marL="0">
+            <a:pPr marL="0" indent="0">
               <a:buNone/>
             </a:pPr>
             <a:r>
@@ -3628,7 +3466,7 @@
           <a:bodyPr wrap="square" lIns="0" tIns="0" rIns="0" bIns="0" rtlCol="0" anchor="ctr"/>
           <a:lstStyle/>
           <a:p>
-            <a:pPr indent="0" marL="0">
+            <a:pPr marL="0" indent="0">
               <a:buNone/>
             </a:pPr>
             <a:r>
@@ -3667,7 +3505,7 @@
           <a:bodyPr wrap="square" lIns="0" tIns="0" rIns="0" bIns="0" rtlCol="0" anchor="t"/>
           <a:lstStyle/>
           <a:p>
-            <a:pPr algn="l" indent="0" marL="0">
+            <a:pPr marL="0" indent="0" algn="l">
               <a:buNone/>
             </a:pPr>
             <a:r>
@@ -3706,7 +3544,7 @@
           <a:bodyPr wrap="square" lIns="0" tIns="0" rIns="0" bIns="0" rtlCol="0" anchor="ctr"/>
           <a:lstStyle/>
           <a:p>
-            <a:pPr indent="0" marL="0">
+            <a:pPr marL="0" indent="0">
               <a:buNone/>
             </a:pPr>
             <a:r>
@@ -3745,7 +3583,7 @@
           <a:bodyPr wrap="square" lIns="0" tIns="0" rIns="0" bIns="0" rtlCol="0" anchor="ctr"/>
           <a:lstStyle/>
           <a:p>
-            <a:pPr indent="0" marL="0">
+            <a:pPr marL="0" indent="0">
               <a:buNone/>
             </a:pPr>
             <a:r>
@@ -3784,7 +3622,7 @@
           <a:bodyPr wrap="square" lIns="0" tIns="0" rIns="0" bIns="0" rtlCol="0" anchor="t"/>
           <a:lstStyle/>
           <a:p>
-            <a:pPr algn="l" indent="0" marL="0">
+            <a:pPr marL="0" indent="0" algn="l">
               <a:buNone/>
             </a:pPr>
             <a:r>
@@ -3823,7 +3661,7 @@
           <a:bodyPr wrap="square" lIns="0" tIns="0" rIns="0" bIns="0" rtlCol="0" anchor="ctr"/>
           <a:lstStyle/>
           <a:p>
-            <a:pPr indent="0" marL="0">
+            <a:pPr marL="0" indent="0">
               <a:buNone/>
             </a:pPr>
             <a:r>
@@ -3862,7 +3700,7 @@
           <a:bodyPr wrap="square" lIns="0" tIns="0" rIns="0" bIns="0" rtlCol="0" anchor="ctr"/>
           <a:lstStyle/>
           <a:p>
-            <a:pPr indent="0" marL="0">
+            <a:pPr marL="0" indent="0">
               <a:buNone/>
             </a:pPr>
             <a:r>
@@ -3901,7 +3739,7 @@
           <a:bodyPr wrap="square" lIns="0" tIns="0" rIns="0" bIns="0" rtlCol="0" anchor="ctr"/>
           <a:lstStyle/>
           <a:p>
-            <a:pPr algn="ctr" indent="0" marL="0">
+            <a:pPr marL="0" indent="0" algn="ctr">
               <a:buNone/>
             </a:pPr>
             <a:r>
@@ -3935,6 +3773,7 @@
         <a:solidFill>
           <a:srgbClr val="F8FAFC"/>
         </a:solidFill>
+        <a:effectLst/>
       </p:bgPr>
     </p:bg>
     <p:spTree>
@@ -3972,7 +3811,7 @@
           <a:bodyPr wrap="square" lIns="0" tIns="0" rIns="0" bIns="0" rtlCol="0" anchor="ctr"/>
           <a:lstStyle/>
           <a:p>
-            <a:pPr indent="0" marL="0">
+            <a:pPr marL="0" indent="0">
               <a:buNone/>
             </a:pPr>
             <a:r>
@@ -4011,7 +3850,7 @@
           <a:bodyPr wrap="square" lIns="0" tIns="0" rIns="0" bIns="0" rtlCol="0" anchor="ctr"/>
           <a:lstStyle/>
           <a:p>
-            <a:pPr indent="0" marL="0">
+            <a:pPr marL="0" indent="0">
               <a:buNone/>
             </a:pPr>
             <a:r>
@@ -4053,13 +3892,20 @@
             <a:prstDash val="solid"/>
           </a:ln>
           <a:effectLst>
-            <a:outerShdw sx="100000" sy="100000" kx="0" ky="0" algn="bl" rotWithShape="0" blurRad="76200" dist="25400" dir="5400000">
+            <a:outerShdw blurRad="76200" dist="25400" dir="5400000" algn="bl" rotWithShape="0">
               <a:srgbClr val="000000">
                 <a:alpha val="8000"/>
               </a:srgbClr>
             </a:outerShdw>
           </a:effectLst>
         </p:spPr>
+        <p:txBody>
+          <a:bodyPr/>
+          <a:lstStyle/>
+          <a:p>
+            <a:endParaRPr lang="en-US"/>
+          </a:p>
+        </p:txBody>
       </p:sp>
       <p:sp>
         <p:nvSpPr>
@@ -4080,6 +3926,13 @@
           </a:solidFill>
           <a:ln/>
         </p:spPr>
+        <p:txBody>
+          <a:bodyPr/>
+          <a:lstStyle/>
+          <a:p>
+            <a:endParaRPr lang="en-US"/>
+          </a:p>
+        </p:txBody>
       </p:sp>
       <p:sp>
         <p:nvSpPr>
@@ -4102,7 +3955,7 @@
           <a:bodyPr wrap="square" lIns="0" tIns="0" rIns="0" bIns="0" rtlCol="0" anchor="ctr"/>
           <a:lstStyle/>
           <a:p>
-            <a:pPr indent="0" marL="0">
+            <a:pPr marL="0" indent="0">
               <a:buNone/>
             </a:pPr>
             <a:r>
@@ -4141,7 +3994,7 @@
           <a:bodyPr wrap="square" lIns="0" tIns="0" rIns="0" bIns="0" rtlCol="0" anchor="ctr"/>
           <a:lstStyle/>
           <a:p>
-            <a:pPr indent="0" marL="0">
+            <a:pPr marL="0" indent="0">
               <a:buNone/>
             </a:pPr>
             <a:r>
@@ -4180,7 +4033,7 @@
           <a:bodyPr wrap="square" lIns="0" tIns="0" rIns="0" bIns="0" rtlCol="0" anchor="ctr"/>
           <a:lstStyle/>
           <a:p>
-            <a:pPr indent="0" marL="0">
+            <a:pPr marL="0" indent="0">
               <a:buNone/>
             </a:pPr>
             <a:r>
@@ -4222,13 +4075,20 @@
             <a:prstDash val="solid"/>
           </a:ln>
           <a:effectLst>
-            <a:outerShdw sx="100000" sy="100000" kx="0" ky="0" algn="bl" rotWithShape="0" blurRad="76200" dist="25400" dir="5400000">
+            <a:outerShdw blurRad="76200" dist="25400" dir="5400000" algn="bl" rotWithShape="0">
               <a:srgbClr val="000000">
                 <a:alpha val="8000"/>
               </a:srgbClr>
             </a:outerShdw>
           </a:effectLst>
         </p:spPr>
+        <p:txBody>
+          <a:bodyPr/>
+          <a:lstStyle/>
+          <a:p>
+            <a:endParaRPr lang="en-US"/>
+          </a:p>
+        </p:txBody>
       </p:sp>
       <p:sp>
         <p:nvSpPr>
@@ -4249,6 +4109,13 @@
           </a:solidFill>
           <a:ln/>
         </p:spPr>
+        <p:txBody>
+          <a:bodyPr/>
+          <a:lstStyle/>
+          <a:p>
+            <a:endParaRPr lang="en-US"/>
+          </a:p>
+        </p:txBody>
       </p:sp>
       <p:sp>
         <p:nvSpPr>
@@ -4271,7 +4138,7 @@
           <a:bodyPr wrap="square" lIns="0" tIns="0" rIns="0" bIns="0" rtlCol="0" anchor="ctr"/>
           <a:lstStyle/>
           <a:p>
-            <a:pPr indent="0" marL="0">
+            <a:pPr marL="0" indent="0">
               <a:buNone/>
             </a:pPr>
             <a:r>
@@ -4310,7 +4177,7 @@
           <a:bodyPr wrap="square" lIns="0" tIns="0" rIns="0" bIns="0" rtlCol="0" anchor="ctr"/>
           <a:lstStyle/>
           <a:p>
-            <a:pPr indent="0" marL="0">
+            <a:pPr marL="0" indent="0">
               <a:buNone/>
             </a:pPr>
             <a:r>
@@ -4349,7 +4216,7 @@
           <a:bodyPr wrap="square" lIns="0" tIns="0" rIns="0" bIns="0" rtlCol="0" anchor="ctr"/>
           <a:lstStyle/>
           <a:p>
-            <a:pPr indent="0" marL="0">
+            <a:pPr marL="0" indent="0">
               <a:buNone/>
             </a:pPr>
             <a:r>
@@ -4391,13 +4258,20 @@
             <a:prstDash val="solid"/>
           </a:ln>
           <a:effectLst>
-            <a:outerShdw sx="100000" sy="100000" kx="0" ky="0" algn="bl" rotWithShape="0" blurRad="76200" dist="25400" dir="5400000">
+            <a:outerShdw blurRad="76200" dist="25400" dir="5400000" algn="bl" rotWithShape="0">
               <a:srgbClr val="000000">
                 <a:alpha val="8000"/>
               </a:srgbClr>
             </a:outerShdw>
           </a:effectLst>
         </p:spPr>
+        <p:txBody>
+          <a:bodyPr/>
+          <a:lstStyle/>
+          <a:p>
+            <a:endParaRPr lang="en-US"/>
+          </a:p>
+        </p:txBody>
       </p:sp>
       <p:sp>
         <p:nvSpPr>
@@ -4418,6 +4292,13 @@
           </a:solidFill>
           <a:ln/>
         </p:spPr>
+        <p:txBody>
+          <a:bodyPr/>
+          <a:lstStyle/>
+          <a:p>
+            <a:endParaRPr lang="en-US"/>
+          </a:p>
+        </p:txBody>
       </p:sp>
       <p:sp>
         <p:nvSpPr>
@@ -4440,7 +4321,7 @@
           <a:bodyPr wrap="square" lIns="0" tIns="0" rIns="0" bIns="0" rtlCol="0" anchor="ctr"/>
           <a:lstStyle/>
           <a:p>
-            <a:pPr indent="0" marL="0">
+            <a:pPr marL="0" indent="0">
               <a:buNone/>
             </a:pPr>
             <a:r>
@@ -4479,7 +4360,7 @@
           <a:bodyPr wrap="square" lIns="0" tIns="0" rIns="0" bIns="0" rtlCol="0" anchor="ctr"/>
           <a:lstStyle/>
           <a:p>
-            <a:pPr indent="0" marL="0">
+            <a:pPr marL="0" indent="0">
               <a:buNone/>
             </a:pPr>
             <a:r>
@@ -4518,7 +4399,7 @@
           <a:bodyPr wrap="square" lIns="0" tIns="0" rIns="0" bIns="0" rtlCol="0" anchor="ctr"/>
           <a:lstStyle/>
           <a:p>
-            <a:pPr indent="0" marL="0">
+            <a:pPr marL="0" indent="0">
               <a:buNone/>
             </a:pPr>
             <a:r>
@@ -4560,13 +4441,20 @@
             <a:prstDash val="solid"/>
           </a:ln>
           <a:effectLst>
-            <a:outerShdw sx="100000" sy="100000" kx="0" ky="0" algn="bl" rotWithShape="0" blurRad="76200" dist="25400" dir="5400000">
+            <a:outerShdw blurRad="76200" dist="25400" dir="5400000" algn="bl" rotWithShape="0">
               <a:srgbClr val="000000">
                 <a:alpha val="8000"/>
               </a:srgbClr>
             </a:outerShdw>
           </a:effectLst>
         </p:spPr>
+        <p:txBody>
+          <a:bodyPr/>
+          <a:lstStyle/>
+          <a:p>
+            <a:endParaRPr lang="en-US"/>
+          </a:p>
+        </p:txBody>
       </p:sp>
       <p:sp>
         <p:nvSpPr>
@@ -4587,6 +4475,13 @@
           </a:solidFill>
           <a:ln/>
         </p:spPr>
+        <p:txBody>
+          <a:bodyPr/>
+          <a:lstStyle/>
+          <a:p>
+            <a:endParaRPr lang="en-US"/>
+          </a:p>
+        </p:txBody>
       </p:sp>
       <p:sp>
         <p:nvSpPr>
@@ -4609,7 +4504,7 @@
           <a:bodyPr wrap="square" lIns="0" tIns="0" rIns="0" bIns="0" rtlCol="0" anchor="ctr"/>
           <a:lstStyle/>
           <a:p>
-            <a:pPr indent="0" marL="0">
+            <a:pPr marL="0" indent="0">
               <a:buNone/>
             </a:pPr>
             <a:r>
@@ -4648,7 +4543,7 @@
           <a:bodyPr wrap="square" lIns="0" tIns="0" rIns="0" bIns="0" rtlCol="0" anchor="ctr"/>
           <a:lstStyle/>
           <a:p>
-            <a:pPr indent="0" marL="0">
+            <a:pPr marL="0" indent="0">
               <a:buNone/>
             </a:pPr>
             <a:r>
@@ -4687,7 +4582,7 @@
           <a:bodyPr wrap="square" lIns="0" tIns="0" rIns="0" bIns="0" rtlCol="0" anchor="ctr"/>
           <a:lstStyle/>
           <a:p>
-            <a:pPr indent="0" marL="0">
+            <a:pPr marL="0" indent="0">
               <a:buNone/>
             </a:pPr>
             <a:r>
@@ -4726,7 +4621,7 @@
           <a:bodyPr wrap="square" lIns="0" tIns="0" rIns="0" bIns="0" rtlCol="0" anchor="ctr"/>
           <a:lstStyle/>
           <a:p>
-            <a:pPr algn="ctr" indent="0" marL="0">
+            <a:pPr marL="0" indent="0" algn="ctr">
               <a:buNone/>
             </a:pPr>
             <a:r>
@@ -4760,6 +4655,7 @@
         <a:solidFill>
           <a:srgbClr val="F8FAFC"/>
         </a:solidFill>
+        <a:effectLst/>
       </p:bgPr>
     </p:bg>
     <p:spTree>
@@ -4797,7 +4693,7 @@
           <a:bodyPr wrap="square" lIns="0" tIns="0" rIns="0" bIns="0" rtlCol="0" anchor="ctr"/>
           <a:lstStyle/>
           <a:p>
-            <a:pPr indent="0" marL="0">
+            <a:pPr marL="0" indent="0">
               <a:buNone/>
             </a:pPr>
             <a:r>
@@ -4836,7 +4732,7 @@
           <a:bodyPr wrap="square" lIns="0" tIns="0" rIns="0" bIns="0" rtlCol="0" anchor="ctr"/>
           <a:lstStyle/>
           <a:p>
-            <a:pPr indent="0" marL="0">
+            <a:pPr marL="0" indent="0">
               <a:buNone/>
             </a:pPr>
             <a:r>
@@ -4873,6 +4769,13 @@
           </a:solidFill>
           <a:ln/>
         </p:spPr>
+        <p:txBody>
+          <a:bodyPr/>
+          <a:lstStyle/>
+          <a:p>
+            <a:endParaRPr lang="en-US"/>
+          </a:p>
+        </p:txBody>
       </p:sp>
       <p:sp>
         <p:nvSpPr>
@@ -4895,7 +4798,7 @@
           <a:bodyPr wrap="square" lIns="0" tIns="0" rIns="0" bIns="0" rtlCol="0" anchor="ctr"/>
           <a:lstStyle/>
           <a:p>
-            <a:pPr algn="ctr" indent="0" marL="0">
+            <a:pPr marL="0" indent="0" algn="ctr">
               <a:buNone/>
             </a:pPr>
             <a:r>
@@ -4932,6 +4835,13 @@
           </a:solidFill>
           <a:ln/>
         </p:spPr>
+        <p:txBody>
+          <a:bodyPr/>
+          <a:lstStyle/>
+          <a:p>
+            <a:endParaRPr lang="en-US"/>
+          </a:p>
+        </p:txBody>
       </p:sp>
       <p:sp>
         <p:nvSpPr>
@@ -4954,7 +4864,7 @@
           <a:bodyPr wrap="square" lIns="0" tIns="0" rIns="0" bIns="0" rtlCol="0" anchor="ctr"/>
           <a:lstStyle/>
           <a:p>
-            <a:pPr indent="0" marL="0">
+            <a:pPr marL="0" indent="0">
               <a:buNone/>
             </a:pPr>
             <a:r>
@@ -4993,7 +4903,7 @@
           <a:bodyPr wrap="square" lIns="0" tIns="0" rIns="0" bIns="0" rtlCol="0" anchor="ctr"/>
           <a:lstStyle/>
           <a:p>
-            <a:pPr indent="0" marL="0">
+            <a:pPr marL="0" indent="0">
               <a:buNone/>
             </a:pPr>
             <a:r>
@@ -5032,7 +4942,7 @@
           <a:bodyPr wrap="square" lIns="0" tIns="0" rIns="0" bIns="0" rtlCol="0" anchor="ctr"/>
           <a:lstStyle/>
           <a:p>
-            <a:pPr indent="0" marL="0">
+            <a:pPr marL="0" indent="0">
               <a:buNone/>
             </a:pPr>
             <a:r>
@@ -5069,6 +4979,13 @@
           </a:solidFill>
           <a:ln/>
         </p:spPr>
+        <p:txBody>
+          <a:bodyPr/>
+          <a:lstStyle/>
+          <a:p>
+            <a:endParaRPr lang="en-US"/>
+          </a:p>
+        </p:txBody>
       </p:sp>
       <p:sp>
         <p:nvSpPr>
@@ -5091,7 +5008,7 @@
           <a:bodyPr wrap="square" lIns="0" tIns="0" rIns="0" bIns="0" rtlCol="0" anchor="ctr"/>
           <a:lstStyle/>
           <a:p>
-            <a:pPr algn="ctr" indent="0" marL="0">
+            <a:pPr marL="0" indent="0" algn="ctr">
               <a:buNone/>
             </a:pPr>
             <a:r>
@@ -5128,6 +5045,13 @@
           </a:solidFill>
           <a:ln/>
         </p:spPr>
+        <p:txBody>
+          <a:bodyPr/>
+          <a:lstStyle/>
+          <a:p>
+            <a:endParaRPr lang="en-US"/>
+          </a:p>
+        </p:txBody>
       </p:sp>
       <p:sp>
         <p:nvSpPr>
@@ -5150,7 +5074,7 @@
           <a:bodyPr wrap="square" lIns="0" tIns="0" rIns="0" bIns="0" rtlCol="0" anchor="ctr"/>
           <a:lstStyle/>
           <a:p>
-            <a:pPr indent="0" marL="0">
+            <a:pPr marL="0" indent="0">
               <a:buNone/>
             </a:pPr>
             <a:r>
@@ -5189,7 +5113,7 @@
           <a:bodyPr wrap="square" lIns="0" tIns="0" rIns="0" bIns="0" rtlCol="0" anchor="ctr"/>
           <a:lstStyle/>
           <a:p>
-            <a:pPr indent="0" marL="0">
+            <a:pPr marL="0" indent="0">
               <a:buNone/>
             </a:pPr>
             <a:r>
@@ -5228,7 +5152,7 @@
           <a:bodyPr wrap="square" lIns="0" tIns="0" rIns="0" bIns="0" rtlCol="0" anchor="ctr"/>
           <a:lstStyle/>
           <a:p>
-            <a:pPr indent="0" marL="0">
+            <a:pPr marL="0" indent="0">
               <a:buNone/>
             </a:pPr>
             <a:r>
@@ -5265,6 +5189,13 @@
           </a:solidFill>
           <a:ln/>
         </p:spPr>
+        <p:txBody>
+          <a:bodyPr/>
+          <a:lstStyle/>
+          <a:p>
+            <a:endParaRPr lang="en-US"/>
+          </a:p>
+        </p:txBody>
       </p:sp>
       <p:sp>
         <p:nvSpPr>
@@ -5287,7 +5218,7 @@
           <a:bodyPr wrap="square" lIns="0" tIns="0" rIns="0" bIns="0" rtlCol="0" anchor="ctr"/>
           <a:lstStyle/>
           <a:p>
-            <a:pPr algn="ctr" indent="0" marL="0">
+            <a:pPr marL="0" indent="0" algn="ctr">
               <a:buNone/>
             </a:pPr>
             <a:r>
@@ -5324,6 +5255,13 @@
           </a:solidFill>
           <a:ln/>
         </p:spPr>
+        <p:txBody>
+          <a:bodyPr/>
+          <a:lstStyle/>
+          <a:p>
+            <a:endParaRPr lang="en-US"/>
+          </a:p>
+        </p:txBody>
       </p:sp>
       <p:sp>
         <p:nvSpPr>
@@ -5346,7 +5284,7 @@
           <a:bodyPr wrap="square" lIns="0" tIns="0" rIns="0" bIns="0" rtlCol="0" anchor="ctr"/>
           <a:lstStyle/>
           <a:p>
-            <a:pPr indent="0" marL="0">
+            <a:pPr marL="0" indent="0">
               <a:buNone/>
             </a:pPr>
             <a:r>
@@ -5385,7 +5323,7 @@
           <a:bodyPr wrap="square" lIns="0" tIns="0" rIns="0" bIns="0" rtlCol="0" anchor="ctr"/>
           <a:lstStyle/>
           <a:p>
-            <a:pPr indent="0" marL="0">
+            <a:pPr marL="0" indent="0">
               <a:buNone/>
             </a:pPr>
             <a:r>
@@ -5424,7 +5362,7 @@
           <a:bodyPr wrap="square" lIns="0" tIns="0" rIns="0" bIns="0" rtlCol="0" anchor="ctr"/>
           <a:lstStyle/>
           <a:p>
-            <a:pPr indent="0" marL="0">
+            <a:pPr marL="0" indent="0">
               <a:buNone/>
             </a:pPr>
             <a:r>
@@ -5461,6 +5399,13 @@
           </a:solidFill>
           <a:ln/>
         </p:spPr>
+        <p:txBody>
+          <a:bodyPr/>
+          <a:lstStyle/>
+          <a:p>
+            <a:endParaRPr lang="en-US"/>
+          </a:p>
+        </p:txBody>
       </p:sp>
       <p:sp>
         <p:nvSpPr>
@@ -5483,7 +5428,7 @@
           <a:bodyPr wrap="square" lIns="0" tIns="0" rIns="0" bIns="0" rtlCol="0" anchor="ctr"/>
           <a:lstStyle/>
           <a:p>
-            <a:pPr algn="ctr" indent="0" marL="0">
+            <a:pPr marL="0" indent="0" algn="ctr">
               <a:buNone/>
             </a:pPr>
             <a:r>
@@ -5520,6 +5465,13 @@
           </a:solidFill>
           <a:ln/>
         </p:spPr>
+        <p:txBody>
+          <a:bodyPr/>
+          <a:lstStyle/>
+          <a:p>
+            <a:endParaRPr lang="en-US"/>
+          </a:p>
+        </p:txBody>
       </p:sp>
       <p:sp>
         <p:nvSpPr>
@@ -5542,7 +5494,7 @@
           <a:bodyPr wrap="square" lIns="0" tIns="0" rIns="0" bIns="0" rtlCol="0" anchor="ctr"/>
           <a:lstStyle/>
           <a:p>
-            <a:pPr indent="0" marL="0">
+            <a:pPr marL="0" indent="0">
               <a:buNone/>
             </a:pPr>
             <a:r>
@@ -5581,7 +5533,7 @@
           <a:bodyPr wrap="square" lIns="0" tIns="0" rIns="0" bIns="0" rtlCol="0" anchor="ctr"/>
           <a:lstStyle/>
           <a:p>
-            <a:pPr indent="0" marL="0">
+            <a:pPr marL="0" indent="0">
               <a:buNone/>
             </a:pPr>
             <a:r>
@@ -5620,7 +5572,7 @@
           <a:bodyPr wrap="square" lIns="0" tIns="0" rIns="0" bIns="0" rtlCol="0" anchor="ctr"/>
           <a:lstStyle/>
           <a:p>
-            <a:pPr indent="0" marL="0">
+            <a:pPr marL="0" indent="0">
               <a:buNone/>
             </a:pPr>
             <a:r>
@@ -5657,6 +5609,13 @@
           </a:solidFill>
           <a:ln/>
         </p:spPr>
+        <p:txBody>
+          <a:bodyPr/>
+          <a:lstStyle/>
+          <a:p>
+            <a:endParaRPr lang="en-US"/>
+          </a:p>
+        </p:txBody>
       </p:sp>
       <p:sp>
         <p:nvSpPr>
@@ -5679,7 +5638,7 @@
           <a:bodyPr wrap="square" lIns="0" tIns="0" rIns="0" bIns="0" rtlCol="0" anchor="ctr"/>
           <a:lstStyle/>
           <a:p>
-            <a:pPr algn="ctr" indent="0" marL="0">
+            <a:pPr marL="0" indent="0" algn="ctr">
               <a:buNone/>
             </a:pPr>
             <a:r>
@@ -5716,6 +5675,13 @@
           </a:solidFill>
           <a:ln/>
         </p:spPr>
+        <p:txBody>
+          <a:bodyPr/>
+          <a:lstStyle/>
+          <a:p>
+            <a:endParaRPr lang="en-US"/>
+          </a:p>
+        </p:txBody>
       </p:sp>
       <p:sp>
         <p:nvSpPr>
@@ -5738,7 +5704,7 @@
           <a:bodyPr wrap="square" lIns="0" tIns="0" rIns="0" bIns="0" rtlCol="0" anchor="ctr"/>
           <a:lstStyle/>
           <a:p>
-            <a:pPr indent="0" marL="0">
+            <a:pPr marL="0" indent="0">
               <a:buNone/>
             </a:pPr>
             <a:r>
@@ -5777,7 +5743,7 @@
           <a:bodyPr wrap="square" lIns="0" tIns="0" rIns="0" bIns="0" rtlCol="0" anchor="ctr"/>
           <a:lstStyle/>
           <a:p>
-            <a:pPr indent="0" marL="0">
+            <a:pPr marL="0" indent="0">
               <a:buNone/>
             </a:pPr>
             <a:r>
@@ -5816,7 +5782,7 @@
           <a:bodyPr wrap="square" lIns="0" tIns="0" rIns="0" bIns="0" rtlCol="0" anchor="ctr"/>
           <a:lstStyle/>
           <a:p>
-            <a:pPr indent="0" marL="0">
+            <a:pPr marL="0" indent="0">
               <a:buNone/>
             </a:pPr>
             <a:r>
@@ -5855,7 +5821,7 @@
           <a:bodyPr wrap="square" lIns="0" tIns="0" rIns="0" bIns="0" rtlCol="0" anchor="ctr"/>
           <a:lstStyle/>
           <a:p>
-            <a:pPr algn="ctr" indent="0" marL="0">
+            <a:pPr marL="0" indent="0" algn="ctr">
               <a:buNone/>
             </a:pPr>
             <a:r>
@@ -5892,6 +5858,13 @@
           </a:solidFill>
           <a:ln/>
         </p:spPr>
+        <p:txBody>
+          <a:bodyPr/>
+          <a:lstStyle/>
+          <a:p>
+            <a:endParaRPr lang="en-US"/>
+          </a:p>
+        </p:txBody>
       </p:sp>
       <p:sp>
         <p:nvSpPr>
@@ -5912,6 +5885,13 @@
           </a:solidFill>
           <a:ln/>
         </p:spPr>
+        <p:txBody>
+          <a:bodyPr/>
+          <a:lstStyle/>
+          <a:p>
+            <a:endParaRPr lang="en-US"/>
+          </a:p>
+        </p:txBody>
       </p:sp>
       <p:sp>
         <p:nvSpPr>
@@ -5934,7 +5914,7 @@
           <a:bodyPr wrap="square" lIns="0" tIns="0" rIns="0" bIns="0" rtlCol="0" anchor="ctr"/>
           <a:lstStyle/>
           <a:p>
-            <a:pPr indent="0" marL="0">
+            <a:pPr marL="0" indent="0">
               <a:buNone/>
             </a:pPr>
             <a:r>
@@ -5968,6 +5948,7 @@
         <a:solidFill>
           <a:srgbClr val="F8FAFC"/>
         </a:solidFill>
+        <a:effectLst/>
       </p:bgPr>
     </p:bg>
     <p:spTree>
@@ -6005,7 +5986,7 @@
           <a:bodyPr wrap="square" lIns="0" tIns="0" rIns="0" bIns="0" rtlCol="0" anchor="ctr"/>
           <a:lstStyle/>
           <a:p>
-            <a:pPr indent="0" marL="0">
+            <a:pPr marL="0" indent="0">
               <a:buNone/>
             </a:pPr>
             <a:r>
@@ -6025,15 +6006,15 @@
       </p:sp>
       <p:pic>
         <p:nvPicPr>
-          <p:cNvPr id="3" name="Image 0" descr="/home/claude/diagrams/schema_slide.png">    </p:cNvPr>
+          <p:cNvPr id="3" name="Image 0" descr="/home/claude/diagrams/schema_slide.png"/>
           <p:cNvPicPr>
             <a:picLocks noChangeAspect="1"/>
           </p:cNvPicPr>
           <p:nvPr/>
         </p:nvPicPr>
         <p:blipFill>
-          <a:blip r:embed="rId1"/>
-          <a:srcRect l="0" r="0" t="0" b="0"/>
+          <a:blip r:embed="rId3"/>
+          <a:srcRect/>
           <a:stretch/>
         </p:blipFill>
         <p:spPr>
@@ -6067,7 +6048,7 @@
           <a:bodyPr wrap="square" lIns="0" tIns="0" rIns="0" bIns="0" rtlCol="0" anchor="ctr"/>
           <a:lstStyle/>
           <a:p>
-            <a:pPr indent="0" marL="0">
+            <a:pPr marL="0" indent="0">
               <a:buNone/>
             </a:pPr>
             <a:r>
@@ -6101,6 +6082,7 @@
         <a:solidFill>
           <a:srgbClr val="F8FAFC"/>
         </a:solidFill>
+        <a:effectLst/>
       </p:bgPr>
     </p:bg>
     <p:spTree>
@@ -6138,7 +6120,7 @@
           <a:bodyPr wrap="square" lIns="0" tIns="0" rIns="0" bIns="0" rtlCol="0" anchor="ctr"/>
           <a:lstStyle/>
           <a:p>
-            <a:pPr indent="0" marL="0">
+            <a:pPr marL="0" indent="0">
               <a:buNone/>
             </a:pPr>
             <a:r>
@@ -6177,7 +6159,7 @@
           <a:bodyPr wrap="square" lIns="0" tIns="0" rIns="0" bIns="0" rtlCol="0" anchor="ctr"/>
           <a:lstStyle/>
           <a:p>
-            <a:pPr indent="0" marL="0">
+            <a:pPr marL="0" indent="0">
               <a:buNone/>
             </a:pPr>
             <a:r>
@@ -6214,6 +6196,13 @@
           </a:solidFill>
           <a:ln/>
         </p:spPr>
+        <p:txBody>
+          <a:bodyPr/>
+          <a:lstStyle/>
+          <a:p>
+            <a:endParaRPr lang="en-US"/>
+          </a:p>
+        </p:txBody>
       </p:sp>
       <p:sp>
         <p:nvSpPr>
@@ -6236,7 +6225,7 @@
           <a:bodyPr wrap="square" lIns="0" tIns="0" rIns="0" bIns="0" rtlCol="0" anchor="t"/>
           <a:lstStyle/>
           <a:p>
-            <a:pPr indent="0" marL="0">
+            <a:pPr marL="0" indent="0">
               <a:buNone/>
             </a:pPr>
             <a:r>
@@ -6251,9 +6240,6 @@
               <a:t># app/business_logic.py
 </a:t>
             </a:r>
-            <a:pPr indent="0" marL="0">
-              <a:buNone/>
-            </a:pPr>
             <a:r>
               <a:rPr lang="en-US" sz="1000" dirty="0">
                 <a:solidFill>
@@ -6266,9 +6252,6 @@
               <a:t>def borrow_book(self, member_id, book_id):
 </a:t>
             </a:r>
-            <a:pPr indent="0" marL="0">
-              <a:buNone/>
-            </a:pPr>
             <a:r>
               <a:rPr lang="en-US" sz="1000" dirty="0">
                 <a:solidFill>
@@ -6279,193 +6262,160 @@
                 <a:cs typeface="Consolas" pitchFamily="34" charset="-120"/>
               </a:rPr>
               <a:t>    dto = CreateLoanDTO(member_id=member_id, book_id=book_id)
-</a:t>
-            </a:r>
-            <a:pPr indent="0" marL="0">
-              <a:buNone/>
-            </a:pPr>
+    validate_new_loan(dto)        </a:t>
+            </a:r>
             <a:r>
               <a:rPr lang="en-US" sz="1000" dirty="0">
                 <a:solidFill>
-                  <a:srgbClr val="E2E8F0"/>
+                  <a:srgbClr val="94A3B8"/>
                 </a:solidFill>
                 <a:latin typeface="Consolas" pitchFamily="34" charset="0"/>
                 <a:ea typeface="Consolas" pitchFamily="34" charset="-122"/>
                 <a:cs typeface="Consolas" pitchFamily="34" charset="-120"/>
               </a:rPr>
-              <a:t>    validate_new_loan(dto)        </a:t>
-            </a:r>
-            <a:pPr indent="0" marL="0">
-              <a:buNone/>
-            </a:pPr>
+              <a:t># raises if invalid
+</a:t>
+            </a:r>
             <a:r>
               <a:rPr lang="en-US" sz="1000" dirty="0">
                 <a:solidFill>
-                  <a:srgbClr val="94A3B8"/>
+                  <a:srgbClr val="E2E8F0"/>
                 </a:solidFill>
                 <a:latin typeface="Consolas" pitchFamily="34" charset="0"/>
                 <a:ea typeface="Consolas" pitchFamily="34" charset="-122"/>
                 <a:cs typeface="Consolas" pitchFamily="34" charset="-120"/>
               </a:rPr>
-              <a:t># raises if invalid
-</a:t>
-            </a:r>
-            <a:pPr indent="0" marL="0">
+              <a:t>    return self.dal.borrow_book(dto)</a:t>
+            </a:r>
+            <a:endParaRPr lang="en-US" sz="1000" dirty="0"/>
+          </a:p>
+        </p:txBody>
+      </p:sp>
+      <p:sp>
+        <p:nvSpPr>
+          <p:cNvPr id="6" name="Text 4"/>
+          <p:cNvSpPr/>
+          <p:nvPr/>
+        </p:nvSpPr>
+        <p:spPr>
+          <a:xfrm>
+            <a:off x="457200" y="2926080"/>
+            <a:ext cx="8229600" cy="320040"/>
+          </a:xfrm>
+          <a:prstGeom prst="rect">
+            <a:avLst/>
+          </a:prstGeom>
+          <a:noFill/>
+          <a:ln/>
+        </p:spPr>
+        <p:txBody>
+          <a:bodyPr wrap="square" lIns="0" tIns="0" rIns="0" bIns="0" rtlCol="0" anchor="ctr"/>
+          <a:lstStyle/>
+          <a:p>
+            <a:pPr marL="0" indent="0">
+              <a:buNone/>
+            </a:pPr>
+            <a:r>
+              <a:rPr lang="en-US" sz="1200" dirty="0">
+                <a:solidFill>
+                  <a:srgbClr val="1E293B"/>
+                </a:solidFill>
+                <a:latin typeface="Calibri" pitchFamily="34" charset="0"/>
+                <a:ea typeface="Calibri" pitchFamily="34" charset="-122"/>
+                <a:cs typeface="Calibri" pitchFamily="34" charset="-120"/>
+              </a:rPr>
+              <a:t>Η σελίδα GUI απλά καλεί τη μέθοδο — μία γραμμή:</a:t>
+            </a:r>
+            <a:endParaRPr lang="en-US" sz="1200" dirty="0"/>
+          </a:p>
+        </p:txBody>
+      </p:sp>
+      <p:sp>
+        <p:nvSpPr>
+          <p:cNvPr id="7" name="Shape 5"/>
+          <p:cNvSpPr/>
+          <p:nvPr/>
+        </p:nvSpPr>
+        <p:spPr>
+          <a:xfrm>
+            <a:off x="457200" y="3291840"/>
+            <a:ext cx="8229600" cy="1143000"/>
+          </a:xfrm>
+          <a:prstGeom prst="rect">
+            <a:avLst/>
+          </a:prstGeom>
+          <a:solidFill>
+            <a:srgbClr val="1E293B"/>
+          </a:solidFill>
+          <a:ln/>
+        </p:spPr>
+        <p:txBody>
+          <a:bodyPr/>
+          <a:lstStyle/>
+          <a:p>
+            <a:endParaRPr lang="en-US"/>
+          </a:p>
+        </p:txBody>
+      </p:sp>
+      <p:sp>
+        <p:nvSpPr>
+          <p:cNvPr id="8" name="Text 6"/>
+          <p:cNvSpPr/>
+          <p:nvPr/>
+        </p:nvSpPr>
+        <p:spPr>
+          <a:xfrm>
+            <a:off x="594360" y="3383280"/>
+            <a:ext cx="7955280" cy="960120"/>
+          </a:xfrm>
+          <a:prstGeom prst="rect">
+            <a:avLst/>
+          </a:prstGeom>
+          <a:noFill/>
+          <a:ln/>
+        </p:spPr>
+        <p:txBody>
+          <a:bodyPr wrap="square" lIns="0" tIns="0" rIns="0" bIns="0" rtlCol="0" anchor="t"/>
+          <a:lstStyle/>
+          <a:p>
+            <a:pPr marL="0" indent="0">
               <a:buNone/>
             </a:pPr>
             <a:r>
               <a:rPr lang="en-US" sz="1000" dirty="0">
                 <a:solidFill>
-                  <a:srgbClr val="E2E8F0"/>
+                  <a:srgbClr val="94A3B8"/>
                 </a:solidFill>
                 <a:latin typeface="Consolas" pitchFamily="34" charset="0"/>
                 <a:ea typeface="Consolas" pitchFamily="34" charset="-122"/>
                 <a:cs typeface="Consolas" pitchFamily="34" charset="-120"/>
               </a:rPr>
-              <a:t>    return self.dal.borrow_book(dto)</a:t>
-            </a:r>
-            <a:endParaRPr lang="en-US" sz="1000" dirty="0"/>
-          </a:p>
-        </p:txBody>
-      </p:sp>
-      <p:sp>
-        <p:nvSpPr>
-          <p:cNvPr id="6" name="Text 4"/>
-          <p:cNvSpPr/>
-          <p:nvPr/>
-        </p:nvSpPr>
-        <p:spPr>
-          <a:xfrm>
-            <a:off x="457200" y="2926080"/>
-            <a:ext cx="8229600" cy="320040"/>
-          </a:xfrm>
-          <a:prstGeom prst="rect">
-            <a:avLst/>
-          </a:prstGeom>
-          <a:noFill/>
-          <a:ln/>
-        </p:spPr>
-        <p:txBody>
-          <a:bodyPr wrap="square" lIns="0" tIns="0" rIns="0" bIns="0" rtlCol="0" anchor="ctr"/>
-          <a:lstStyle/>
-          <a:p>
-            <a:pPr indent="0" marL="0">
-              <a:buNone/>
-            </a:pPr>
-            <a:r>
-              <a:rPr lang="en-US" sz="1200" dirty="0">
-                <a:solidFill>
-                  <a:srgbClr val="1E293B"/>
-                </a:solidFill>
-                <a:latin typeface="Calibri" pitchFamily="34" charset="0"/>
-                <a:ea typeface="Calibri" pitchFamily="34" charset="-122"/>
-                <a:cs typeface="Calibri" pitchFamily="34" charset="-120"/>
-              </a:rPr>
-              <a:t>Η σελίδα GUI απλά καλεί τη μέθοδο — μία γραμμή:</a:t>
-            </a:r>
-            <a:endParaRPr lang="en-US" sz="1200" dirty="0"/>
-          </a:p>
-        </p:txBody>
-      </p:sp>
-      <p:sp>
-        <p:nvSpPr>
-          <p:cNvPr id="7" name="Shape 5"/>
-          <p:cNvSpPr/>
-          <p:nvPr/>
-        </p:nvSpPr>
-        <p:spPr>
-          <a:xfrm>
-            <a:off x="457200" y="3291840"/>
-            <a:ext cx="8229600" cy="1143000"/>
-          </a:xfrm>
-          <a:prstGeom prst="rect">
-            <a:avLst/>
-          </a:prstGeom>
-          <a:solidFill>
-            <a:srgbClr val="1E293B"/>
-          </a:solidFill>
-          <a:ln/>
-        </p:spPr>
-      </p:sp>
-      <p:sp>
-        <p:nvSpPr>
-          <p:cNvPr id="8" name="Text 6"/>
-          <p:cNvSpPr/>
-          <p:nvPr/>
-        </p:nvSpPr>
-        <p:spPr>
-          <a:xfrm>
-            <a:off x="594360" y="3383280"/>
-            <a:ext cx="7955280" cy="960120"/>
-          </a:xfrm>
-          <a:prstGeom prst="rect">
-            <a:avLst/>
-          </a:prstGeom>
-          <a:noFill/>
-          <a:ln/>
-        </p:spPr>
-        <p:txBody>
-          <a:bodyPr wrap="square" lIns="0" tIns="0" rIns="0" bIns="0" rtlCol="0" anchor="t"/>
-          <a:lstStyle/>
-          <a:p>
-            <a:pPr indent="0" marL="0">
-              <a:buNone/>
-            </a:pPr>
+              <a:t># gui/Loans_Page.py
+</a:t>
+            </a:r>
             <a:r>
               <a:rPr lang="en-US" sz="1000" dirty="0">
                 <a:solidFill>
-                  <a:srgbClr val="94A3B8"/>
+                  <a:srgbClr val="7DD3FC"/>
                 </a:solidFill>
                 <a:latin typeface="Consolas" pitchFamily="34" charset="0"/>
                 <a:ea typeface="Consolas" pitchFamily="34" charset="-122"/>
                 <a:cs typeface="Consolas" pitchFamily="34" charset="-120"/>
               </a:rPr>
-              <a:t># gui/Loans_Page.py
+              <a:t>def borrow_book(self):
 </a:t>
             </a:r>
-            <a:pPr indent="0" marL="0">
-              <a:buNone/>
-            </a:pPr>
             <a:r>
               <a:rPr lang="en-US" sz="1000" dirty="0">
                 <a:solidFill>
-                  <a:srgbClr val="7DD3FC"/>
+                  <a:srgbClr val="E2E8F0"/>
                 </a:solidFill>
                 <a:latin typeface="Consolas" pitchFamily="34" charset="0"/>
                 <a:ea typeface="Consolas" pitchFamily="34" charset="-122"/>
                 <a:cs typeface="Consolas" pitchFamily="34" charset="-120"/>
               </a:rPr>
-              <a:t>def borrow_book(self):
-</a:t>
-            </a:r>
-            <a:pPr indent="0" marL="0">
-              <a:buNone/>
-            </a:pPr>
-            <a:r>
-              <a:rPr lang="en-US" sz="1000" dirty="0">
-                <a:solidFill>
-                  <a:srgbClr val="E2E8F0"/>
-                </a:solidFill>
-                <a:latin typeface="Consolas" pitchFamily="34" charset="0"/>
-                <a:ea typeface="Consolas" pitchFamily="34" charset="-122"/>
-                <a:cs typeface="Consolas" pitchFamily="34" charset="-120"/>
-              </a:rPr>
               <a:t>    self.service.borrow_book(member_id, book_id)
-</a:t>
-            </a:r>
-            <a:pPr indent="0" marL="0">
-              <a:buNone/>
-            </a:pPr>
-            <a:r>
-              <a:rPr lang="en-US" sz="1000" dirty="0">
-                <a:solidFill>
-                  <a:srgbClr val="E2E8F0"/>
-                </a:solidFill>
-                <a:latin typeface="Consolas" pitchFamily="34" charset="0"/>
-                <a:ea typeface="Consolas" pitchFamily="34" charset="-122"/>
-                <a:cs typeface="Consolas" pitchFamily="34" charset="-120"/>
-              </a:rPr>
-              <a:t>    self.refresh_all()</a:t>
+    self.refresh_all()</a:t>
             </a:r>
             <a:endParaRPr lang="en-US" sz="1000" dirty="0"/>
           </a:p>
@@ -6492,7 +6442,7 @@
           <a:bodyPr wrap="square" lIns="0" tIns="0" rIns="0" bIns="0" rtlCol="0" anchor="ctr"/>
           <a:lstStyle/>
           <a:p>
-            <a:pPr indent="0" marL="0">
+            <a:pPr marL="0" indent="0">
               <a:buNone/>
             </a:pPr>
             <a:r>
@@ -6526,6 +6476,7 @@
         <a:solidFill>
           <a:srgbClr val="F8FAFC"/>
         </a:solidFill>
+        <a:effectLst/>
       </p:bgPr>
     </p:bg>
     <p:spTree>
@@ -6563,7 +6514,7 @@
           <a:bodyPr wrap="square" lIns="0" tIns="0" rIns="0" bIns="0" rtlCol="0" anchor="ctr"/>
           <a:lstStyle/>
           <a:p>
-            <a:pPr indent="0" marL="0">
+            <a:pPr marL="0" indent="0">
               <a:buNone/>
             </a:pPr>
             <a:r>
@@ -6602,7 +6553,7 @@
           <a:bodyPr wrap="square" lIns="0" tIns="0" rIns="0" bIns="0" rtlCol="0" anchor="ctr"/>
           <a:lstStyle/>
           <a:p>
-            <a:pPr indent="0" marL="0">
+            <a:pPr marL="0" indent="0">
               <a:buNone/>
             </a:pPr>
             <a:r>
@@ -6639,6 +6590,13 @@
           </a:solidFill>
           <a:ln/>
         </p:spPr>
+        <p:txBody>
+          <a:bodyPr/>
+          <a:lstStyle/>
+          <a:p>
+            <a:endParaRPr lang="en-US"/>
+          </a:p>
+        </p:txBody>
       </p:sp>
       <p:sp>
         <p:nvSpPr>
@@ -6661,7 +6619,7 @@
           <a:bodyPr wrap="square" lIns="0" tIns="0" rIns="0" bIns="0" rtlCol="0" anchor="t"/>
           <a:lstStyle/>
           <a:p>
-            <a:pPr indent="0" marL="0">
+            <a:pPr marL="0" indent="0">
               <a:buNone/>
             </a:pPr>
             <a:r>
@@ -6676,9 +6634,6 @@
               <a:t># app/dal.py
 </a:t>
             </a:r>
-            <a:pPr indent="0" marL="0">
-              <a:buNone/>
-            </a:pPr>
             <a:r>
               <a:rPr lang="en-US" sz="1000" dirty="0">
                 <a:solidFill>
@@ -6691,9 +6646,6 @@
               <a:t>def borrow_book(self, dto: CreateLoanDTO) -&gt; LoanResponseDTO:
 </a:t>
             </a:r>
-            <a:pPr indent="0" marL="0">
-              <a:buNone/>
-            </a:pPr>
             <a:r>
               <a:rPr lang="en-US" sz="1000" dirty="0">
                 <a:solidFill>
@@ -6704,146 +6656,119 @@
                 <a:cs typeface="Consolas" pitchFamily="34" charset="-120"/>
               </a:rPr>
               <a:t>    loan_date = date.today()
+    due_date  = loan_date + timedelta(days=14)
 </a:t>
             </a:r>
-            <a:pPr indent="0" marL="0">
-              <a:buNone/>
-            </a:pPr>
             <a:r>
               <a:rPr lang="en-US" sz="1000" dirty="0">
                 <a:solidFill>
-                  <a:srgbClr val="E2E8F0"/>
+                  <a:srgbClr val="000000"/>
                 </a:solidFill>
                 <a:latin typeface="Consolas" pitchFamily="34" charset="0"/>
                 <a:ea typeface="Consolas" pitchFamily="34" charset="-122"/>
                 <a:cs typeface="Consolas" pitchFamily="34" charset="-120"/>
               </a:rPr>
-              <a:t>    due_date  = loan_date + timedelta(days=14)
+              <a:t>
 </a:t>
             </a:r>
-            <a:pPr indent="0" marL="0">
-              <a:buNone/>
-            </a:pPr>
             <a:r>
               <a:rPr lang="en-US" sz="1000" dirty="0">
                 <a:solidFill>
-                  <a:srgbClr val="000000"/>
+                  <a:srgbClr val="E2E8F0"/>
                 </a:solidFill>
                 <a:latin typeface="Consolas" pitchFamily="34" charset="0"/>
                 <a:ea typeface="Consolas" pitchFamily="34" charset="-122"/>
                 <a:cs typeface="Consolas" pitchFamily="34" charset="-120"/>
               </a:rPr>
-              <a:t>
+              <a:t>    with self.db.get_connection() as connection:
 </a:t>
             </a:r>
-            <a:pPr indent="0" marL="0">
-              <a:buNone/>
-            </a:pPr>
             <a:r>
               <a:rPr lang="en-US" sz="1000" dirty="0">
                 <a:solidFill>
-                  <a:srgbClr val="E2E8F0"/>
+                  <a:srgbClr val="94A3B8"/>
                 </a:solidFill>
                 <a:latin typeface="Consolas" pitchFamily="34" charset="0"/>
                 <a:ea typeface="Consolas" pitchFamily="34" charset="-122"/>
                 <a:cs typeface="Consolas" pitchFamily="34" charset="-120"/>
               </a:rPr>
-              <a:t>    with self.db.get_connection() as connection:
+              <a:t>        # 1) έλεγχος μέλους (active?) και βιβλίου (διαθέσιμο?)
 </a:t>
             </a:r>
-            <a:pPr indent="0" marL="0">
-              <a:buNone/>
-            </a:pPr>
             <a:r>
               <a:rPr lang="en-US" sz="1000" dirty="0">
                 <a:solidFill>
-                  <a:srgbClr val="94A3B8"/>
+                  <a:srgbClr val="E2E8F0"/>
                 </a:solidFill>
                 <a:latin typeface="Consolas" pitchFamily="34" charset="0"/>
                 <a:ea typeface="Consolas" pitchFamily="34" charset="-122"/>
                 <a:cs typeface="Consolas" pitchFamily="34" charset="-120"/>
               </a:rPr>
-              <a:t>        # 1) έλεγχος μέλους (active?) και βιβλίου (διαθέσιμο?)
+              <a:t>        ...
 </a:t>
             </a:r>
-            <a:pPr indent="0" marL="0">
-              <a:buNone/>
-            </a:pPr>
             <a:r>
               <a:rPr lang="en-US" sz="1000" dirty="0">
                 <a:solidFill>
-                  <a:srgbClr val="E2E8F0"/>
+                  <a:srgbClr val="94A3B8"/>
                 </a:solidFill>
                 <a:latin typeface="Consolas" pitchFamily="34" charset="0"/>
                 <a:ea typeface="Consolas" pitchFamily="34" charset="-122"/>
                 <a:cs typeface="Consolas" pitchFamily="34" charset="-120"/>
               </a:rPr>
-              <a:t>        ...
+              <a:t>        # 2) INSERT loan
 </a:t>
             </a:r>
-            <a:pPr indent="0" marL="0">
-              <a:buNone/>
-            </a:pPr>
             <a:r>
               <a:rPr lang="en-US" sz="1000" dirty="0">
                 <a:solidFill>
-                  <a:srgbClr val="94A3B8"/>
+                  <a:srgbClr val="E2E8F0"/>
                 </a:solidFill>
                 <a:latin typeface="Consolas" pitchFamily="34" charset="0"/>
                 <a:ea typeface="Consolas" pitchFamily="34" charset="-122"/>
                 <a:cs typeface="Consolas" pitchFamily="34" charset="-120"/>
               </a:rPr>
-              <a:t>        # 2) INSERT loan
+              <a:t>        cursor = connection.execute(
 </a:t>
             </a:r>
-            <a:pPr indent="0" marL="0">
-              <a:buNone/>
-            </a:pPr>
             <a:r>
               <a:rPr lang="en-US" sz="1000" dirty="0">
                 <a:solidFill>
-                  <a:srgbClr val="E2E8F0"/>
+                  <a:srgbClr val="FDE68A"/>
                 </a:solidFill>
                 <a:latin typeface="Consolas" pitchFamily="34" charset="0"/>
                 <a:ea typeface="Consolas" pitchFamily="34" charset="-122"/>
                 <a:cs typeface="Consolas" pitchFamily="34" charset="-120"/>
               </a:rPr>
-              <a:t>        cursor = connection.execute(
+              <a:t>            "INSERT INTO loans (member_id, book_id, loan_date,
+                                due_date, status) VALUES (?,?,?,?,'borrowed')",
 </a:t>
             </a:r>
-            <a:pPr indent="0" marL="0">
-              <a:buNone/>
-            </a:pPr>
             <a:r>
               <a:rPr lang="en-US" sz="1000" dirty="0">
                 <a:solidFill>
-                  <a:srgbClr val="FDE68A"/>
+                  <a:srgbClr val="E2E8F0"/>
                 </a:solidFill>
                 <a:latin typeface="Consolas" pitchFamily="34" charset="0"/>
                 <a:ea typeface="Consolas" pitchFamily="34" charset="-122"/>
                 <a:cs typeface="Consolas" pitchFamily="34" charset="-120"/>
               </a:rPr>
-              <a:t>            "INSERT INTO loans (member_id, book_id, loan_date,
+              <a:t>            (dto.member_id, dto.book_id,
+             loan_date.isoformat(), due_date.isoformat()))
 </a:t>
             </a:r>
-            <a:pPr indent="0" marL="0">
-              <a:buNone/>
-            </a:pPr>
             <a:r>
               <a:rPr lang="en-US" sz="1000" dirty="0">
                 <a:solidFill>
-                  <a:srgbClr val="FDE68A"/>
+                  <a:srgbClr val="94A3B8"/>
                 </a:solidFill>
                 <a:latin typeface="Consolas" pitchFamily="34" charset="0"/>
                 <a:ea typeface="Consolas" pitchFamily="34" charset="-122"/>
                 <a:cs typeface="Consolas" pitchFamily="34" charset="-120"/>
               </a:rPr>
-              <a:t>                                due_date, status) VALUES (?,?,?,?,'borrowed')",
+              <a:t>        # 3) UPDATE inventory στο ίδιο transaction
 </a:t>
             </a:r>
-            <a:pPr indent="0" marL="0">
-              <a:buNone/>
-            </a:pPr>
             <a:r>
               <a:rPr lang="en-US" sz="1000" dirty="0">
                 <a:solidFill>
@@ -6853,96 +6778,31 @@
                 <a:ea typeface="Consolas" pitchFamily="34" charset="-122"/>
                 <a:cs typeface="Consolas" pitchFamily="34" charset="-120"/>
               </a:rPr>
-              <a:t>            (dto.member_id, dto.book_id,
+              <a:t>        connection.execute(
 </a:t>
             </a:r>
-            <a:pPr indent="0" marL="0">
-              <a:buNone/>
-            </a:pPr>
             <a:r>
               <a:rPr lang="en-US" sz="1000" dirty="0">
                 <a:solidFill>
-                  <a:srgbClr val="E2E8F0"/>
+                  <a:srgbClr val="FDE68A"/>
                 </a:solidFill>
                 <a:latin typeface="Consolas" pitchFamily="34" charset="0"/>
                 <a:ea typeface="Consolas" pitchFamily="34" charset="-122"/>
                 <a:cs typeface="Consolas" pitchFamily="34" charset="-120"/>
               </a:rPr>
-              <a:t>             loan_date.isoformat(), due_date.isoformat()))
+              <a:t>            "UPDATE books SET available_copies = available_copies - 1
+             WHERE id = ?", (dto.book_id,))
 </a:t>
             </a:r>
-            <a:pPr indent="0" marL="0">
-              <a:buNone/>
-            </a:pPr>
             <a:r>
               <a:rPr lang="en-US" sz="1000" dirty="0">
                 <a:solidFill>
-                  <a:srgbClr val="94A3B8"/>
+                  <a:srgbClr val="E2E8F0"/>
                 </a:solidFill>
                 <a:latin typeface="Consolas" pitchFamily="34" charset="0"/>
                 <a:ea typeface="Consolas" pitchFamily="34" charset="-122"/>
                 <a:cs typeface="Consolas" pitchFamily="34" charset="-120"/>
               </a:rPr>
-              <a:t>        # 3) UPDATE inventory στο ίδιο transaction
-</a:t>
-            </a:r>
-            <a:pPr indent="0" marL="0">
-              <a:buNone/>
-            </a:pPr>
-            <a:r>
-              <a:rPr lang="en-US" sz="1000" dirty="0">
-                <a:solidFill>
-                  <a:srgbClr val="E2E8F0"/>
-                </a:solidFill>
-                <a:latin typeface="Consolas" pitchFamily="34" charset="0"/>
-                <a:ea typeface="Consolas" pitchFamily="34" charset="-122"/>
-                <a:cs typeface="Consolas" pitchFamily="34" charset="-120"/>
-              </a:rPr>
-              <a:t>        connection.execute(
-</a:t>
-            </a:r>
-            <a:pPr indent="0" marL="0">
-              <a:buNone/>
-            </a:pPr>
-            <a:r>
-              <a:rPr lang="en-US" sz="1000" dirty="0">
-                <a:solidFill>
-                  <a:srgbClr val="FDE68A"/>
-                </a:solidFill>
-                <a:latin typeface="Consolas" pitchFamily="34" charset="0"/>
-                <a:ea typeface="Consolas" pitchFamily="34" charset="-122"/>
-                <a:cs typeface="Consolas" pitchFamily="34" charset="-120"/>
-              </a:rPr>
-              <a:t>            "UPDATE books SET available_copies = available_copies - 1
-</a:t>
-            </a:r>
-            <a:pPr indent="0" marL="0">
-              <a:buNone/>
-            </a:pPr>
-            <a:r>
-              <a:rPr lang="en-US" sz="1000" dirty="0">
-                <a:solidFill>
-                  <a:srgbClr val="FDE68A"/>
-                </a:solidFill>
-                <a:latin typeface="Consolas" pitchFamily="34" charset="0"/>
-                <a:ea typeface="Consolas" pitchFamily="34" charset="-122"/>
-                <a:cs typeface="Consolas" pitchFamily="34" charset="-120"/>
-              </a:rPr>
-              <a:t>             WHERE id = ?", (dto.book_id,))
-</a:t>
-            </a:r>
-            <a:pPr indent="0" marL="0">
-              <a:buNone/>
-            </a:pPr>
-            <a:r>
-              <a:rPr lang="en-US" sz="1000" dirty="0">
-                <a:solidFill>
-                  <a:srgbClr val="E2E8F0"/>
-                </a:solidFill>
-                <a:latin typeface="Consolas" pitchFamily="34" charset="0"/>
-                <a:ea typeface="Consolas" pitchFamily="34" charset="-122"/>
-                <a:cs typeface="Consolas" pitchFamily="34" charset="-120"/>
-              </a:rPr>
               <a:t>    return self.get_loan(cursor.lastrowid)</a:t>
             </a:r>
             <a:endParaRPr lang="en-US" sz="1000" dirty="0"/>
@@ -6970,7 +6830,7 @@
           <a:bodyPr wrap="square" lIns="0" tIns="0" rIns="0" bIns="0" rtlCol="0" anchor="ctr"/>
           <a:lstStyle/>
           <a:p>
-            <a:pPr indent="0" marL="0">
+            <a:pPr marL="0" indent="0">
               <a:buNone/>
             </a:pPr>
             <a:r>
@@ -7004,6 +6864,7 @@
         <a:solidFill>
           <a:srgbClr val="F8FAFC"/>
         </a:solidFill>
+        <a:effectLst/>
       </p:bgPr>
     </p:bg>
     <p:spTree>
@@ -7041,7 +6902,7 @@
           <a:bodyPr wrap="square" lIns="0" tIns="0" rIns="0" bIns="0" rtlCol="0" anchor="ctr"/>
           <a:lstStyle/>
           <a:p>
-            <a:pPr indent="0" marL="0">
+            <a:pPr marL="0" indent="0">
               <a:buNone/>
             </a:pPr>
             <a:r>
@@ -7080,7 +6941,7 @@
           <a:bodyPr wrap="square" lIns="0" tIns="0" rIns="0" bIns="0" rtlCol="0" anchor="ctr"/>
           <a:lstStyle/>
           <a:p>
-            <a:pPr indent="0" marL="0">
+            <a:pPr marL="0" indent="0">
               <a:buNone/>
             </a:pPr>
             <a:r>
@@ -7117,6 +6978,13 @@
           </a:solidFill>
           <a:ln/>
         </p:spPr>
+        <p:txBody>
+          <a:bodyPr/>
+          <a:lstStyle/>
+          <a:p>
+            <a:endParaRPr lang="en-US"/>
+          </a:p>
+        </p:txBody>
       </p:sp>
       <p:sp>
         <p:nvSpPr>
@@ -7139,7 +7007,7 @@
           <a:bodyPr wrap="square" lIns="0" tIns="0" rIns="0" bIns="0" rtlCol="0" anchor="t"/>
           <a:lstStyle/>
           <a:p>
-            <a:pPr indent="0" marL="0">
+            <a:pPr marL="0" indent="0">
               <a:buNone/>
             </a:pPr>
             <a:r>
@@ -7154,9 +7022,6 @@
               <a:t># app/dal.py — search_books()
 </a:t>
             </a:r>
-            <a:pPr indent="0" marL="0">
-              <a:buNone/>
-            </a:pPr>
             <a:r>
               <a:rPr lang="en-US" sz="1000" dirty="0">
                 <a:solidFill>
@@ -7167,216 +7032,42 @@
                 <a:cs typeface="Consolas" pitchFamily="34" charset="-120"/>
               </a:rPr>
               <a:t>pattern = f"%{keyword.strip()}%"
+sql = (
 </a:t>
             </a:r>
-            <a:pPr indent="0" marL="0">
-              <a:buNone/>
-            </a:pPr>
             <a:r>
               <a:rPr lang="en-US" sz="1000" dirty="0">
                 <a:solidFill>
-                  <a:srgbClr val="E2E8F0"/>
+                  <a:srgbClr val="FDE68A"/>
                 </a:solidFill>
                 <a:latin typeface="Consolas" pitchFamily="34" charset="0"/>
                 <a:ea typeface="Consolas" pitchFamily="34" charset="-122"/>
                 <a:cs typeface="Consolas" pitchFamily="34" charset="-120"/>
               </a:rPr>
-              <a:t>sql = (
+              <a:t>    "SELECT b.id, b.title, b.author, b.isbn, ... , "
+    "r.avg_rating, r.rating_count "
+    "FROM books b "
+    "JOIN categories c ON c.id = b.category_id "
+    "LEFT JOIN (SELECT book_id, AVG(rating) AS avg_rating, "
+    "                  COUNT(*) AS rating_count "
+    "           FROM ratings GROUP BY book_id) r ON r.book_id = b.id "
+    "WHERE b.title LIKE ? OR b.author LIKE ? "
+    "   OR b.isbn LIKE ?  OR c.name LIKE ? "
+    "ORDER BY LOWER(b.title), b.id"
 </a:t>
             </a:r>
-            <a:pPr indent="0" marL="0">
-              <a:buNone/>
-            </a:pPr>
             <a:r>
               <a:rPr lang="en-US" sz="1000" dirty="0">
                 <a:solidFill>
-                  <a:srgbClr val="FDE68A"/>
+                  <a:srgbClr val="E2E8F0"/>
                 </a:solidFill>
                 <a:latin typeface="Consolas" pitchFamily="34" charset="0"/>
                 <a:ea typeface="Consolas" pitchFamily="34" charset="-122"/>
                 <a:cs typeface="Consolas" pitchFamily="34" charset="-120"/>
               </a:rPr>
-              <a:t>    "SELECT b.id, b.title, b.author, b.isbn, ... , "
-</a:t>
-            </a:r>
-            <a:pPr indent="0" marL="0">
-              <a:buNone/>
-            </a:pPr>
-            <a:r>
-              <a:rPr lang="en-US" sz="1000" dirty="0">
-                <a:solidFill>
-                  <a:srgbClr val="FDE68A"/>
-                </a:solidFill>
-                <a:latin typeface="Consolas" pitchFamily="34" charset="0"/>
-                <a:ea typeface="Consolas" pitchFamily="34" charset="-122"/>
-                <a:cs typeface="Consolas" pitchFamily="34" charset="-120"/>
-              </a:rPr>
-              <a:t>    "r.avg_rating, r.rating_count "
-</a:t>
-            </a:r>
-            <a:pPr indent="0" marL="0">
-              <a:buNone/>
-            </a:pPr>
-            <a:r>
-              <a:rPr lang="en-US" sz="1000" dirty="0">
-                <a:solidFill>
-                  <a:srgbClr val="FDE68A"/>
-                </a:solidFill>
-                <a:latin typeface="Consolas" pitchFamily="34" charset="0"/>
-                <a:ea typeface="Consolas" pitchFamily="34" charset="-122"/>
-                <a:cs typeface="Consolas" pitchFamily="34" charset="-120"/>
-              </a:rPr>
-              <a:t>    "FROM books b "
-</a:t>
-            </a:r>
-            <a:pPr indent="0" marL="0">
-              <a:buNone/>
-            </a:pPr>
-            <a:r>
-              <a:rPr lang="en-US" sz="1000" dirty="0">
-                <a:solidFill>
-                  <a:srgbClr val="FDE68A"/>
-                </a:solidFill>
-                <a:latin typeface="Consolas" pitchFamily="34" charset="0"/>
-                <a:ea typeface="Consolas" pitchFamily="34" charset="-122"/>
-                <a:cs typeface="Consolas" pitchFamily="34" charset="-120"/>
-              </a:rPr>
-              <a:t>    "JOIN categories c ON c.id = b.category_id "
-</a:t>
-            </a:r>
-            <a:pPr indent="0" marL="0">
-              <a:buNone/>
-            </a:pPr>
-            <a:r>
-              <a:rPr lang="en-US" sz="1000" dirty="0">
-                <a:solidFill>
-                  <a:srgbClr val="FDE68A"/>
-                </a:solidFill>
-                <a:latin typeface="Consolas" pitchFamily="34" charset="0"/>
-                <a:ea typeface="Consolas" pitchFamily="34" charset="-122"/>
-                <a:cs typeface="Consolas" pitchFamily="34" charset="-120"/>
-              </a:rPr>
-              <a:t>    "LEFT JOIN (SELECT book_id, AVG(rating) AS avg_rating, "
-</a:t>
-            </a:r>
-            <a:pPr indent="0" marL="0">
-              <a:buNone/>
-            </a:pPr>
-            <a:r>
-              <a:rPr lang="en-US" sz="1000" dirty="0">
-                <a:solidFill>
-                  <a:srgbClr val="FDE68A"/>
-                </a:solidFill>
-                <a:latin typeface="Consolas" pitchFamily="34" charset="0"/>
-                <a:ea typeface="Consolas" pitchFamily="34" charset="-122"/>
-                <a:cs typeface="Consolas" pitchFamily="34" charset="-120"/>
-              </a:rPr>
-              <a:t>    "                  COUNT(*) AS rating_count "
-</a:t>
-            </a:r>
-            <a:pPr indent="0" marL="0">
-              <a:buNone/>
-            </a:pPr>
-            <a:r>
-              <a:rPr lang="en-US" sz="1000" dirty="0">
-                <a:solidFill>
-                  <a:srgbClr val="FDE68A"/>
-                </a:solidFill>
-                <a:latin typeface="Consolas" pitchFamily="34" charset="0"/>
-                <a:ea typeface="Consolas" pitchFamily="34" charset="-122"/>
-                <a:cs typeface="Consolas" pitchFamily="34" charset="-120"/>
-              </a:rPr>
-              <a:t>    "           FROM ratings GROUP BY book_id) r ON r.book_id = b.id "
-</a:t>
-            </a:r>
-            <a:pPr indent="0" marL="0">
-              <a:buNone/>
-            </a:pPr>
-            <a:r>
-              <a:rPr lang="en-US" sz="1000" dirty="0">
-                <a:solidFill>
-                  <a:srgbClr val="FDE68A"/>
-                </a:solidFill>
-                <a:latin typeface="Consolas" pitchFamily="34" charset="0"/>
-                <a:ea typeface="Consolas" pitchFamily="34" charset="-122"/>
-                <a:cs typeface="Consolas" pitchFamily="34" charset="-120"/>
-              </a:rPr>
-              <a:t>    "WHERE b.title LIKE ? OR b.author LIKE ? "
-</a:t>
-            </a:r>
-            <a:pPr indent="0" marL="0">
-              <a:buNone/>
-            </a:pPr>
-            <a:r>
-              <a:rPr lang="en-US" sz="1000" dirty="0">
-                <a:solidFill>
-                  <a:srgbClr val="FDE68A"/>
-                </a:solidFill>
-                <a:latin typeface="Consolas" pitchFamily="34" charset="0"/>
-                <a:ea typeface="Consolas" pitchFamily="34" charset="-122"/>
-                <a:cs typeface="Consolas" pitchFamily="34" charset="-120"/>
-              </a:rPr>
-              <a:t>    "   OR b.isbn LIKE ?  OR c.name LIKE ? "
-</a:t>
-            </a:r>
-            <a:pPr indent="0" marL="0">
-              <a:buNone/>
-            </a:pPr>
-            <a:r>
-              <a:rPr lang="en-US" sz="1000" dirty="0">
-                <a:solidFill>
-                  <a:srgbClr val="FDE68A"/>
-                </a:solidFill>
-                <a:latin typeface="Consolas" pitchFamily="34" charset="0"/>
-                <a:ea typeface="Consolas" pitchFamily="34" charset="-122"/>
-                <a:cs typeface="Consolas" pitchFamily="34" charset="-120"/>
-              </a:rPr>
-              <a:t>    "ORDER BY LOWER(b.title), b.id"
-</a:t>
-            </a:r>
-            <a:pPr indent="0" marL="0">
-              <a:buNone/>
-            </a:pPr>
-            <a:r>
-              <a:rPr lang="en-US" sz="1000" dirty="0">
-                <a:solidFill>
-                  <a:srgbClr val="E2E8F0"/>
-                </a:solidFill>
-                <a:latin typeface="Consolas" pitchFamily="34" charset="0"/>
-                <a:ea typeface="Consolas" pitchFamily="34" charset="-122"/>
-                <a:cs typeface="Consolas" pitchFamily="34" charset="-120"/>
-              </a:rPr>
               <a:t>)
-</a:t>
-            </a:r>
-            <a:pPr indent="0" marL="0">
-              <a:buNone/>
-            </a:pPr>
-            <a:r>
-              <a:rPr lang="en-US" sz="1000" dirty="0">
-                <a:solidFill>
-                  <a:srgbClr val="E2E8F0"/>
-                </a:solidFill>
-                <a:latin typeface="Consolas" pitchFamily="34" charset="0"/>
-                <a:ea typeface="Consolas" pitchFamily="34" charset="-122"/>
-                <a:cs typeface="Consolas" pitchFamily="34" charset="-120"/>
-              </a:rPr>
-              <a:t>rows = connection.execute(sql,
-</a:t>
-            </a:r>
-            <a:pPr indent="0" marL="0">
-              <a:buNone/>
-            </a:pPr>
-            <a:r>
-              <a:rPr lang="en-US" sz="1000" dirty="0">
-                <a:solidFill>
-                  <a:srgbClr val="E2E8F0"/>
-                </a:solidFill>
-                <a:latin typeface="Consolas" pitchFamily="34" charset="0"/>
-                <a:ea typeface="Consolas" pitchFamily="34" charset="-122"/>
-                <a:cs typeface="Consolas" pitchFamily="34" charset="-120"/>
-              </a:rPr>
-              <a:t>            (pattern, pattern, pattern, pattern)).fetchall()</a:t>
+rows = connection.execute(sql,
+            (pattern, pattern, pattern, pattern)).fetchall()</a:t>
             </a:r>
             <a:endParaRPr lang="en-US" sz="1000" dirty="0"/>
           </a:p>
@@ -7403,7 +7094,7 @@
           <a:bodyPr wrap="square" lIns="0" tIns="0" rIns="0" bIns="0" rtlCol="0" anchor="ctr"/>
           <a:lstStyle/>
           <a:p>
-            <a:pPr indent="0" marL="0">
+            <a:pPr marL="0" indent="0">
               <a:buNone/>
             </a:pPr>
             <a:r>
@@ -7437,6 +7128,7 @@
         <a:solidFill>
           <a:srgbClr val="F8FAFC"/>
         </a:solidFill>
+        <a:effectLst/>
       </p:bgPr>
     </p:bg>
     <p:spTree>
@@ -7474,7 +7166,7 @@
           <a:bodyPr wrap="square" lIns="0" tIns="0" rIns="0" bIns="0" rtlCol="0" anchor="ctr"/>
           <a:lstStyle/>
           <a:p>
-            <a:pPr indent="0" marL="0">
+            <a:pPr marL="0" indent="0">
               <a:buNone/>
             </a:pPr>
             <a:r>
@@ -7513,7 +7205,7 @@
           <a:bodyPr wrap="square" lIns="0" tIns="0" rIns="0" bIns="0" rtlCol="0" anchor="ctr"/>
           <a:lstStyle/>
           <a:p>
-            <a:pPr indent="0" marL="0">
+            <a:pPr marL="0" indent="0">
               <a:buNone/>
             </a:pPr>
             <a:r>
@@ -7550,6 +7242,13 @@
           </a:solidFill>
           <a:ln/>
         </p:spPr>
+        <p:txBody>
+          <a:bodyPr/>
+          <a:lstStyle/>
+          <a:p>
+            <a:endParaRPr lang="en-US"/>
+          </a:p>
+        </p:txBody>
       </p:sp>
       <p:sp>
         <p:nvSpPr>
@@ -7572,7 +7271,7 @@
           <a:bodyPr wrap="square" lIns="0" tIns="0" rIns="0" bIns="0" rtlCol="0" anchor="t"/>
           <a:lstStyle/>
           <a:p>
-            <a:pPr indent="0" marL="0">
+            <a:pPr marL="0" indent="0">
               <a:buNone/>
             </a:pPr>
             <a:r>
@@ -7587,9 +7286,6 @@
               <a:t># app/dal.py — add_or_update_rating()
 </a:t>
             </a:r>
-            <a:pPr indent="0" marL="0">
-              <a:buNone/>
-            </a:pPr>
             <a:r>
               <a:rPr lang="en-US" sz="1000" dirty="0">
                 <a:solidFill>
@@ -7602,9 +7298,6 @@
               <a:t>connection.execute(
 </a:t>
             </a:r>
-            <a:pPr indent="0" marL="0">
-              <a:buNone/>
-            </a:pPr>
             <a:r>
               <a:rPr lang="en-US" sz="1000" dirty="0">
                 <a:solidFill>
@@ -7615,272 +7308,195 @@
                 <a:cs typeface="Consolas" pitchFamily="34" charset="-120"/>
               </a:rPr>
               <a:t>    "INSERT INTO ratings (member_id, book_id, rating) "
+    "VALUES (?, ?, ?) "
+    "ON CONFLICT(member_id, book_id) DO UPDATE SET "
+    "    rating = excluded.rating, "
+    "    rated_at = CURRENT_TIMESTAMP",
 </a:t>
             </a:r>
-            <a:pPr indent="0" marL="0">
-              <a:buNone/>
-            </a:pPr>
             <a:r>
               <a:rPr lang="en-US" sz="1000" dirty="0">
                 <a:solidFill>
-                  <a:srgbClr val="FDE68A"/>
+                  <a:srgbClr val="E2E8F0"/>
                 </a:solidFill>
                 <a:latin typeface="Consolas" pitchFamily="34" charset="0"/>
                 <a:ea typeface="Consolas" pitchFamily="34" charset="-122"/>
                 <a:cs typeface="Consolas" pitchFamily="34" charset="-120"/>
               </a:rPr>
-              <a:t>    "VALUES (?, ?, ?) "
-</a:t>
-            </a:r>
-            <a:pPr indent="0" marL="0">
-              <a:buNone/>
-            </a:pPr>
-            <a:r>
-              <a:rPr lang="en-US" sz="1000" dirty="0">
-                <a:solidFill>
-                  <a:srgbClr val="FDE68A"/>
+              <a:t>    (member_id, book_id, rating))</a:t>
+            </a:r>
+            <a:endParaRPr lang="en-US" sz="1000" dirty="0"/>
+          </a:p>
+        </p:txBody>
+      </p:sp>
+      <p:sp>
+        <p:nvSpPr>
+          <p:cNvPr id="6" name="Text 4"/>
+          <p:cNvSpPr/>
+          <p:nvPr/>
+        </p:nvSpPr>
+        <p:spPr>
+          <a:xfrm>
+            <a:off x="457200" y="3657600"/>
+            <a:ext cx="8229600" cy="365760"/>
+          </a:xfrm>
+          <a:prstGeom prst="rect">
+            <a:avLst/>
+          </a:prstGeom>
+          <a:noFill/>
+          <a:ln/>
+        </p:spPr>
+        <p:txBody>
+          <a:bodyPr wrap="square" lIns="0" tIns="0" rIns="0" bIns="0" rtlCol="0" anchor="ctr"/>
+          <a:lstStyle/>
+          <a:p>
+            <a:pPr marL="0" indent="0">
+              <a:buNone/>
+            </a:pPr>
+            <a:r>
+              <a:rPr lang="en-US" sz="1200" dirty="0">
+                <a:solidFill>
+                  <a:srgbClr val="1E293B"/>
+                </a:solidFill>
+                <a:latin typeface="Calibri" pitchFamily="34" charset="0"/>
+                <a:ea typeface="Calibri" pitchFamily="34" charset="-122"/>
+                <a:cs typeface="Calibri" pitchFamily="34" charset="-120"/>
+              </a:rPr>
+              <a:t>Η συνθήκη </a:t>
+            </a:r>
+            <a:r>
+              <a:rPr lang="en-US" sz="1200" dirty="0">
+                <a:solidFill>
+                  <a:srgbClr val="065A82"/>
                 </a:solidFill>
                 <a:latin typeface="Consolas" pitchFamily="34" charset="0"/>
                 <a:ea typeface="Consolas" pitchFamily="34" charset="-122"/>
                 <a:cs typeface="Consolas" pitchFamily="34" charset="-120"/>
               </a:rPr>
-              <a:t>    "ON CONFLICT(member_id, book_id) DO UPDATE SET "
-</a:t>
-            </a:r>
-            <a:pPr indent="0" marL="0">
-              <a:buNone/>
-            </a:pPr>
-            <a:r>
-              <a:rPr lang="en-US" sz="1000" dirty="0">
-                <a:solidFill>
-                  <a:srgbClr val="FDE68A"/>
+              <a:t>UNIQUE(member_id, book_id)</a:t>
+            </a:r>
+            <a:r>
+              <a:rPr lang="en-US" sz="1200" dirty="0">
+                <a:solidFill>
+                  <a:srgbClr val="1E293B"/>
+                </a:solidFill>
+                <a:latin typeface="Calibri" pitchFamily="34" charset="0"/>
+                <a:ea typeface="Calibri" pitchFamily="34" charset="-122"/>
+                <a:cs typeface="Calibri" pitchFamily="34" charset="-120"/>
+              </a:rPr>
+              <a:t> στο schema εγγυάται ότι ένα μέλος έχει το πολύ μία βαθμολογία ανά βιβλίο.</a:t>
+            </a:r>
+            <a:endParaRPr lang="en-US" sz="1200" dirty="0"/>
+          </a:p>
+        </p:txBody>
+      </p:sp>
+      <p:sp>
+        <p:nvSpPr>
+          <p:cNvPr id="7" name="Text 5"/>
+          <p:cNvSpPr/>
+          <p:nvPr/>
+        </p:nvSpPr>
+        <p:spPr>
+          <a:xfrm>
+            <a:off x="457200" y="4023360"/>
+            <a:ext cx="8229600" cy="365760"/>
+          </a:xfrm>
+          <a:prstGeom prst="rect">
+            <a:avLst/>
+          </a:prstGeom>
+          <a:noFill/>
+          <a:ln/>
+        </p:spPr>
+        <p:txBody>
+          <a:bodyPr wrap="square" lIns="0" tIns="0" rIns="0" bIns="0" rtlCol="0" anchor="ctr"/>
+          <a:lstStyle/>
+          <a:p>
+            <a:pPr marL="0" indent="0">
+              <a:buNone/>
+            </a:pPr>
+            <a:r>
+              <a:rPr lang="en-US" sz="1200" dirty="0">
+                <a:solidFill>
+                  <a:srgbClr val="1E293B"/>
+                </a:solidFill>
+                <a:latin typeface="Calibri" pitchFamily="34" charset="0"/>
+                <a:ea typeface="Calibri" pitchFamily="34" charset="-122"/>
+                <a:cs typeface="Calibri" pitchFamily="34" charset="-120"/>
+              </a:rPr>
+              <a:t>Με </a:t>
+            </a:r>
+            <a:r>
+              <a:rPr lang="en-US" sz="1200" dirty="0">
+                <a:solidFill>
+                  <a:srgbClr val="065A82"/>
                 </a:solidFill>
                 <a:latin typeface="Consolas" pitchFamily="34" charset="0"/>
                 <a:ea typeface="Consolas" pitchFamily="34" charset="-122"/>
                 <a:cs typeface="Consolas" pitchFamily="34" charset="-120"/>
               </a:rPr>
-              <a:t>    "    rating = excluded.rating, "
-</a:t>
-            </a:r>
-            <a:pPr indent="0" marL="0">
-              <a:buNone/>
-            </a:pPr>
-            <a:r>
-              <a:rPr lang="en-US" sz="1000" dirty="0">
-                <a:solidFill>
-                  <a:srgbClr val="FDE68A"/>
+              <a:t>ON DELETE CASCADE</a:t>
+            </a:r>
+            <a:r>
+              <a:rPr lang="en-US" sz="1200" dirty="0">
+                <a:solidFill>
+                  <a:srgbClr val="1E293B"/>
+                </a:solidFill>
+                <a:latin typeface="Calibri" pitchFamily="34" charset="0"/>
+                <a:ea typeface="Calibri" pitchFamily="34" charset="-122"/>
+                <a:cs typeface="Calibri" pitchFamily="34" charset="-120"/>
+              </a:rPr>
+              <a:t>: η διαγραφή μέλους ή βιβλίου διαγράφει αυτόματα τις σχετικές βαθμολογίες.</a:t>
+            </a:r>
+            <a:endParaRPr lang="en-US" sz="1200" dirty="0"/>
+          </a:p>
+        </p:txBody>
+      </p:sp>
+      <p:sp>
+        <p:nvSpPr>
+          <p:cNvPr id="8" name="Text 6"/>
+          <p:cNvSpPr/>
+          <p:nvPr/>
+        </p:nvSpPr>
+        <p:spPr>
+          <a:xfrm>
+            <a:off x="457200" y="4389120"/>
+            <a:ext cx="8229600" cy="365760"/>
+          </a:xfrm>
+          <a:prstGeom prst="rect">
+            <a:avLst/>
+          </a:prstGeom>
+          <a:noFill/>
+          <a:ln/>
+        </p:spPr>
+        <p:txBody>
+          <a:bodyPr wrap="square" lIns="0" tIns="0" rIns="0" bIns="0" rtlCol="0" anchor="ctr"/>
+          <a:lstStyle/>
+          <a:p>
+            <a:pPr marL="0" indent="0">
+              <a:buNone/>
+            </a:pPr>
+            <a:r>
+              <a:rPr lang="en-US" sz="1200" dirty="0">
+                <a:solidFill>
+                  <a:srgbClr val="1E293B"/>
+                </a:solidFill>
+                <a:latin typeface="Calibri" pitchFamily="34" charset="0"/>
+                <a:ea typeface="Calibri" pitchFamily="34" charset="-122"/>
+                <a:cs typeface="Calibri" pitchFamily="34" charset="-120"/>
+              </a:rPr>
+              <a:t>Η βαθμολόγηση καλείται μέσα στο </a:t>
+            </a:r>
+            <a:r>
+              <a:rPr lang="en-US" sz="1200" dirty="0">
+                <a:solidFill>
+                  <a:srgbClr val="065A82"/>
                 </a:solidFill>
                 <a:latin typeface="Consolas" pitchFamily="34" charset="0"/>
                 <a:ea typeface="Consolas" pitchFamily="34" charset="-122"/>
                 <a:cs typeface="Consolas" pitchFamily="34" charset="-120"/>
               </a:rPr>
-              <a:t>    "    rated_at = CURRENT_TIMESTAMP",
-</a:t>
-            </a:r>
-            <a:pPr indent="0" marL="0">
-              <a:buNone/>
-            </a:pPr>
-            <a:r>
-              <a:rPr lang="en-US" sz="1000" dirty="0">
-                <a:solidFill>
-                  <a:srgbClr val="E2E8F0"/>
-                </a:solidFill>
-                <a:latin typeface="Consolas" pitchFamily="34" charset="0"/>
-                <a:ea typeface="Consolas" pitchFamily="34" charset="-122"/>
-                <a:cs typeface="Consolas" pitchFamily="34" charset="-120"/>
-              </a:rPr>
-              <a:t>    (member_id, book_id, rating))</a:t>
-            </a:r>
-            <a:endParaRPr lang="en-US" sz="1000" dirty="0"/>
-          </a:p>
-        </p:txBody>
-      </p:sp>
-      <p:sp>
-        <p:nvSpPr>
-          <p:cNvPr id="6" name="Text 4"/>
-          <p:cNvSpPr/>
-          <p:nvPr/>
-        </p:nvSpPr>
-        <p:spPr>
-          <a:xfrm>
-            <a:off x="457200" y="3657600"/>
-            <a:ext cx="8229600" cy="365760"/>
-          </a:xfrm>
-          <a:prstGeom prst="rect">
-            <a:avLst/>
-          </a:prstGeom>
-          <a:noFill/>
-          <a:ln/>
-        </p:spPr>
-        <p:txBody>
-          <a:bodyPr wrap="square" lIns="0" tIns="0" rIns="0" bIns="0" rtlCol="0" anchor="ctr"/>
-          <a:lstStyle/>
-          <a:p>
-            <a:pPr indent="0" marL="0">
-              <a:buNone/>
-            </a:pPr>
-            <a:r>
-              <a:rPr lang="en-US" sz="1200" dirty="0">
-                <a:solidFill>
-                  <a:srgbClr val="1E293B"/>
-                </a:solidFill>
-                <a:latin typeface="Calibri" pitchFamily="34" charset="0"/>
-                <a:ea typeface="Calibri" pitchFamily="34" charset="-122"/>
-                <a:cs typeface="Calibri" pitchFamily="34" charset="-120"/>
-              </a:rPr>
-              <a:t>Η συνθήκη </a:t>
-            </a:r>
-            <a:pPr indent="0" marL="0">
-              <a:buNone/>
-            </a:pPr>
-            <a:r>
-              <a:rPr lang="en-US" sz="1200" dirty="0">
-                <a:solidFill>
-                  <a:srgbClr val="065A82"/>
-                </a:solidFill>
-                <a:latin typeface="Consolas" pitchFamily="34" charset="0"/>
-                <a:ea typeface="Consolas" pitchFamily="34" charset="-122"/>
-                <a:cs typeface="Consolas" pitchFamily="34" charset="-120"/>
-              </a:rPr>
-              <a:t>UNIQUE(member_id, book_id)</a:t>
-            </a:r>
-            <a:pPr indent="0" marL="0">
-              <a:buNone/>
-            </a:pPr>
-            <a:r>
-              <a:rPr lang="en-US" sz="1200" dirty="0">
-                <a:solidFill>
-                  <a:srgbClr val="1E293B"/>
-                </a:solidFill>
-                <a:latin typeface="Calibri" pitchFamily="34" charset="0"/>
-                <a:ea typeface="Calibri" pitchFamily="34" charset="-122"/>
-                <a:cs typeface="Calibri" pitchFamily="34" charset="-120"/>
-              </a:rPr>
-              <a:t> στο schema εγγυάται ότι ένα μέλος έχει το πολύ μία βαθμολογία ανά βιβλίο.</a:t>
-            </a:r>
-            <a:endParaRPr lang="en-US" sz="1200" dirty="0"/>
-          </a:p>
-        </p:txBody>
-      </p:sp>
-      <p:sp>
-        <p:nvSpPr>
-          <p:cNvPr id="7" name="Text 5"/>
-          <p:cNvSpPr/>
-          <p:nvPr/>
-        </p:nvSpPr>
-        <p:spPr>
-          <a:xfrm>
-            <a:off x="457200" y="4023360"/>
-            <a:ext cx="8229600" cy="365760"/>
-          </a:xfrm>
-          <a:prstGeom prst="rect">
-            <a:avLst/>
-          </a:prstGeom>
-          <a:noFill/>
-          <a:ln/>
-        </p:spPr>
-        <p:txBody>
-          <a:bodyPr wrap="square" lIns="0" tIns="0" rIns="0" bIns="0" rtlCol="0" anchor="ctr"/>
-          <a:lstStyle/>
-          <a:p>
-            <a:pPr indent="0" marL="0">
-              <a:buNone/>
-            </a:pPr>
-            <a:r>
-              <a:rPr lang="en-US" sz="1200" dirty="0">
-                <a:solidFill>
-                  <a:srgbClr val="1E293B"/>
-                </a:solidFill>
-                <a:latin typeface="Calibri" pitchFamily="34" charset="0"/>
-                <a:ea typeface="Calibri" pitchFamily="34" charset="-122"/>
-                <a:cs typeface="Calibri" pitchFamily="34" charset="-120"/>
-              </a:rPr>
-              <a:t>Με </a:t>
-            </a:r>
-            <a:pPr indent="0" marL="0">
-              <a:buNone/>
-            </a:pPr>
-            <a:r>
-              <a:rPr lang="en-US" sz="1200" dirty="0">
-                <a:solidFill>
-                  <a:srgbClr val="065A82"/>
-                </a:solidFill>
-                <a:latin typeface="Consolas" pitchFamily="34" charset="0"/>
-                <a:ea typeface="Consolas" pitchFamily="34" charset="-122"/>
-                <a:cs typeface="Consolas" pitchFamily="34" charset="-120"/>
-              </a:rPr>
-              <a:t>ON DELETE CASCADE</a:t>
-            </a:r>
-            <a:pPr indent="0" marL="0">
-              <a:buNone/>
-            </a:pPr>
-            <a:r>
-              <a:rPr lang="en-US" sz="1200" dirty="0">
-                <a:solidFill>
-                  <a:srgbClr val="1E293B"/>
-                </a:solidFill>
-                <a:latin typeface="Calibri" pitchFamily="34" charset="0"/>
-                <a:ea typeface="Calibri" pitchFamily="34" charset="-122"/>
-                <a:cs typeface="Calibri" pitchFamily="34" charset="-120"/>
-              </a:rPr>
-              <a:t>: η διαγραφή μέλους ή βιβλίου διαγράφει αυτόματα τις σχετικές βαθμολογίες.</a:t>
-            </a:r>
-            <a:endParaRPr lang="en-US" sz="1200" dirty="0"/>
-          </a:p>
-        </p:txBody>
-      </p:sp>
-      <p:sp>
-        <p:nvSpPr>
-          <p:cNvPr id="8" name="Text 6"/>
-          <p:cNvSpPr/>
-          <p:nvPr/>
-        </p:nvSpPr>
-        <p:spPr>
-          <a:xfrm>
-            <a:off x="457200" y="4389120"/>
-            <a:ext cx="8229600" cy="365760"/>
-          </a:xfrm>
-          <a:prstGeom prst="rect">
-            <a:avLst/>
-          </a:prstGeom>
-          <a:noFill/>
-          <a:ln/>
-        </p:spPr>
-        <p:txBody>
-          <a:bodyPr wrap="square" lIns="0" tIns="0" rIns="0" bIns="0" rtlCol="0" anchor="ctr"/>
-          <a:lstStyle/>
-          <a:p>
-            <a:pPr indent="0" marL="0">
-              <a:buNone/>
-            </a:pPr>
-            <a:r>
-              <a:rPr lang="en-US" sz="1200" dirty="0">
-                <a:solidFill>
-                  <a:srgbClr val="1E293B"/>
-                </a:solidFill>
-                <a:latin typeface="Calibri" pitchFamily="34" charset="0"/>
-                <a:ea typeface="Calibri" pitchFamily="34" charset="-122"/>
-                <a:cs typeface="Calibri" pitchFamily="34" charset="-120"/>
-              </a:rPr>
-              <a:t>Η βαθμολόγηση καλείται μέσα στο </a:t>
-            </a:r>
-            <a:pPr indent="0" marL="0">
-              <a:buNone/>
-            </a:pPr>
-            <a:r>
-              <a:rPr lang="en-US" sz="1200" dirty="0">
-                <a:solidFill>
-                  <a:srgbClr val="065A82"/>
-                </a:solidFill>
-                <a:latin typeface="Consolas" pitchFamily="34" charset="0"/>
-                <a:ea typeface="Consolas" pitchFamily="34" charset="-122"/>
-                <a:cs typeface="Consolas" pitchFamily="34" charset="-120"/>
-              </a:rPr>
               <a:t>return_book(loan_id, rating=N)</a:t>
             </a:r>
-            <a:pPr indent="0" marL="0">
-              <a:buNone/>
-            </a:pPr>
             <a:r>
               <a:rPr lang="en-US" sz="1200" dirty="0">
                 <a:solidFill>
@@ -7912,6 +7528,7 @@
         <a:solidFill>
           <a:srgbClr val="F8FAFC"/>
         </a:solidFill>
+        <a:effectLst/>
       </p:bgPr>
     </p:bg>
     <p:spTree>
@@ -7949,7 +7566,7 @@
           <a:bodyPr wrap="square" lIns="0" tIns="0" rIns="0" bIns="0" rtlCol="0" anchor="ctr"/>
           <a:lstStyle/>
           <a:p>
-            <a:pPr indent="0" marL="0">
+            <a:pPr marL="0" indent="0">
               <a:buNone/>
             </a:pPr>
             <a:r>
@@ -7988,7 +7605,7 @@
           <a:bodyPr wrap="square" lIns="0" tIns="0" rIns="0" bIns="0" rtlCol="0" anchor="ctr"/>
           <a:lstStyle/>
           <a:p>
-            <a:pPr indent="0" marL="0">
+            <a:pPr marL="0" indent="0">
               <a:buNone/>
             </a:pPr>
             <a:r>
@@ -8025,6 +7642,13 @@
           </a:solidFill>
           <a:ln/>
         </p:spPr>
+        <p:txBody>
+          <a:bodyPr/>
+          <a:lstStyle/>
+          <a:p>
+            <a:endParaRPr lang="en-US"/>
+          </a:p>
+        </p:txBody>
       </p:sp>
       <p:sp>
         <p:nvSpPr>
@@ -8047,7 +7671,7 @@
           <a:bodyPr wrap="square" lIns="0" tIns="0" rIns="0" bIns="0" rtlCol="0" anchor="t"/>
           <a:lstStyle/>
           <a:p>
-            <a:pPr indent="0" marL="0">
+            <a:pPr marL="0" indent="0">
               <a:buNone/>
             </a:pPr>
             <a:r>
@@ -8062,9 +7686,6 @@
               <a:t># app/dal.py — recommend_books()
 </a:t>
             </a:r>
-            <a:pPr indent="0" marL="0">
-              <a:buNone/>
-            </a:pPr>
             <a:r>
               <a:rPr lang="en-US" sz="1000" dirty="0">
                 <a:solidFill>
@@ -8075,26 +7696,23 @@
                 <a:cs typeface="Consolas" pitchFamily="34" charset="-120"/>
               </a:rPr>
               <a:t>SELECT b.id, b.title, b.author, b.category_id, c.name AS category_name,
+       COALESCE(mc.category_loans, 0) AS category_loans,
+       COALESCE(br.avg_rating,    0) AS avg_rating,
 </a:t>
             </a:r>
-            <a:pPr indent="0" marL="0">
-              <a:buNone/>
-            </a:pPr>
             <a:r>
               <a:rPr lang="en-US" sz="1000" dirty="0">
                 <a:solidFill>
-                  <a:srgbClr val="FDE68A"/>
+                  <a:srgbClr val="86EFAC"/>
                 </a:solidFill>
                 <a:latin typeface="Consolas" pitchFamily="34" charset="0"/>
                 <a:ea typeface="Consolas" pitchFamily="34" charset="-122"/>
                 <a:cs typeface="Consolas" pitchFamily="34" charset="-120"/>
               </a:rPr>
-              <a:t>       COALESCE(mc.category_loans, 0) AS category_loans,
+              <a:t>       (COALESCE(mc.category_loans, 0) * 1.5
+        + COALESCE(br.avg_rating, 0)) AS score
 </a:t>
             </a:r>
-            <a:pPr indent="0" marL="0">
-              <a:buNone/>
-            </a:pPr>
             <a:r>
               <a:rPr lang="en-US" sz="1000" dirty="0">
                 <a:solidFill>
@@ -8104,232 +7722,63 @@
                 <a:ea typeface="Consolas" pitchFamily="34" charset="-122"/>
                 <a:cs typeface="Consolas" pitchFamily="34" charset="-120"/>
               </a:rPr>
-              <a:t>       COALESCE(br.avg_rating,    0) AS avg_rating,
+              <a:t>FROM books b JOIN categories c ON c.id = b.category_id
 </a:t>
             </a:r>
-            <a:pPr indent="0" marL="0">
-              <a:buNone/>
-            </a:pPr>
             <a:r>
               <a:rPr lang="en-US" sz="1000" dirty="0">
                 <a:solidFill>
-                  <a:srgbClr val="86EFAC"/>
+                  <a:srgbClr val="94A3B8"/>
                 </a:solidFill>
                 <a:latin typeface="Consolas" pitchFamily="34" charset="0"/>
                 <a:ea typeface="Consolas" pitchFamily="34" charset="-122"/>
                 <a:cs typeface="Consolas" pitchFamily="34" charset="-120"/>
               </a:rPr>
-              <a:t>       (COALESCE(mc.category_loans, 0) * 1.5
+              <a:t>LEFT JOIN (   -- πόσες φορές έχει δανειστεί το μέλος κάθε κατηγορία
 </a:t>
             </a:r>
-            <a:pPr indent="0" marL="0">
-              <a:buNone/>
-            </a:pPr>
             <a:r>
               <a:rPr lang="en-US" sz="1000" dirty="0">
                 <a:solidFill>
-                  <a:srgbClr val="86EFAC"/>
+                  <a:srgbClr val="FDE68A"/>
                 </a:solidFill>
                 <a:latin typeface="Consolas" pitchFamily="34" charset="0"/>
                 <a:ea typeface="Consolas" pitchFamily="34" charset="-122"/>
                 <a:cs typeface="Consolas" pitchFamily="34" charset="-120"/>
               </a:rPr>
-              <a:t>        + COALESCE(br.avg_rating, 0)) AS score
+              <a:t>    SELECT b.category_id, COUNT(*) AS category_loans
+    FROM loans l JOIN books b ON b.id = l.book_id
+    WHERE l.member_id = ?  GROUP BY b.category_id
+) mc ON mc.category_id = b.category_id
 </a:t>
             </a:r>
-            <a:pPr indent="0" marL="0">
-              <a:buNone/>
-            </a:pPr>
             <a:r>
               <a:rPr lang="en-US" sz="1000" dirty="0">
                 <a:solidFill>
-                  <a:srgbClr val="FDE68A"/>
+                  <a:srgbClr val="94A3B8"/>
                 </a:solidFill>
                 <a:latin typeface="Consolas" pitchFamily="34" charset="0"/>
                 <a:ea typeface="Consolas" pitchFamily="34" charset="-122"/>
                 <a:cs typeface="Consolas" pitchFamily="34" charset="-120"/>
               </a:rPr>
-              <a:t>FROM books b JOIN categories c ON c.id = b.category_id
+              <a:t>LEFT JOIN (   -- μέση βαθμολογία ανά βιβλίο
 </a:t>
             </a:r>
-            <a:pPr indent="0" marL="0">
-              <a:buNone/>
-            </a:pPr>
             <a:r>
               <a:rPr lang="en-US" sz="1000" dirty="0">
                 <a:solidFill>
-                  <a:srgbClr val="94A3B8"/>
+                  <a:srgbClr val="FDE68A"/>
                 </a:solidFill>
                 <a:latin typeface="Consolas" pitchFamily="34" charset="0"/>
                 <a:ea typeface="Consolas" pitchFamily="34" charset="-122"/>
                 <a:cs typeface="Consolas" pitchFamily="34" charset="-120"/>
               </a:rPr>
-              <a:t>LEFT JOIN (   -- πόσες φορές έχει δανειστεί το μέλος κάθε κατηγορία
-</a:t>
-            </a:r>
-            <a:pPr indent="0" marL="0">
-              <a:buNone/>
-            </a:pPr>
-            <a:r>
-              <a:rPr lang="en-US" sz="1000" dirty="0">
-                <a:solidFill>
-                  <a:srgbClr val="FDE68A"/>
-                </a:solidFill>
-                <a:latin typeface="Consolas" pitchFamily="34" charset="0"/>
-                <a:ea typeface="Consolas" pitchFamily="34" charset="-122"/>
-                <a:cs typeface="Consolas" pitchFamily="34" charset="-120"/>
-              </a:rPr>
-              <a:t>    SELECT b.category_id, COUNT(*) AS category_loans
-</a:t>
-            </a:r>
-            <a:pPr indent="0" marL="0">
-              <a:buNone/>
-            </a:pPr>
-            <a:r>
-              <a:rPr lang="en-US" sz="1000" dirty="0">
-                <a:solidFill>
-                  <a:srgbClr val="FDE68A"/>
-                </a:solidFill>
-                <a:latin typeface="Consolas" pitchFamily="34" charset="0"/>
-                <a:ea typeface="Consolas" pitchFamily="34" charset="-122"/>
-                <a:cs typeface="Consolas" pitchFamily="34" charset="-120"/>
-              </a:rPr>
-              <a:t>    FROM loans l JOIN books b ON b.id = l.book_id
-</a:t>
-            </a:r>
-            <a:pPr indent="0" marL="0">
-              <a:buNone/>
-            </a:pPr>
-            <a:r>
-              <a:rPr lang="en-US" sz="1000" dirty="0">
-                <a:solidFill>
-                  <a:srgbClr val="FDE68A"/>
-                </a:solidFill>
-                <a:latin typeface="Consolas" pitchFamily="34" charset="0"/>
-                <a:ea typeface="Consolas" pitchFamily="34" charset="-122"/>
-                <a:cs typeface="Consolas" pitchFamily="34" charset="-120"/>
-              </a:rPr>
-              <a:t>    WHERE l.member_id = ?  GROUP BY b.category_id
-</a:t>
-            </a:r>
-            <a:pPr indent="0" marL="0">
-              <a:buNone/>
-            </a:pPr>
-            <a:r>
-              <a:rPr lang="en-US" sz="1000" dirty="0">
-                <a:solidFill>
-                  <a:srgbClr val="FDE68A"/>
-                </a:solidFill>
-                <a:latin typeface="Consolas" pitchFamily="34" charset="0"/>
-                <a:ea typeface="Consolas" pitchFamily="34" charset="-122"/>
-                <a:cs typeface="Consolas" pitchFamily="34" charset="-120"/>
-              </a:rPr>
-              <a:t>) mc ON mc.category_id = b.category_id
-</a:t>
-            </a:r>
-            <a:pPr indent="0" marL="0">
-              <a:buNone/>
-            </a:pPr>
-            <a:r>
-              <a:rPr lang="en-US" sz="1000" dirty="0">
-                <a:solidFill>
-                  <a:srgbClr val="94A3B8"/>
-                </a:solidFill>
-                <a:latin typeface="Consolas" pitchFamily="34" charset="0"/>
-                <a:ea typeface="Consolas" pitchFamily="34" charset="-122"/>
-                <a:cs typeface="Consolas" pitchFamily="34" charset="-120"/>
-              </a:rPr>
-              <a:t>LEFT JOIN (   -- μέση βαθμολογία ανά βιβλίο
-</a:t>
-            </a:r>
-            <a:pPr indent="0" marL="0">
-              <a:buNone/>
-            </a:pPr>
-            <a:r>
-              <a:rPr lang="en-US" sz="1000" dirty="0">
-                <a:solidFill>
-                  <a:srgbClr val="FDE68A"/>
-                </a:solidFill>
-                <a:latin typeface="Consolas" pitchFamily="34" charset="0"/>
-                <a:ea typeface="Consolas" pitchFamily="34" charset="-122"/>
-                <a:cs typeface="Consolas" pitchFamily="34" charset="-120"/>
-              </a:rPr>
               <a:t>    SELECT book_id, AVG(rating) AS avg_rating
-</a:t>
-            </a:r>
-            <a:pPr indent="0" marL="0">
-              <a:buNone/>
-            </a:pPr>
-            <a:r>
-              <a:rPr lang="en-US" sz="1000" dirty="0">
-                <a:solidFill>
-                  <a:srgbClr val="FDE68A"/>
-                </a:solidFill>
-                <a:latin typeface="Consolas" pitchFamily="34" charset="0"/>
-                <a:ea typeface="Consolas" pitchFamily="34" charset="-122"/>
-                <a:cs typeface="Consolas" pitchFamily="34" charset="-120"/>
-              </a:rPr>
-              <a:t>    FROM ratings GROUP BY book_id
-</a:t>
-            </a:r>
-            <a:pPr indent="0" marL="0">
-              <a:buNone/>
-            </a:pPr>
-            <a:r>
-              <a:rPr lang="en-US" sz="1000" dirty="0">
-                <a:solidFill>
-                  <a:srgbClr val="FDE68A"/>
-                </a:solidFill>
-                <a:latin typeface="Consolas" pitchFamily="34" charset="0"/>
-                <a:ea typeface="Consolas" pitchFamily="34" charset="-122"/>
-                <a:cs typeface="Consolas" pitchFamily="34" charset="-120"/>
-              </a:rPr>
-              <a:t>) br ON br.book_id = b.id
-</a:t>
-            </a:r>
-            <a:pPr indent="0" marL="0">
-              <a:buNone/>
-            </a:pPr>
-            <a:r>
-              <a:rPr lang="en-US" sz="1000" dirty="0">
-                <a:solidFill>
-                  <a:srgbClr val="FDE68A"/>
-                </a:solidFill>
-                <a:latin typeface="Consolas" pitchFamily="34" charset="0"/>
-                <a:ea typeface="Consolas" pitchFamily="34" charset="-122"/>
-                <a:cs typeface="Consolas" pitchFamily="34" charset="-120"/>
-              </a:rPr>
-              <a:t>WHERE b.available_copies &gt; 0
-</a:t>
-            </a:r>
-            <a:pPr indent="0" marL="0">
-              <a:buNone/>
-            </a:pPr>
-            <a:r>
-              <a:rPr lang="en-US" sz="1000" dirty="0">
-                <a:solidFill>
-                  <a:srgbClr val="FDE68A"/>
-                </a:solidFill>
-                <a:latin typeface="Consolas" pitchFamily="34" charset="0"/>
-                <a:ea typeface="Consolas" pitchFamily="34" charset="-122"/>
-                <a:cs typeface="Consolas" pitchFamily="34" charset="-120"/>
-              </a:rPr>
-              <a:t>  AND b.id NOT IN (SELECT book_id FROM loans WHERE member_id = ?)
-</a:t>
-            </a:r>
-            <a:pPr indent="0" marL="0">
-              <a:buNone/>
-            </a:pPr>
-            <a:r>
-              <a:rPr lang="en-US" sz="1000" dirty="0">
-                <a:solidFill>
-                  <a:srgbClr val="FDE68A"/>
-                </a:solidFill>
-                <a:latin typeface="Consolas" pitchFamily="34" charset="0"/>
-                <a:ea typeface="Consolas" pitchFamily="34" charset="-122"/>
-                <a:cs typeface="Consolas" pitchFamily="34" charset="-120"/>
-              </a:rPr>
-              <a:t>ORDER BY score DESC, b.title LIMIT ?</a:t>
+    FROM ratings GROUP BY book_id
+) br ON br.book_id = b.id
+WHERE b.available_copies &gt; 0
+  AND b.id NOT IN (SELECT book_id FROM loans WHERE member_id = ?)
+ORDER BY score DESC, b.title LIMIT ?</a:t>
             </a:r>
             <a:endParaRPr lang="en-US" sz="1000" dirty="0"/>
           </a:p>
@@ -8356,7 +7805,7 @@
           <a:bodyPr wrap="square" lIns="0" tIns="0" rIns="0" bIns="0" rtlCol="0" anchor="ctr"/>
           <a:lstStyle/>
           <a:p>
-            <a:pPr indent="0" marL="0">
+            <a:pPr marL="0" indent="0">
               <a:buNone/>
             </a:pPr>
             <a:r>
@@ -8675,4 +8124,319 @@
     </a:ext>
   </a:extLst>
 </a:theme>
+</file>
+
+<file path=ppt/theme/theme2.xml><?xml version="1.0" encoding="utf-8"?>
+<a:theme xmlns:a="http://schemas.openxmlformats.org/drawingml/2006/main" name="Office Theme">
+  <a:themeElements>
+    <a:clrScheme name="Office">
+      <a:dk1>
+        <a:sysClr val="windowText" lastClr="000000"/>
+      </a:dk1>
+      <a:lt1>
+        <a:sysClr val="window" lastClr="FFFFFF"/>
+      </a:lt1>
+      <a:dk2>
+        <a:srgbClr val="0E2841"/>
+      </a:dk2>
+      <a:lt2>
+        <a:srgbClr val="E8E8E8"/>
+      </a:lt2>
+      <a:accent1>
+        <a:srgbClr val="156082"/>
+      </a:accent1>
+      <a:accent2>
+        <a:srgbClr val="E97132"/>
+      </a:accent2>
+      <a:accent3>
+        <a:srgbClr val="196B24"/>
+      </a:accent3>
+      <a:accent4>
+        <a:srgbClr val="0F9ED5"/>
+      </a:accent4>
+      <a:accent5>
+        <a:srgbClr val="A02B93"/>
+      </a:accent5>
+      <a:accent6>
+        <a:srgbClr val="4EA72E"/>
+      </a:accent6>
+      <a:hlink>
+        <a:srgbClr val="467886"/>
+      </a:hlink>
+      <a:folHlink>
+        <a:srgbClr val="96607D"/>
+      </a:folHlink>
+    </a:clrScheme>
+    <a:fontScheme name="Office">
+      <a:majorFont>
+        <a:latin typeface="Aptos Display" panose="02110004020202020204"/>
+        <a:ea typeface=""/>
+        <a:cs typeface=""/>
+        <a:font script="Jpan" typeface="游ゴシック Light"/>
+        <a:font script="Hang" typeface="맑은 고딕"/>
+        <a:font script="Hans" typeface="等线 Light"/>
+        <a:font script="Hant" typeface="新細明體"/>
+        <a:font script="Arab" typeface="Times New Roman"/>
+        <a:font script="Hebr" typeface="Times New Roman"/>
+        <a:font script="Thai" typeface="Angsana New"/>
+        <a:font script="Ethi" typeface="Nyala"/>
+        <a:font script="Beng" typeface="Vrinda"/>
+        <a:font script="Gujr" typeface="Shruti"/>
+        <a:font script="Khmr" typeface="MoolBoran"/>
+        <a:font script="Knda" typeface="Tunga"/>
+        <a:font script="Guru" typeface="Raavi"/>
+        <a:font script="Cans" typeface="Euphemia"/>
+        <a:font script="Cher" typeface="Plantagenet Cherokee"/>
+        <a:font script="Yiii" typeface="Microsoft Yi Baiti"/>
+        <a:font script="Tibt" typeface="Microsoft Himalaya"/>
+        <a:font script="Thaa" typeface="MV Boli"/>
+        <a:font script="Deva" typeface="Mangal"/>
+        <a:font script="Telu" typeface="Gautami"/>
+        <a:font script="Taml" typeface="Latha"/>
+        <a:font script="Syrc" typeface="Estrangelo Edessa"/>
+        <a:font script="Orya" typeface="Kalinga"/>
+        <a:font script="Mlym" typeface="Kartika"/>
+        <a:font script="Laoo" typeface="DokChampa"/>
+        <a:font script="Sinh" typeface="Iskoola Pota"/>
+        <a:font script="Mong" typeface="Mongolian Baiti"/>
+        <a:font script="Viet" typeface="Times New Roman"/>
+        <a:font script="Uigh" typeface="Microsoft Uighur"/>
+        <a:font script="Geor" typeface="Sylfaen"/>
+        <a:font script="Armn" typeface="Arial"/>
+        <a:font script="Bugi" typeface="Leelawadee UI"/>
+        <a:font script="Bopo" typeface="Microsoft JhengHei"/>
+        <a:font script="Java" typeface="Javanese Text"/>
+        <a:font script="Lisu" typeface="Segoe UI"/>
+        <a:font script="Mymr" typeface="Myanmar Text"/>
+        <a:font script="Nkoo" typeface="Ebrima"/>
+        <a:font script="Olck" typeface="Nirmala UI"/>
+        <a:font script="Osma" typeface="Ebrima"/>
+        <a:font script="Phag" typeface="Phagspa"/>
+        <a:font script="Syrn" typeface="Estrangelo Edessa"/>
+        <a:font script="Syrj" typeface="Estrangelo Edessa"/>
+        <a:font script="Syre" typeface="Estrangelo Edessa"/>
+        <a:font script="Sora" typeface="Nirmala UI"/>
+        <a:font script="Tale" typeface="Microsoft Tai Le"/>
+        <a:font script="Talu" typeface="Microsoft New Tai Lue"/>
+        <a:font script="Tfng" typeface="Ebrima"/>
+      </a:majorFont>
+      <a:minorFont>
+        <a:latin typeface="Aptos" panose="02110004020202020204"/>
+        <a:ea typeface=""/>
+        <a:cs typeface=""/>
+        <a:font script="Jpan" typeface="游ゴシック"/>
+        <a:font script="Hang" typeface="맑은 고딕"/>
+        <a:font script="Hans" typeface="等线"/>
+        <a:font script="Hant" typeface="新細明體"/>
+        <a:font script="Arab" typeface="Arial"/>
+        <a:font script="Hebr" typeface="Arial"/>
+        <a:font script="Thai" typeface="Cordia New"/>
+        <a:font script="Ethi" typeface="Nyala"/>
+        <a:font script="Beng" typeface="Vrinda"/>
+        <a:font script="Gujr" typeface="Shruti"/>
+        <a:font script="Khmr" typeface="DaunPenh"/>
+        <a:font script="Knda" typeface="Tunga"/>
+        <a:font script="Guru" typeface="Raavi"/>
+        <a:font script="Cans" typeface="Euphemia"/>
+        <a:font script="Cher" typeface="Plantagenet Cherokee"/>
+        <a:font script="Yiii" typeface="Microsoft Yi Baiti"/>
+        <a:font script="Tibt" typeface="Microsoft Himalaya"/>
+        <a:font script="Thaa" typeface="MV Boli"/>
+        <a:font script="Deva" typeface="Mangal"/>
+        <a:font script="Telu" typeface="Gautami"/>
+        <a:font script="Taml" typeface="Latha"/>
+        <a:font script="Syrc" typeface="Estrangelo Edessa"/>
+        <a:font script="Orya" typeface="Kalinga"/>
+        <a:font script="Mlym" typeface="Kartika"/>
+        <a:font script="Laoo" typeface="DokChampa"/>
+        <a:font script="Sinh" typeface="Iskoola Pota"/>
+        <a:font script="Mong" typeface="Mongolian Baiti"/>
+        <a:font script="Viet" typeface="Arial"/>
+        <a:font script="Uigh" typeface="Microsoft Uighur"/>
+        <a:font script="Geor" typeface="Sylfaen"/>
+        <a:font script="Armn" typeface="Arial"/>
+        <a:font script="Bugi" typeface="Leelawadee UI"/>
+        <a:font script="Bopo" typeface="Microsoft JhengHei"/>
+        <a:font script="Java" typeface="Javanese Text"/>
+        <a:font script="Lisu" typeface="Segoe UI"/>
+        <a:font script="Mymr" typeface="Myanmar Text"/>
+        <a:font script="Nkoo" typeface="Ebrima"/>
+        <a:font script="Olck" typeface="Nirmala UI"/>
+        <a:font script="Osma" typeface="Ebrima"/>
+        <a:font script="Phag" typeface="Phagspa"/>
+        <a:font script="Syrn" typeface="Estrangelo Edessa"/>
+        <a:font script="Syrj" typeface="Estrangelo Edessa"/>
+        <a:font script="Syre" typeface="Estrangelo Edessa"/>
+        <a:font script="Sora" typeface="Nirmala UI"/>
+        <a:font script="Tale" typeface="Microsoft Tai Le"/>
+        <a:font script="Talu" typeface="Microsoft New Tai Lue"/>
+        <a:font script="Tfng" typeface="Ebrima"/>
+      </a:minorFont>
+    </a:fontScheme>
+    <a:fmtScheme name="Office">
+      <a:fillStyleLst>
+        <a:solidFill>
+          <a:schemeClr val="phClr"/>
+        </a:solidFill>
+        <a:gradFill rotWithShape="1">
+          <a:gsLst>
+            <a:gs pos="0">
+              <a:schemeClr val="phClr">
+                <a:lumMod val="110000"/>
+                <a:satMod val="105000"/>
+                <a:tint val="67000"/>
+              </a:schemeClr>
+            </a:gs>
+            <a:gs pos="50000">
+              <a:schemeClr val="phClr">
+                <a:lumMod val="105000"/>
+                <a:satMod val="103000"/>
+                <a:tint val="73000"/>
+              </a:schemeClr>
+            </a:gs>
+            <a:gs pos="100000">
+              <a:schemeClr val="phClr">
+                <a:lumMod val="105000"/>
+                <a:satMod val="109000"/>
+                <a:tint val="81000"/>
+              </a:schemeClr>
+            </a:gs>
+          </a:gsLst>
+          <a:lin ang="5400000" scaled="0"/>
+        </a:gradFill>
+        <a:gradFill rotWithShape="1">
+          <a:gsLst>
+            <a:gs pos="0">
+              <a:schemeClr val="phClr">
+                <a:satMod val="103000"/>
+                <a:lumMod val="102000"/>
+                <a:tint val="94000"/>
+              </a:schemeClr>
+            </a:gs>
+            <a:gs pos="50000">
+              <a:schemeClr val="phClr">
+                <a:satMod val="110000"/>
+                <a:lumMod val="100000"/>
+                <a:shade val="100000"/>
+              </a:schemeClr>
+            </a:gs>
+            <a:gs pos="100000">
+              <a:schemeClr val="phClr">
+                <a:lumMod val="99000"/>
+                <a:satMod val="120000"/>
+                <a:shade val="78000"/>
+              </a:schemeClr>
+            </a:gs>
+          </a:gsLst>
+          <a:lin ang="5400000" scaled="0"/>
+        </a:gradFill>
+      </a:fillStyleLst>
+      <a:lnStyleLst>
+        <a:ln w="12700" cap="flat" cmpd="sng" algn="ctr">
+          <a:solidFill>
+            <a:schemeClr val="phClr"/>
+          </a:solidFill>
+          <a:prstDash val="solid"/>
+          <a:miter lim="800000"/>
+        </a:ln>
+        <a:ln w="19050" cap="flat" cmpd="sng" algn="ctr">
+          <a:solidFill>
+            <a:schemeClr val="phClr"/>
+          </a:solidFill>
+          <a:prstDash val="solid"/>
+          <a:miter lim="800000"/>
+        </a:ln>
+        <a:ln w="25400" cap="flat" cmpd="sng" algn="ctr">
+          <a:solidFill>
+            <a:schemeClr val="phClr"/>
+          </a:solidFill>
+          <a:prstDash val="solid"/>
+          <a:miter lim="800000"/>
+        </a:ln>
+      </a:lnStyleLst>
+      <a:effectStyleLst>
+        <a:effectStyle>
+          <a:effectLst/>
+        </a:effectStyle>
+        <a:effectStyle>
+          <a:effectLst/>
+        </a:effectStyle>
+        <a:effectStyle>
+          <a:effectLst>
+            <a:outerShdw blurRad="57150" dist="19050" dir="5400000" algn="ctr" rotWithShape="0">
+              <a:srgbClr val="000000">
+                <a:alpha val="63000"/>
+              </a:srgbClr>
+            </a:outerShdw>
+          </a:effectLst>
+        </a:effectStyle>
+      </a:effectStyleLst>
+      <a:bgFillStyleLst>
+        <a:solidFill>
+          <a:schemeClr val="phClr"/>
+        </a:solidFill>
+        <a:solidFill>
+          <a:schemeClr val="phClr">
+            <a:tint val="95000"/>
+            <a:satMod val="170000"/>
+          </a:schemeClr>
+        </a:solidFill>
+        <a:gradFill rotWithShape="1">
+          <a:gsLst>
+            <a:gs pos="0">
+              <a:schemeClr val="phClr">
+                <a:tint val="93000"/>
+                <a:satMod val="150000"/>
+                <a:shade val="98000"/>
+                <a:lumMod val="102000"/>
+              </a:schemeClr>
+            </a:gs>
+            <a:gs pos="50000">
+              <a:schemeClr val="phClr">
+                <a:tint val="98000"/>
+                <a:satMod val="130000"/>
+                <a:shade val="90000"/>
+                <a:lumMod val="103000"/>
+              </a:schemeClr>
+            </a:gs>
+            <a:gs pos="100000">
+              <a:schemeClr val="phClr">
+                <a:shade val="63000"/>
+                <a:satMod val="120000"/>
+              </a:schemeClr>
+            </a:gs>
+          </a:gsLst>
+          <a:lin ang="5400000" scaled="0"/>
+        </a:gradFill>
+      </a:bgFillStyleLst>
+    </a:fmtScheme>
+  </a:themeElements>
+  <a:objectDefaults>
+    <a:lnDef>
+      <a:spPr/>
+      <a:bodyPr/>
+      <a:lstStyle/>
+      <a:style>
+        <a:lnRef idx="2">
+          <a:schemeClr val="accent1"/>
+        </a:lnRef>
+        <a:fillRef idx="0">
+          <a:schemeClr val="accent1"/>
+        </a:fillRef>
+        <a:effectRef idx="1">
+          <a:schemeClr val="accent1"/>
+        </a:effectRef>
+        <a:fontRef idx="minor">
+          <a:schemeClr val="tx1"/>
+        </a:fontRef>
+      </a:style>
+    </a:lnDef>
+  </a:objectDefaults>
+  <a:extraClrSchemeLst/>
+  <a:extLst>
+    <a:ext uri="{05A4C25C-085E-4340-85A3-A5531E510DB2}">
+      <thm15:themeFamily xmlns:thm15="http://schemas.microsoft.com/office/thememl/2012/main" name="Office Theme" id="{2E142A2C-CD16-42D6-873A-C26D2A0506FA}" vid="{1BDDFF52-6CD6-40A5-AB3C-68EB2F1E4D0A}"/>
+    </a:ext>
+  </a:extLst>
+</a:theme>
 </file>
--- a/presentation/presentation.pptx
+++ b/presentation/presentation.pptx
@@ -5,7 +5,7 @@
     <p:sldMasterId id="2147483648" r:id="rId1"/>
   </p:sldMasterIdLst>
   <p:notesMasterIdLst>
-    <p:notesMasterId r:id="rId18"/>
+    <p:notesMasterId r:id="rId21"/>
   </p:notesMasterIdLst>
   <p:sldIdLst>
     <p:sldId id="256" r:id="rId2"/>
@@ -17,13 +17,16 @@
     <p:sldId id="262" r:id="rId8"/>
     <p:sldId id="263" r:id="rId9"/>
     <p:sldId id="264" r:id="rId10"/>
-    <p:sldId id="265" r:id="rId11"/>
-    <p:sldId id="266" r:id="rId12"/>
-    <p:sldId id="267" r:id="rId13"/>
-    <p:sldId id="268" r:id="rId14"/>
-    <p:sldId id="269" r:id="rId15"/>
-    <p:sldId id="270" r:id="rId16"/>
-    <p:sldId id="271" r:id="rId17"/>
+    <p:sldId id="272" r:id="rId11"/>
+    <p:sldId id="274" r:id="rId12"/>
+    <p:sldId id="273" r:id="rId13"/>
+    <p:sldId id="265" r:id="rId14"/>
+    <p:sldId id="266" r:id="rId15"/>
+    <p:sldId id="267" r:id="rId16"/>
+    <p:sldId id="268" r:id="rId17"/>
+    <p:sldId id="269" r:id="rId18"/>
+    <p:sldId id="270" r:id="rId19"/>
+    <p:sldId id="271" r:id="rId20"/>
   </p:sldIdLst>
   <p:sldSz cx="9144000" cy="5143500" type="screen16x9"/>
   <p:notesSz cx="5143500" cy="9144000"/>
@@ -446,7 +449,7 @@
           <a:p>
             <a:fld id="{F7021451-1387-4CA6-816F-3879F97B5CBC}" type="slidenum">
               <a:rPr lang="en-US"/>
-              <a:t>10</a:t>
+              <a:t>13</a:t>
             </a:fld>
             <a:endParaRPr lang="en-US"/>
           </a:p>
@@ -530,7 +533,7 @@
           <a:p>
             <a:fld id="{F7021451-1387-4CA6-816F-3879F97B5CBC}" type="slidenum">
               <a:rPr lang="en-US"/>
-              <a:t>11</a:t>
+              <a:t>14</a:t>
             </a:fld>
             <a:endParaRPr lang="en-US"/>
           </a:p>
@@ -614,7 +617,7 @@
           <a:p>
             <a:fld id="{F7021451-1387-4CA6-816F-3879F97B5CBC}" type="slidenum">
               <a:rPr lang="en-US"/>
-              <a:t>12</a:t>
+              <a:t>15</a:t>
             </a:fld>
             <a:endParaRPr lang="en-US"/>
           </a:p>
@@ -698,7 +701,7 @@
           <a:p>
             <a:fld id="{F7021451-1387-4CA6-816F-3879F97B5CBC}" type="slidenum">
               <a:rPr lang="en-US"/>
-              <a:t>13</a:t>
+              <a:t>16</a:t>
             </a:fld>
             <a:endParaRPr lang="en-US"/>
           </a:p>
@@ -782,7 +785,7 @@
           <a:p>
             <a:fld id="{F7021451-1387-4CA6-816F-3879F97B5CBC}" type="slidenum">
               <a:rPr lang="en-US"/>
-              <a:t>14</a:t>
+              <a:t>17</a:t>
             </a:fld>
             <a:endParaRPr lang="en-US"/>
           </a:p>
@@ -866,7 +869,7 @@
           <a:p>
             <a:fld id="{F7021451-1387-4CA6-816F-3879F97B5CBC}" type="slidenum">
               <a:rPr lang="en-US"/>
-              <a:t>15</a:t>
+              <a:t>18</a:t>
             </a:fld>
             <a:endParaRPr lang="en-US"/>
           </a:p>
@@ -950,7 +953,7 @@
           <a:p>
             <a:fld id="{F7021451-1387-4CA6-816F-3879F97B5CBC}" type="slidenum">
               <a:rPr lang="en-US"/>
-              <a:t>16</a:t>
+              <a:t>19</a:t>
             </a:fld>
             <a:endParaRPr lang="en-US"/>
           </a:p>
@@ -2188,6 +2191,2159 @@
 
 <file path=ppt/slides/slide10.xml><?xml version="1.0" encoding="utf-8"?>
 <p:sld xmlns:a="http://schemas.openxmlformats.org/drawingml/2006/main" xmlns:r="http://schemas.openxmlformats.org/officeDocument/2006/relationships" xmlns:p="http://schemas.openxmlformats.org/presentationml/2006/main">
+  <p:cSld>
+    <p:spTree>
+      <p:nvGrpSpPr>
+        <p:cNvPr id="1" name=""/>
+        <p:cNvGrpSpPr/>
+        <p:nvPr/>
+      </p:nvGrpSpPr>
+      <p:grpSpPr>
+        <a:xfrm>
+          <a:off x="0" y="0"/>
+          <a:ext cx="0" cy="0"/>
+          <a:chOff x="0" y="0"/>
+          <a:chExt cx="0" cy="0"/>
+        </a:xfrm>
+      </p:grpSpPr>
+      <p:sp>
+        <p:nvSpPr>
+          <p:cNvPr id="3" name="TextBox 2">
+            <a:extLst>
+              <a:ext uri="{FF2B5EF4-FFF2-40B4-BE49-F238E27FC236}">
+                <a16:creationId xmlns:a16="http://schemas.microsoft.com/office/drawing/2014/main" id="{3BAD9DAF-B8A4-6C70-A890-BC9A92F7334B}"/>
+              </a:ext>
+            </a:extLst>
+          </p:cNvPr>
+          <p:cNvSpPr txBox="1"/>
+          <p:nvPr/>
+        </p:nvSpPr>
+        <p:spPr>
+          <a:xfrm>
+            <a:off x="457200" y="1007911"/>
+            <a:ext cx="8054622" cy="2492990"/>
+          </a:xfrm>
+          <a:prstGeom prst="rect">
+            <a:avLst/>
+          </a:prstGeom>
+          <a:noFill/>
+        </p:spPr>
+        <p:txBody>
+          <a:bodyPr wrap="square">
+            <a:spAutoFit/>
+          </a:bodyPr>
+          <a:lstStyle/>
+          <a:p>
+            <a:r>
+              <a:rPr lang="el-GR" sz="1200" dirty="0">
+                <a:solidFill>
+                  <a:srgbClr val="1E293B"/>
+                </a:solidFill>
+                <a:latin typeface="Calibri" pitchFamily="34" charset="0"/>
+                <a:cs typeface="Calibri" pitchFamily="34" charset="-120"/>
+              </a:rPr>
+              <a:t>Το γραφικό περιβάλλον της εφαρμογής υλοποιείται αποκλειστικά με </a:t>
+            </a:r>
+            <a:r>
+              <a:rPr lang="en-US" sz="1200" dirty="0" err="1">
+                <a:solidFill>
+                  <a:srgbClr val="1E293B"/>
+                </a:solidFill>
+                <a:latin typeface="Calibri" pitchFamily="34" charset="0"/>
+                <a:cs typeface="Calibri" pitchFamily="34" charset="-120"/>
+              </a:rPr>
+              <a:t>Tkinter</a:t>
+            </a:r>
+            <a:r>
+              <a:rPr lang="en-US" sz="1200" dirty="0">
+                <a:solidFill>
+                  <a:srgbClr val="1E293B"/>
+                </a:solidFill>
+                <a:latin typeface="Calibri" pitchFamily="34" charset="0"/>
+                <a:cs typeface="Calibri" pitchFamily="34" charset="-120"/>
+              </a:rPr>
+              <a:t> </a:t>
+            </a:r>
+            <a:r>
+              <a:rPr lang="el-GR" sz="1200" dirty="0">
+                <a:solidFill>
+                  <a:srgbClr val="1E293B"/>
+                </a:solidFill>
+                <a:latin typeface="Calibri" pitchFamily="34" charset="0"/>
+                <a:cs typeface="Calibri" pitchFamily="34" charset="-120"/>
+              </a:rPr>
+              <a:t>και ακολουθεί αυστηρά το </a:t>
+            </a:r>
+            <a:r>
+              <a:rPr lang="en-US" sz="1200" dirty="0">
+                <a:solidFill>
+                  <a:srgbClr val="1E293B"/>
+                </a:solidFill>
+                <a:latin typeface="Calibri" pitchFamily="34" charset="0"/>
+                <a:cs typeface="Calibri" pitchFamily="34" charset="-120"/>
+              </a:rPr>
+              <a:t>Layered Architecture Pattern. </a:t>
+            </a:r>
+            <a:r>
+              <a:rPr lang="el-GR" sz="1200" dirty="0">
+                <a:solidFill>
+                  <a:srgbClr val="1E293B"/>
+                </a:solidFill>
+                <a:latin typeface="Calibri" pitchFamily="34" charset="0"/>
+                <a:cs typeface="Calibri" pitchFamily="34" charset="-120"/>
+              </a:rPr>
+              <a:t>Το </a:t>
+            </a:r>
+            <a:r>
+              <a:rPr lang="en-US" sz="1200" dirty="0">
+                <a:solidFill>
+                  <a:srgbClr val="1E293B"/>
+                </a:solidFill>
+                <a:latin typeface="Calibri" pitchFamily="34" charset="0"/>
+                <a:cs typeface="Calibri" pitchFamily="34" charset="-120"/>
+              </a:rPr>
+              <a:t>GUI </a:t>
+            </a:r>
+            <a:r>
+              <a:rPr lang="el-GR" sz="1200" dirty="0">
+                <a:solidFill>
+                  <a:srgbClr val="1E293B"/>
+                </a:solidFill>
+                <a:latin typeface="Calibri" pitchFamily="34" charset="0"/>
+                <a:cs typeface="Calibri" pitchFamily="34" charset="-120"/>
+              </a:rPr>
+              <a:t>αποτελεί το ανώτερο επίπεδο (</a:t>
+            </a:r>
+            <a:r>
+              <a:rPr lang="en-US" sz="1200" dirty="0">
+                <a:solidFill>
+                  <a:srgbClr val="1E293B"/>
+                </a:solidFill>
+                <a:latin typeface="Calibri" pitchFamily="34" charset="0"/>
+                <a:cs typeface="Calibri" pitchFamily="34" charset="-120"/>
+              </a:rPr>
+              <a:t>Layer 1) </a:t>
+            </a:r>
+            <a:r>
+              <a:rPr lang="el-GR" sz="1200" dirty="0">
+                <a:solidFill>
+                  <a:srgbClr val="1E293B"/>
+                </a:solidFill>
+                <a:latin typeface="Calibri" pitchFamily="34" charset="0"/>
+                <a:cs typeface="Calibri" pitchFamily="34" charset="-120"/>
+              </a:rPr>
+              <a:t>και δεν έχει καμία γνώση για </a:t>
+            </a:r>
+            <a:r>
+              <a:rPr lang="en-US" sz="1200" dirty="0">
+                <a:solidFill>
+                  <a:srgbClr val="1E293B"/>
+                </a:solidFill>
+                <a:latin typeface="Calibri" pitchFamily="34" charset="0"/>
+                <a:cs typeface="Calibri" pitchFamily="34" charset="-120"/>
+              </a:rPr>
+              <a:t>SQL, DTOs </a:t>
+            </a:r>
+            <a:r>
+              <a:rPr lang="el-GR" sz="1200" dirty="0">
+                <a:solidFill>
+                  <a:srgbClr val="1E293B"/>
+                </a:solidFill>
+                <a:latin typeface="Calibri" pitchFamily="34" charset="0"/>
+                <a:cs typeface="Calibri" pitchFamily="34" charset="-120"/>
+              </a:rPr>
+              <a:t>ή </a:t>
+            </a:r>
+            <a:r>
+              <a:rPr lang="en-US" sz="1200" dirty="0">
+                <a:solidFill>
+                  <a:srgbClr val="1E293B"/>
+                </a:solidFill>
+                <a:latin typeface="Calibri" pitchFamily="34" charset="0"/>
+                <a:cs typeface="Calibri" pitchFamily="34" charset="-120"/>
+              </a:rPr>
+              <a:t>validators. </a:t>
+            </a:r>
+            <a:r>
+              <a:rPr lang="el-GR" sz="1200" dirty="0">
+                <a:solidFill>
+                  <a:srgbClr val="1E293B"/>
+                </a:solidFill>
+                <a:latin typeface="Calibri" pitchFamily="34" charset="0"/>
+                <a:cs typeface="Calibri" pitchFamily="34" charset="-120"/>
+              </a:rPr>
+              <a:t>Όλη η επικοινωνία γίνεται μέσω της </a:t>
+            </a:r>
+            <a:r>
+              <a:rPr lang="en-US" sz="1200" dirty="0" err="1">
+                <a:solidFill>
+                  <a:srgbClr val="1E293B"/>
+                </a:solidFill>
+                <a:latin typeface="Calibri" pitchFamily="34" charset="0"/>
+                <a:cs typeface="Calibri" pitchFamily="34" charset="-120"/>
+              </a:rPr>
+              <a:t>BusinessLogic</a:t>
+            </a:r>
+            <a:r>
+              <a:rPr lang="en-US" sz="1200" dirty="0">
+                <a:solidFill>
+                  <a:srgbClr val="1E293B"/>
+                </a:solidFill>
+                <a:latin typeface="Calibri" pitchFamily="34" charset="0"/>
+                <a:cs typeface="Calibri" pitchFamily="34" charset="-120"/>
+              </a:rPr>
+              <a:t> (Facade).</a:t>
+            </a:r>
+          </a:p>
+          <a:p>
+            <a:endParaRPr lang="en-US" sz="1200" dirty="0">
+              <a:solidFill>
+                <a:srgbClr val="1E293B"/>
+              </a:solidFill>
+              <a:latin typeface="Calibri" pitchFamily="34" charset="0"/>
+              <a:cs typeface="Calibri" pitchFamily="34" charset="-120"/>
+            </a:endParaRPr>
+          </a:p>
+          <a:p>
+            <a:r>
+              <a:rPr lang="el-GR" sz="1200" dirty="0">
+                <a:solidFill>
+                  <a:srgbClr val="1E293B"/>
+                </a:solidFill>
+                <a:latin typeface="Calibri" pitchFamily="34" charset="0"/>
+                <a:cs typeface="Calibri" pitchFamily="34" charset="-120"/>
+              </a:rPr>
+              <a:t>Η σχεδίαση του </a:t>
+            </a:r>
+            <a:r>
+              <a:rPr lang="en-US" sz="1200" dirty="0">
+                <a:solidFill>
+                  <a:srgbClr val="1E293B"/>
+                </a:solidFill>
+                <a:latin typeface="Calibri" pitchFamily="34" charset="0"/>
+                <a:cs typeface="Calibri" pitchFamily="34" charset="-120"/>
+              </a:rPr>
+              <a:t>Frontend </a:t>
+            </a:r>
+            <a:r>
+              <a:rPr lang="el-GR" sz="1200" dirty="0">
+                <a:solidFill>
+                  <a:srgbClr val="1E293B"/>
+                </a:solidFill>
+                <a:latin typeface="Calibri" pitchFamily="34" charset="0"/>
+                <a:cs typeface="Calibri" pitchFamily="34" charset="-120"/>
+              </a:rPr>
+              <a:t>βασίζεται σε τέσσερις βασικές αρχές:</a:t>
+            </a:r>
+          </a:p>
+          <a:p>
+            <a:pPr marL="228600" indent="-228600">
+              <a:buFont typeface="+mj-lt"/>
+              <a:buAutoNum type="arabicPeriod"/>
+            </a:pPr>
+            <a:endParaRPr lang="el-GR" sz="1200" b="1" dirty="0">
+              <a:solidFill>
+                <a:srgbClr val="1E293B"/>
+              </a:solidFill>
+              <a:latin typeface="Calibri" pitchFamily="34" charset="0"/>
+              <a:cs typeface="Calibri" pitchFamily="34" charset="-120"/>
+            </a:endParaRPr>
+          </a:p>
+          <a:p>
+            <a:pPr marL="228600" indent="-228600">
+              <a:buFont typeface="+mj-lt"/>
+              <a:buAutoNum type="arabicPeriod"/>
+            </a:pPr>
+            <a:r>
+              <a:rPr lang="en-US" sz="1200" b="1" dirty="0">
+                <a:solidFill>
+                  <a:srgbClr val="1E293B"/>
+                </a:solidFill>
+                <a:latin typeface="Calibri" pitchFamily="34" charset="0"/>
+                <a:cs typeface="Calibri" pitchFamily="34" charset="-120"/>
+              </a:rPr>
+              <a:t>Single Responsibility </a:t>
+            </a:r>
+            <a:r>
+              <a:rPr lang="el-GR" sz="1200" b="1" dirty="0">
+                <a:solidFill>
+                  <a:srgbClr val="1E293B"/>
+                </a:solidFill>
+                <a:latin typeface="Calibri" pitchFamily="34" charset="0"/>
+                <a:cs typeface="Calibri" pitchFamily="34" charset="-120"/>
+              </a:rPr>
+              <a:t>ανά σελίδα</a:t>
+            </a:r>
+          </a:p>
+          <a:p>
+            <a:pPr marL="228600" indent="-228600">
+              <a:buFont typeface="+mj-lt"/>
+              <a:buAutoNum type="arabicPeriod"/>
+            </a:pPr>
+            <a:endParaRPr lang="el-GR" sz="1200" b="1" dirty="0">
+              <a:solidFill>
+                <a:srgbClr val="1E293B"/>
+              </a:solidFill>
+              <a:latin typeface="Calibri" pitchFamily="34" charset="0"/>
+              <a:cs typeface="Calibri" pitchFamily="34" charset="-120"/>
+            </a:endParaRPr>
+          </a:p>
+          <a:p>
+            <a:pPr marL="228600" indent="-228600">
+              <a:buFont typeface="+mj-lt"/>
+              <a:buAutoNum type="arabicPeriod"/>
+            </a:pPr>
+            <a:r>
+              <a:rPr lang="en-US" sz="1200" b="1" dirty="0">
+                <a:solidFill>
+                  <a:srgbClr val="1E293B"/>
+                </a:solidFill>
+                <a:latin typeface="Calibri" pitchFamily="34" charset="0"/>
+                <a:cs typeface="Calibri" pitchFamily="34" charset="-120"/>
+              </a:rPr>
+              <a:t>Consistency </a:t>
+            </a:r>
+            <a:r>
+              <a:rPr lang="el-GR" sz="1200" b="1" dirty="0">
+                <a:solidFill>
+                  <a:srgbClr val="1E293B"/>
+                </a:solidFill>
+                <a:latin typeface="Calibri" pitchFamily="34" charset="0"/>
+                <a:cs typeface="Calibri" pitchFamily="34" charset="-120"/>
+              </a:rPr>
+              <a:t>σε χρώματα, </a:t>
+            </a:r>
+            <a:r>
+              <a:rPr lang="en-US" sz="1200" b="1" dirty="0">
+                <a:solidFill>
+                  <a:srgbClr val="1E293B"/>
+                </a:solidFill>
+                <a:latin typeface="Calibri" pitchFamily="34" charset="0"/>
+                <a:cs typeface="Calibri" pitchFamily="34" charset="-120"/>
+              </a:rPr>
+              <a:t>fonts </a:t>
+            </a:r>
+            <a:r>
+              <a:rPr lang="el-GR" sz="1200" b="1" dirty="0">
+                <a:solidFill>
+                  <a:srgbClr val="1E293B"/>
+                </a:solidFill>
+                <a:latin typeface="Calibri" pitchFamily="34" charset="0"/>
+                <a:cs typeface="Calibri" pitchFamily="34" charset="-120"/>
+              </a:rPr>
+              <a:t>και </a:t>
+            </a:r>
+            <a:r>
+              <a:rPr lang="en-US" sz="1200" b="1" dirty="0">
+                <a:solidFill>
+                  <a:srgbClr val="1E293B"/>
+                </a:solidFill>
+                <a:latin typeface="Calibri" pitchFamily="34" charset="0"/>
+                <a:cs typeface="Calibri" pitchFamily="34" charset="-120"/>
+              </a:rPr>
+              <a:t>layout</a:t>
+            </a:r>
+          </a:p>
+          <a:p>
+            <a:pPr marL="228600" indent="-228600">
+              <a:buFont typeface="+mj-lt"/>
+              <a:buAutoNum type="arabicPeriod"/>
+            </a:pPr>
+            <a:endParaRPr lang="en-US" sz="1200" b="1" dirty="0">
+              <a:solidFill>
+                <a:srgbClr val="1E293B"/>
+              </a:solidFill>
+              <a:latin typeface="Calibri" pitchFamily="34" charset="0"/>
+              <a:cs typeface="Calibri" pitchFamily="34" charset="-120"/>
+            </a:endParaRPr>
+          </a:p>
+          <a:p>
+            <a:pPr marL="228600" indent="-228600">
+              <a:buFont typeface="+mj-lt"/>
+              <a:buAutoNum type="arabicPeriod"/>
+            </a:pPr>
+            <a:r>
+              <a:rPr lang="en-US" sz="1200" b="1" dirty="0">
+                <a:solidFill>
+                  <a:srgbClr val="1E293B"/>
+                </a:solidFill>
+                <a:latin typeface="Calibri" pitchFamily="34" charset="0"/>
+                <a:cs typeface="Calibri" pitchFamily="34" charset="-120"/>
+              </a:rPr>
+              <a:t>Stateless pages </a:t>
+            </a:r>
+            <a:r>
+              <a:rPr lang="el-GR" sz="1200" b="1" dirty="0">
+                <a:solidFill>
+                  <a:srgbClr val="1E293B"/>
+                </a:solidFill>
+                <a:latin typeface="Calibri" pitchFamily="34" charset="0"/>
+                <a:cs typeface="Calibri" pitchFamily="34" charset="-120"/>
+              </a:rPr>
+              <a:t>με </a:t>
+            </a:r>
+            <a:r>
+              <a:rPr lang="en-US" sz="1200" b="1" dirty="0">
+                <a:solidFill>
+                  <a:srgbClr val="1E293B"/>
+                </a:solidFill>
+                <a:latin typeface="Calibri" pitchFamily="34" charset="0"/>
+                <a:cs typeface="Calibri" pitchFamily="34" charset="-120"/>
+              </a:rPr>
+              <a:t>reset() hooks</a:t>
+            </a:r>
+          </a:p>
+          <a:p>
+            <a:pPr marL="228600" indent="-228600">
+              <a:buFont typeface="+mj-lt"/>
+              <a:buAutoNum type="arabicPeriod"/>
+            </a:pPr>
+            <a:endParaRPr lang="en-US" sz="1200" b="1" dirty="0">
+              <a:solidFill>
+                <a:srgbClr val="1E293B"/>
+              </a:solidFill>
+              <a:latin typeface="Calibri" pitchFamily="34" charset="0"/>
+              <a:cs typeface="Calibri" pitchFamily="34" charset="-120"/>
+            </a:endParaRPr>
+          </a:p>
+          <a:p>
+            <a:pPr marL="228600" indent="-228600">
+              <a:buFont typeface="+mj-lt"/>
+              <a:buAutoNum type="arabicPeriod"/>
+            </a:pPr>
+            <a:r>
+              <a:rPr lang="el-GR" sz="1200" b="1" dirty="0">
+                <a:solidFill>
+                  <a:srgbClr val="1E293B"/>
+                </a:solidFill>
+                <a:latin typeface="Calibri" pitchFamily="34" charset="0"/>
+                <a:cs typeface="Calibri" pitchFamily="34" charset="-120"/>
+              </a:rPr>
+              <a:t>Απομόνωση των </a:t>
+            </a:r>
+            <a:r>
+              <a:rPr lang="en-US" sz="1200" b="1" dirty="0">
+                <a:solidFill>
+                  <a:srgbClr val="1E293B"/>
+                </a:solidFill>
+                <a:latin typeface="Calibri" pitchFamily="34" charset="0"/>
+                <a:cs typeface="Calibri" pitchFamily="34" charset="-120"/>
+              </a:rPr>
+              <a:t>assets (icons, images) </a:t>
+            </a:r>
+            <a:r>
+              <a:rPr lang="el-GR" sz="1200" b="1" dirty="0">
+                <a:solidFill>
+                  <a:srgbClr val="1E293B"/>
+                </a:solidFill>
+                <a:latin typeface="Calibri" pitchFamily="34" charset="0"/>
+                <a:cs typeface="Calibri" pitchFamily="34" charset="-120"/>
+              </a:rPr>
+              <a:t>σε </a:t>
+            </a:r>
+            <a:r>
+              <a:rPr lang="en-US" sz="1200" b="1" dirty="0">
+                <a:solidFill>
+                  <a:srgbClr val="1E293B"/>
+                </a:solidFill>
+                <a:latin typeface="Calibri" pitchFamily="34" charset="0"/>
+                <a:cs typeface="Calibri" pitchFamily="34" charset="-120"/>
+              </a:rPr>
+              <a:t>resources folder</a:t>
+            </a:r>
+            <a:endParaRPr lang="en-US" b="1" dirty="0"/>
+          </a:p>
+        </p:txBody>
+      </p:sp>
+      <p:sp>
+        <p:nvSpPr>
+          <p:cNvPr id="4" name="Text 0">
+            <a:extLst>
+              <a:ext uri="{FF2B5EF4-FFF2-40B4-BE49-F238E27FC236}">
+                <a16:creationId xmlns:a16="http://schemas.microsoft.com/office/drawing/2014/main" id="{1CAEFCE7-EBF7-758A-D143-4D2DC17ECBC2}"/>
+              </a:ext>
+            </a:extLst>
+          </p:cNvPr>
+          <p:cNvSpPr/>
+          <p:nvPr/>
+        </p:nvSpPr>
+        <p:spPr>
+          <a:xfrm>
+            <a:off x="457200" y="274320"/>
+            <a:ext cx="8229600" cy="502920"/>
+          </a:xfrm>
+          <a:prstGeom prst="rect">
+            <a:avLst/>
+          </a:prstGeom>
+          <a:noFill/>
+          <a:ln/>
+        </p:spPr>
+        <p:txBody>
+          <a:bodyPr wrap="square" lIns="0" tIns="0" rIns="0" bIns="0" rtlCol="0" anchor="ctr"/>
+          <a:lstStyle/>
+          <a:p>
+            <a:r>
+              <a:rPr lang="en-US" sz="2600" b="1" dirty="0">
+                <a:solidFill>
+                  <a:srgbClr val="065A82"/>
+                </a:solidFill>
+                <a:latin typeface="Calibri" pitchFamily="34" charset="0"/>
+                <a:cs typeface="Calibri" pitchFamily="34" charset="-120"/>
+              </a:rPr>
+              <a:t>Frontend Architecture (GUI Layer)</a:t>
+            </a:r>
+          </a:p>
+        </p:txBody>
+      </p:sp>
+    </p:spTree>
+    <p:extLst>
+      <p:ext uri="{BB962C8B-B14F-4D97-AF65-F5344CB8AC3E}">
+        <p14:creationId xmlns:p14="http://schemas.microsoft.com/office/powerpoint/2010/main" val="2385023617"/>
+      </p:ext>
+    </p:extLst>
+  </p:cSld>
+  <p:clrMapOvr>
+    <a:masterClrMapping/>
+  </p:clrMapOvr>
+</p:sld>
+</file>
+
+<file path=ppt/slides/slide11.xml><?xml version="1.0" encoding="utf-8"?>
+<p:sld xmlns:a="http://schemas.openxmlformats.org/drawingml/2006/main" xmlns:r="http://schemas.openxmlformats.org/officeDocument/2006/relationships" xmlns:p="http://schemas.openxmlformats.org/presentationml/2006/main">
+  <p:cSld>
+    <p:spTree>
+      <p:nvGrpSpPr>
+        <p:cNvPr id="1" name="">
+          <a:extLst>
+            <a:ext uri="{FF2B5EF4-FFF2-40B4-BE49-F238E27FC236}">
+              <a16:creationId xmlns:a16="http://schemas.microsoft.com/office/drawing/2014/main" id="{FD137E3E-34F3-24AF-9A52-105CC273A400}"/>
+            </a:ext>
+          </a:extLst>
+        </p:cNvPr>
+        <p:cNvGrpSpPr/>
+        <p:nvPr/>
+      </p:nvGrpSpPr>
+      <p:grpSpPr>
+        <a:xfrm>
+          <a:off x="0" y="0"/>
+          <a:ext cx="0" cy="0"/>
+          <a:chOff x="0" y="0"/>
+          <a:chExt cx="0" cy="0"/>
+        </a:xfrm>
+      </p:grpSpPr>
+      <p:sp>
+        <p:nvSpPr>
+          <p:cNvPr id="3" name="TextBox 2">
+            <a:extLst>
+              <a:ext uri="{FF2B5EF4-FFF2-40B4-BE49-F238E27FC236}">
+                <a16:creationId xmlns:a16="http://schemas.microsoft.com/office/drawing/2014/main" id="{F562C273-169B-9FC3-A7E8-2031E3425E3C}"/>
+              </a:ext>
+            </a:extLst>
+          </p:cNvPr>
+          <p:cNvSpPr txBox="1"/>
+          <p:nvPr/>
+        </p:nvSpPr>
+        <p:spPr>
+          <a:xfrm>
+            <a:off x="457200" y="1007911"/>
+            <a:ext cx="8054622" cy="276999"/>
+          </a:xfrm>
+          <a:prstGeom prst="rect">
+            <a:avLst/>
+          </a:prstGeom>
+          <a:noFill/>
+        </p:spPr>
+        <p:txBody>
+          <a:bodyPr wrap="square">
+            <a:spAutoFit/>
+          </a:bodyPr>
+          <a:lstStyle/>
+          <a:p>
+            <a:r>
+              <a:rPr lang="el-GR" sz="1200" dirty="0">
+                <a:solidFill>
+                  <a:srgbClr val="1E293B"/>
+                </a:solidFill>
+                <a:latin typeface="Calibri" pitchFamily="34" charset="0"/>
+                <a:cs typeface="Calibri" pitchFamily="34" charset="-120"/>
+              </a:rPr>
+              <a:t>Ο φάκελος </a:t>
+            </a:r>
+            <a:r>
+              <a:rPr lang="el-GR" sz="1200" dirty="0" err="1">
+                <a:solidFill>
+                  <a:srgbClr val="1E293B"/>
+                </a:solidFill>
+                <a:highlight>
+                  <a:srgbClr val="C0C0C0"/>
+                </a:highlight>
+                <a:latin typeface="Calibri" pitchFamily="34" charset="0"/>
+                <a:cs typeface="Calibri" pitchFamily="34" charset="-120"/>
+              </a:rPr>
+              <a:t>gui</a:t>
+            </a:r>
+            <a:r>
+              <a:rPr lang="el-GR" sz="1200" dirty="0">
+                <a:solidFill>
+                  <a:srgbClr val="1E293B"/>
+                </a:solidFill>
+                <a:highlight>
+                  <a:srgbClr val="C0C0C0"/>
+                </a:highlight>
+                <a:latin typeface="Calibri" pitchFamily="34" charset="0"/>
+                <a:cs typeface="Calibri" pitchFamily="34" charset="-120"/>
+              </a:rPr>
+              <a:t>/</a:t>
+            </a:r>
+            <a:r>
+              <a:rPr lang="el-GR" sz="1200" dirty="0">
+                <a:solidFill>
+                  <a:srgbClr val="1E293B"/>
+                </a:solidFill>
+                <a:latin typeface="Calibri" pitchFamily="34" charset="0"/>
+                <a:cs typeface="Calibri" pitchFamily="34" charset="-120"/>
+              </a:rPr>
+              <a:t> περιέχει μία σελίδα ανά αρχείο, καθώς και βοηθητικά </a:t>
+            </a:r>
+            <a:r>
+              <a:rPr lang="el-GR" sz="1200" dirty="0" err="1">
+                <a:solidFill>
+                  <a:srgbClr val="1E293B"/>
+                </a:solidFill>
+                <a:latin typeface="Calibri" pitchFamily="34" charset="0"/>
+                <a:cs typeface="Calibri" pitchFamily="34" charset="-120"/>
+              </a:rPr>
+              <a:t>modules</a:t>
+            </a:r>
+            <a:r>
+              <a:rPr lang="el-GR" sz="1200" dirty="0">
+                <a:solidFill>
+                  <a:srgbClr val="1E293B"/>
+                </a:solidFill>
+                <a:latin typeface="Calibri" pitchFamily="34" charset="0"/>
+                <a:cs typeface="Calibri" pitchFamily="34" charset="-120"/>
+              </a:rPr>
+              <a:t>:</a:t>
+            </a:r>
+            <a:endParaRPr lang="en-US" b="1" dirty="0"/>
+          </a:p>
+        </p:txBody>
+      </p:sp>
+      <p:sp>
+        <p:nvSpPr>
+          <p:cNvPr id="4" name="Text 0">
+            <a:extLst>
+              <a:ext uri="{FF2B5EF4-FFF2-40B4-BE49-F238E27FC236}">
+                <a16:creationId xmlns:a16="http://schemas.microsoft.com/office/drawing/2014/main" id="{5668E33A-0609-4339-DB89-B766B770435E}"/>
+              </a:ext>
+            </a:extLst>
+          </p:cNvPr>
+          <p:cNvSpPr/>
+          <p:nvPr/>
+        </p:nvSpPr>
+        <p:spPr>
+          <a:xfrm>
+            <a:off x="457200" y="274320"/>
+            <a:ext cx="8229600" cy="502920"/>
+          </a:xfrm>
+          <a:prstGeom prst="rect">
+            <a:avLst/>
+          </a:prstGeom>
+          <a:noFill/>
+          <a:ln/>
+        </p:spPr>
+        <p:txBody>
+          <a:bodyPr wrap="square" lIns="0" tIns="0" rIns="0" bIns="0" rtlCol="0" anchor="ctr"/>
+          <a:lstStyle/>
+          <a:p>
+            <a:r>
+              <a:rPr lang="el-GR" sz="2600" b="1" dirty="0">
+                <a:solidFill>
+                  <a:srgbClr val="065A82"/>
+                </a:solidFill>
+                <a:latin typeface="Calibri" pitchFamily="34" charset="0"/>
+                <a:cs typeface="Calibri" pitchFamily="34" charset="-120"/>
+              </a:rPr>
+              <a:t>Δομή </a:t>
+            </a:r>
+            <a:r>
+              <a:rPr lang="en-US" sz="2600" b="1" dirty="0">
+                <a:solidFill>
+                  <a:srgbClr val="065A82"/>
+                </a:solidFill>
+                <a:latin typeface="Calibri" pitchFamily="34" charset="0"/>
+                <a:cs typeface="Calibri" pitchFamily="34" charset="-120"/>
+              </a:rPr>
+              <a:t>Frontend </a:t>
+            </a:r>
+            <a:r>
+              <a:rPr lang="el-GR" sz="2600" b="1" dirty="0">
+                <a:solidFill>
+                  <a:srgbClr val="065A82"/>
+                </a:solidFill>
+                <a:latin typeface="Calibri" pitchFamily="34" charset="0"/>
+                <a:cs typeface="Calibri" pitchFamily="34" charset="-120"/>
+              </a:rPr>
+              <a:t>Φακέλων</a:t>
+            </a:r>
+            <a:endParaRPr lang="en-US" sz="2600" b="1" dirty="0">
+              <a:solidFill>
+                <a:srgbClr val="065A82"/>
+              </a:solidFill>
+              <a:latin typeface="Calibri" pitchFamily="34" charset="0"/>
+              <a:cs typeface="Calibri" pitchFamily="34" charset="-120"/>
+            </a:endParaRPr>
+          </a:p>
+        </p:txBody>
+      </p:sp>
+      <p:graphicFrame>
+        <p:nvGraphicFramePr>
+          <p:cNvPr id="7" name="Table 6">
+            <a:extLst>
+              <a:ext uri="{FF2B5EF4-FFF2-40B4-BE49-F238E27FC236}">
+                <a16:creationId xmlns:a16="http://schemas.microsoft.com/office/drawing/2014/main" id="{CAD6A262-BE36-957A-47B9-AD4EA65A86EF}"/>
+              </a:ext>
+            </a:extLst>
+          </p:cNvPr>
+          <p:cNvGraphicFramePr>
+            <a:graphicFrameLocks noGrp="1"/>
+          </p:cNvGraphicFramePr>
+          <p:nvPr>
+            <p:extLst>
+              <p:ext uri="{D42A27DB-BD31-4B8C-83A1-F6EECF244321}">
+                <p14:modId xmlns:p14="http://schemas.microsoft.com/office/powerpoint/2010/main" val="2542517425"/>
+              </p:ext>
+            </p:extLst>
+          </p:nvPr>
+        </p:nvGraphicFramePr>
+        <p:xfrm>
+          <a:off x="524933" y="1351139"/>
+          <a:ext cx="4876800" cy="2667000"/>
+        </p:xfrm>
+        <a:graphic>
+          <a:graphicData uri="http://schemas.openxmlformats.org/drawingml/2006/table">
+            <a:tbl>
+              <a:tblPr>
+                <a:tableStyleId>{5C22544A-7EE6-4342-B048-85BDC9FD1C3A}</a:tableStyleId>
+              </a:tblPr>
+              <a:tblGrid>
+                <a:gridCol w="1421475">
+                  <a:extLst>
+                    <a:ext uri="{9D8B030D-6E8A-4147-A177-3AD203B41FA5}">
+                      <a16:colId xmlns:a16="http://schemas.microsoft.com/office/drawing/2014/main" val="1193177275"/>
+                    </a:ext>
+                  </a:extLst>
+                </a:gridCol>
+                <a:gridCol w="3455325">
+                  <a:extLst>
+                    <a:ext uri="{9D8B030D-6E8A-4147-A177-3AD203B41FA5}">
+                      <a16:colId xmlns:a16="http://schemas.microsoft.com/office/drawing/2014/main" val="2531803297"/>
+                    </a:ext>
+                  </a:extLst>
+                </a:gridCol>
+              </a:tblGrid>
+              <a:tr h="190500">
+                <a:tc>
+                  <a:txBody>
+                    <a:bodyPr/>
+                    <a:lstStyle/>
+                    <a:p>
+                      <a:pPr algn="l" rtl="0" fontAlgn="ctr">
+                        <a:buNone/>
+                      </a:pPr>
+                      <a:r>
+                        <a:rPr lang="en-US" sz="1000" u="none" strike="noStrike">
+                          <a:effectLst/>
+                          <a:latin typeface="Consolas" panose="020B0609020204030204" pitchFamily="49" charset="0"/>
+                        </a:rPr>
+                        <a:t>gui/</a:t>
+                      </a:r>
+                      <a:endParaRPr lang="en-US" sz="1000" b="0" i="0" u="none" strike="noStrike">
+                        <a:solidFill>
+                          <a:srgbClr val="000000"/>
+                        </a:solidFill>
+                        <a:effectLst/>
+                        <a:latin typeface="Consolas" panose="020B0609020204030204" pitchFamily="49" charset="0"/>
+                      </a:endParaRPr>
+                    </a:p>
+                  </a:txBody>
+                  <a:tcPr marL="9525" marR="9525" marT="9525" marB="0" anchor="ctr"/>
+                </a:tc>
+                <a:tc>
+                  <a:txBody>
+                    <a:bodyPr/>
+                    <a:lstStyle/>
+                    <a:p>
+                      <a:pPr algn="l" fontAlgn="b">
+                        <a:buNone/>
+                      </a:pPr>
+                      <a:endParaRPr lang="en-US" sz="1000" b="0" i="0" u="none" strike="noStrike">
+                        <a:solidFill>
+                          <a:srgbClr val="000000"/>
+                        </a:solidFill>
+                        <a:effectLst/>
+                        <a:latin typeface="Consolas" panose="020B0609020204030204" pitchFamily="49" charset="0"/>
+                      </a:endParaRPr>
+                    </a:p>
+                  </a:txBody>
+                  <a:tcPr marL="9525" marR="9525" marT="9525" marB="0" anchor="b"/>
+                </a:tc>
+                <a:extLst>
+                  <a:ext uri="{0D108BD9-81ED-4DB2-BD59-A6C34878D82A}">
+                    <a16:rowId xmlns:a16="http://schemas.microsoft.com/office/drawing/2014/main" val="2333278211"/>
+                  </a:ext>
+                </a:extLst>
+              </a:tr>
+              <a:tr h="190500">
+                <a:tc>
+                  <a:txBody>
+                    <a:bodyPr/>
+                    <a:lstStyle/>
+                    <a:p>
+                      <a:pPr algn="l" rtl="0" fontAlgn="ctr">
+                        <a:buNone/>
+                      </a:pPr>
+                      <a:r>
+                        <a:rPr lang="en-US" sz="1000" u="none" strike="noStrike">
+                          <a:effectLst/>
+                          <a:latin typeface="Consolas" panose="020B0609020204030204" pitchFamily="49" charset="0"/>
+                        </a:rPr>
+                        <a:t>MainTkWindow.py</a:t>
+                      </a:r>
+                      <a:endParaRPr lang="en-US" sz="1000" b="0" i="0" u="none" strike="noStrike">
+                        <a:solidFill>
+                          <a:srgbClr val="000000"/>
+                        </a:solidFill>
+                        <a:effectLst/>
+                        <a:latin typeface="Consolas" panose="020B0609020204030204" pitchFamily="49" charset="0"/>
+                      </a:endParaRPr>
+                    </a:p>
+                  </a:txBody>
+                  <a:tcPr marL="9525" marR="9525" marT="9525" marB="0" anchor="ctr"/>
+                </a:tc>
+                <a:tc>
+                  <a:txBody>
+                    <a:bodyPr/>
+                    <a:lstStyle/>
+                    <a:p>
+                      <a:pPr algn="l" fontAlgn="b">
+                        <a:buNone/>
+                      </a:pPr>
+                      <a:r>
+                        <a:rPr lang="el-GR" sz="1000" u="none" strike="noStrike" dirty="0">
+                          <a:effectLst/>
+                          <a:latin typeface="Consolas" panose="020B0609020204030204" pitchFamily="49" charset="0"/>
+                        </a:rPr>
+                        <a:t>Κεντρικό παράθυρο και </a:t>
+                      </a:r>
+                      <a:r>
+                        <a:rPr lang="en-US" sz="1000" u="none" strike="noStrike" dirty="0">
+                          <a:effectLst/>
+                          <a:latin typeface="Consolas" panose="020B0609020204030204" pitchFamily="49" charset="0"/>
+                        </a:rPr>
+                        <a:t>routing.</a:t>
+                      </a:r>
+                      <a:endParaRPr lang="en-US" sz="1000" b="0" i="0" u="none" strike="noStrike" dirty="0">
+                        <a:solidFill>
+                          <a:srgbClr val="000000"/>
+                        </a:solidFill>
+                        <a:effectLst/>
+                        <a:latin typeface="Consolas" panose="020B0609020204030204" pitchFamily="49" charset="0"/>
+                      </a:endParaRPr>
+                    </a:p>
+                  </a:txBody>
+                  <a:tcPr marL="9525" marR="9525" marT="9525" marB="0" anchor="b"/>
+                </a:tc>
+                <a:extLst>
+                  <a:ext uri="{0D108BD9-81ED-4DB2-BD59-A6C34878D82A}">
+                    <a16:rowId xmlns:a16="http://schemas.microsoft.com/office/drawing/2014/main" val="2131680286"/>
+                  </a:ext>
+                </a:extLst>
+              </a:tr>
+              <a:tr h="190500">
+                <a:tc>
+                  <a:txBody>
+                    <a:bodyPr/>
+                    <a:lstStyle/>
+                    <a:p>
+                      <a:pPr algn="l" rtl="0" fontAlgn="ctr">
+                        <a:buNone/>
+                      </a:pPr>
+                      <a:r>
+                        <a:rPr lang="en-US" sz="1000" u="none" strike="noStrike">
+                          <a:effectLst/>
+                          <a:latin typeface="Consolas" panose="020B0609020204030204" pitchFamily="49" charset="0"/>
+                        </a:rPr>
+                        <a:t>SideBar_Menu.py</a:t>
+                      </a:r>
+                      <a:endParaRPr lang="en-US" sz="1000" b="0" i="0" u="none" strike="noStrike">
+                        <a:solidFill>
+                          <a:srgbClr val="000000"/>
+                        </a:solidFill>
+                        <a:effectLst/>
+                        <a:latin typeface="Consolas" panose="020B0609020204030204" pitchFamily="49" charset="0"/>
+                      </a:endParaRPr>
+                    </a:p>
+                  </a:txBody>
+                  <a:tcPr marL="9525" marR="9525" marT="9525" marB="0" anchor="ctr"/>
+                </a:tc>
+                <a:tc>
+                  <a:txBody>
+                    <a:bodyPr/>
+                    <a:lstStyle/>
+                    <a:p>
+                      <a:pPr algn="l" fontAlgn="b">
+                        <a:buNone/>
+                      </a:pPr>
+                      <a:r>
+                        <a:rPr lang="el-GR" sz="1000" u="none" strike="noStrike">
+                          <a:effectLst/>
+                          <a:latin typeface="Consolas" panose="020B0609020204030204" pitchFamily="49" charset="0"/>
+                        </a:rPr>
+                        <a:t>Πλαϊνό μενού πλοήγησης.</a:t>
+                      </a:r>
+                      <a:endParaRPr lang="el-GR" sz="1000" b="0" i="0" u="none" strike="noStrike">
+                        <a:solidFill>
+                          <a:srgbClr val="000000"/>
+                        </a:solidFill>
+                        <a:effectLst/>
+                        <a:latin typeface="Consolas" panose="020B0609020204030204" pitchFamily="49" charset="0"/>
+                      </a:endParaRPr>
+                    </a:p>
+                  </a:txBody>
+                  <a:tcPr marL="9525" marR="9525" marT="9525" marB="0" anchor="b"/>
+                </a:tc>
+                <a:extLst>
+                  <a:ext uri="{0D108BD9-81ED-4DB2-BD59-A6C34878D82A}">
+                    <a16:rowId xmlns:a16="http://schemas.microsoft.com/office/drawing/2014/main" val="2989357445"/>
+                  </a:ext>
+                </a:extLst>
+              </a:tr>
+              <a:tr h="190500">
+                <a:tc>
+                  <a:txBody>
+                    <a:bodyPr/>
+                    <a:lstStyle/>
+                    <a:p>
+                      <a:pPr algn="l" rtl="0" fontAlgn="ctr">
+                        <a:buNone/>
+                      </a:pPr>
+                      <a:r>
+                        <a:rPr lang="en-US" sz="1000" u="none" strike="noStrike">
+                          <a:effectLst/>
+                          <a:latin typeface="Consolas" panose="020B0609020204030204" pitchFamily="49" charset="0"/>
+                        </a:rPr>
+                        <a:t>Styles.py</a:t>
+                      </a:r>
+                      <a:endParaRPr lang="en-US" sz="1000" b="0" i="0" u="none" strike="noStrike">
+                        <a:solidFill>
+                          <a:srgbClr val="000000"/>
+                        </a:solidFill>
+                        <a:effectLst/>
+                        <a:latin typeface="Consolas" panose="020B0609020204030204" pitchFamily="49" charset="0"/>
+                      </a:endParaRPr>
+                    </a:p>
+                  </a:txBody>
+                  <a:tcPr marL="9525" marR="9525" marT="9525" marB="0" anchor="ctr"/>
+                </a:tc>
+                <a:tc>
+                  <a:txBody>
+                    <a:bodyPr/>
+                    <a:lstStyle/>
+                    <a:p>
+                      <a:pPr algn="l" fontAlgn="b">
+                        <a:buNone/>
+                      </a:pPr>
+                      <a:r>
+                        <a:rPr lang="el-GR" sz="1000" u="none" strike="noStrike">
+                          <a:effectLst/>
+                          <a:latin typeface="Consolas" panose="020B0609020204030204" pitchFamily="49" charset="0"/>
+                        </a:rPr>
+                        <a:t>Ορισμός ttk styles, χρωμάτων και fonts.</a:t>
+                      </a:r>
+                      <a:endParaRPr lang="el-GR" sz="1000" b="0" i="0" u="none" strike="noStrike">
+                        <a:solidFill>
+                          <a:srgbClr val="000000"/>
+                        </a:solidFill>
+                        <a:effectLst/>
+                        <a:latin typeface="Consolas" panose="020B0609020204030204" pitchFamily="49" charset="0"/>
+                      </a:endParaRPr>
+                    </a:p>
+                  </a:txBody>
+                  <a:tcPr marL="9525" marR="9525" marT="9525" marB="0" anchor="b"/>
+                </a:tc>
+                <a:extLst>
+                  <a:ext uri="{0D108BD9-81ED-4DB2-BD59-A6C34878D82A}">
+                    <a16:rowId xmlns:a16="http://schemas.microsoft.com/office/drawing/2014/main" val="2574841362"/>
+                  </a:ext>
+                </a:extLst>
+              </a:tr>
+              <a:tr h="190500">
+                <a:tc>
+                  <a:txBody>
+                    <a:bodyPr/>
+                    <a:lstStyle/>
+                    <a:p>
+                      <a:pPr algn="l" rtl="0" fontAlgn="ctr">
+                        <a:buNone/>
+                      </a:pPr>
+                      <a:r>
+                        <a:rPr lang="en-US" sz="1000" u="none" strike="noStrike">
+                          <a:effectLst/>
+                          <a:latin typeface="Consolas" panose="020B0609020204030204" pitchFamily="49" charset="0"/>
+                        </a:rPr>
+                        <a:t>resources/</a:t>
+                      </a:r>
+                      <a:endParaRPr lang="en-US" sz="1000" b="0" i="0" u="none" strike="noStrike">
+                        <a:solidFill>
+                          <a:srgbClr val="000000"/>
+                        </a:solidFill>
+                        <a:effectLst/>
+                        <a:latin typeface="Consolas" panose="020B0609020204030204" pitchFamily="49" charset="0"/>
+                      </a:endParaRPr>
+                    </a:p>
+                  </a:txBody>
+                  <a:tcPr marL="9525" marR="9525" marT="9525" marB="0" anchor="ctr"/>
+                </a:tc>
+                <a:tc>
+                  <a:txBody>
+                    <a:bodyPr/>
+                    <a:lstStyle/>
+                    <a:p>
+                      <a:pPr algn="l" fontAlgn="b">
+                        <a:buNone/>
+                      </a:pPr>
+                      <a:r>
+                        <a:rPr lang="en-US" sz="1000" u="none" strike="noStrike" dirty="0">
+                          <a:effectLst/>
+                          <a:latin typeface="Consolas" panose="020B0609020204030204" pitchFamily="49" charset="0"/>
+                        </a:rPr>
+                        <a:t>PNG icons, SVGs, images.</a:t>
+                      </a:r>
+                      <a:endParaRPr lang="en-US" sz="1000" b="0" i="0" u="none" strike="noStrike" dirty="0">
+                        <a:solidFill>
+                          <a:srgbClr val="000000"/>
+                        </a:solidFill>
+                        <a:effectLst/>
+                        <a:latin typeface="Consolas" panose="020B0609020204030204" pitchFamily="49" charset="0"/>
+                      </a:endParaRPr>
+                    </a:p>
+                  </a:txBody>
+                  <a:tcPr marL="9525" marR="9525" marT="9525" marB="0" anchor="b"/>
+                </a:tc>
+                <a:extLst>
+                  <a:ext uri="{0D108BD9-81ED-4DB2-BD59-A6C34878D82A}">
+                    <a16:rowId xmlns:a16="http://schemas.microsoft.com/office/drawing/2014/main" val="2685228144"/>
+                  </a:ext>
+                </a:extLst>
+              </a:tr>
+              <a:tr h="190500">
+                <a:tc>
+                  <a:txBody>
+                    <a:bodyPr/>
+                    <a:lstStyle/>
+                    <a:p>
+                      <a:pPr algn="l" rtl="0" fontAlgn="ctr">
+                        <a:buNone/>
+                      </a:pPr>
+                      <a:r>
+                        <a:rPr lang="en-US" sz="1000" u="none" strike="noStrike">
+                          <a:effectLst/>
+                          <a:latin typeface="Consolas" panose="020B0609020204030204" pitchFamily="49" charset="0"/>
+                        </a:rPr>
+                        <a:t>Dashboard_Page.py</a:t>
+                      </a:r>
+                      <a:endParaRPr lang="en-US" sz="1000" b="0" i="0" u="none" strike="noStrike">
+                        <a:solidFill>
+                          <a:srgbClr val="000000"/>
+                        </a:solidFill>
+                        <a:effectLst/>
+                        <a:latin typeface="Consolas" panose="020B0609020204030204" pitchFamily="49" charset="0"/>
+                      </a:endParaRPr>
+                    </a:p>
+                  </a:txBody>
+                  <a:tcPr marL="9525" marR="9525" marT="9525" marB="0" anchor="ctr"/>
+                </a:tc>
+                <a:tc>
+                  <a:txBody>
+                    <a:bodyPr/>
+                    <a:lstStyle/>
+                    <a:p>
+                      <a:pPr algn="l" fontAlgn="b">
+                        <a:buNone/>
+                      </a:pPr>
+                      <a:r>
+                        <a:rPr lang="en-US" sz="1000" u="none" strike="noStrike">
+                          <a:effectLst/>
+                          <a:latin typeface="Consolas" panose="020B0609020204030204" pitchFamily="49" charset="0"/>
+                        </a:rPr>
+                        <a:t>KPI cards, </a:t>
+                      </a:r>
+                      <a:r>
+                        <a:rPr lang="el-GR" sz="1000" u="none" strike="noStrike">
+                          <a:effectLst/>
+                          <a:latin typeface="Consolas" panose="020B0609020204030204" pitchFamily="49" charset="0"/>
+                        </a:rPr>
+                        <a:t>γραφήματα.</a:t>
+                      </a:r>
+                      <a:endParaRPr lang="el-GR" sz="1000" b="0" i="0" u="none" strike="noStrike">
+                        <a:solidFill>
+                          <a:srgbClr val="000000"/>
+                        </a:solidFill>
+                        <a:effectLst/>
+                        <a:latin typeface="Consolas" panose="020B0609020204030204" pitchFamily="49" charset="0"/>
+                      </a:endParaRPr>
+                    </a:p>
+                  </a:txBody>
+                  <a:tcPr marL="9525" marR="9525" marT="9525" marB="0" anchor="b"/>
+                </a:tc>
+                <a:extLst>
+                  <a:ext uri="{0D108BD9-81ED-4DB2-BD59-A6C34878D82A}">
+                    <a16:rowId xmlns:a16="http://schemas.microsoft.com/office/drawing/2014/main" val="1736119412"/>
+                  </a:ext>
+                </a:extLst>
+              </a:tr>
+              <a:tr h="190500">
+                <a:tc>
+                  <a:txBody>
+                    <a:bodyPr/>
+                    <a:lstStyle/>
+                    <a:p>
+                      <a:pPr algn="l" rtl="0" fontAlgn="ctr">
+                        <a:buNone/>
+                      </a:pPr>
+                      <a:r>
+                        <a:rPr lang="en-US" sz="1000" u="none" strike="noStrike">
+                          <a:effectLst/>
+                          <a:latin typeface="Consolas" panose="020B0609020204030204" pitchFamily="49" charset="0"/>
+                        </a:rPr>
+                        <a:t>Books_Page.py</a:t>
+                      </a:r>
+                      <a:endParaRPr lang="en-US" sz="1000" b="0" i="0" u="none" strike="noStrike">
+                        <a:solidFill>
+                          <a:srgbClr val="000000"/>
+                        </a:solidFill>
+                        <a:effectLst/>
+                        <a:latin typeface="Consolas" panose="020B0609020204030204" pitchFamily="49" charset="0"/>
+                      </a:endParaRPr>
+                    </a:p>
+                  </a:txBody>
+                  <a:tcPr marL="9525" marR="9525" marT="9525" marB="0" anchor="ctr"/>
+                </a:tc>
+                <a:tc>
+                  <a:txBody>
+                    <a:bodyPr/>
+                    <a:lstStyle/>
+                    <a:p>
+                      <a:pPr algn="l" fontAlgn="b">
+                        <a:buNone/>
+                      </a:pPr>
+                      <a:r>
+                        <a:rPr lang="el-GR" sz="1000" u="none" strike="noStrike">
+                          <a:effectLst/>
+                          <a:latin typeface="Consolas" panose="020B0609020204030204" pitchFamily="49" charset="0"/>
+                        </a:rPr>
+                        <a:t>Αναζήτηση, λίστα, </a:t>
+                      </a:r>
+                      <a:r>
+                        <a:rPr lang="en-US" sz="1000" u="none" strike="noStrike">
+                          <a:effectLst/>
+                          <a:latin typeface="Consolas" panose="020B0609020204030204" pitchFamily="49" charset="0"/>
+                        </a:rPr>
+                        <a:t>CRUD </a:t>
+                      </a:r>
+                      <a:r>
+                        <a:rPr lang="el-GR" sz="1000" u="none" strike="noStrike">
+                          <a:effectLst/>
+                          <a:latin typeface="Consolas" panose="020B0609020204030204" pitchFamily="49" charset="0"/>
+                        </a:rPr>
+                        <a:t>βιβλίων.</a:t>
+                      </a:r>
+                      <a:endParaRPr lang="el-GR" sz="1000" b="0" i="0" u="none" strike="noStrike">
+                        <a:solidFill>
+                          <a:srgbClr val="000000"/>
+                        </a:solidFill>
+                        <a:effectLst/>
+                        <a:latin typeface="Consolas" panose="020B0609020204030204" pitchFamily="49" charset="0"/>
+                      </a:endParaRPr>
+                    </a:p>
+                  </a:txBody>
+                  <a:tcPr marL="9525" marR="9525" marT="9525" marB="0" anchor="b"/>
+                </a:tc>
+                <a:extLst>
+                  <a:ext uri="{0D108BD9-81ED-4DB2-BD59-A6C34878D82A}">
+                    <a16:rowId xmlns:a16="http://schemas.microsoft.com/office/drawing/2014/main" val="3301284130"/>
+                  </a:ext>
+                </a:extLst>
+              </a:tr>
+              <a:tr h="190500">
+                <a:tc>
+                  <a:txBody>
+                    <a:bodyPr/>
+                    <a:lstStyle/>
+                    <a:p>
+                      <a:pPr algn="l" rtl="0" fontAlgn="ctr">
+                        <a:buNone/>
+                      </a:pPr>
+                      <a:r>
+                        <a:rPr lang="en-US" sz="1000" u="none" strike="noStrike">
+                          <a:effectLst/>
+                          <a:latin typeface="Consolas" panose="020B0609020204030204" pitchFamily="49" charset="0"/>
+                        </a:rPr>
+                        <a:t>Book_Edit_Page.py</a:t>
+                      </a:r>
+                      <a:endParaRPr lang="en-US" sz="1000" b="0" i="0" u="none" strike="noStrike">
+                        <a:solidFill>
+                          <a:srgbClr val="000000"/>
+                        </a:solidFill>
+                        <a:effectLst/>
+                        <a:latin typeface="Consolas" panose="020B0609020204030204" pitchFamily="49" charset="0"/>
+                      </a:endParaRPr>
+                    </a:p>
+                  </a:txBody>
+                  <a:tcPr marL="9525" marR="9525" marT="9525" marB="0" anchor="ctr"/>
+                </a:tc>
+                <a:tc>
+                  <a:txBody>
+                    <a:bodyPr/>
+                    <a:lstStyle/>
+                    <a:p>
+                      <a:pPr algn="l" fontAlgn="b">
+                        <a:buNone/>
+                      </a:pPr>
+                      <a:r>
+                        <a:rPr lang="el-GR" sz="1000" u="none" strike="noStrike">
+                          <a:effectLst/>
+                          <a:latin typeface="Consolas" panose="020B0609020204030204" pitchFamily="49" charset="0"/>
+                        </a:rPr>
+                        <a:t>Φόρμα προσθήκης/ενημέρωσης βιβλίου.</a:t>
+                      </a:r>
+                      <a:endParaRPr lang="el-GR" sz="1000" b="0" i="0" u="none" strike="noStrike">
+                        <a:solidFill>
+                          <a:srgbClr val="000000"/>
+                        </a:solidFill>
+                        <a:effectLst/>
+                        <a:latin typeface="Consolas" panose="020B0609020204030204" pitchFamily="49" charset="0"/>
+                      </a:endParaRPr>
+                    </a:p>
+                  </a:txBody>
+                  <a:tcPr marL="9525" marR="9525" marT="9525" marB="0" anchor="b"/>
+                </a:tc>
+                <a:extLst>
+                  <a:ext uri="{0D108BD9-81ED-4DB2-BD59-A6C34878D82A}">
+                    <a16:rowId xmlns:a16="http://schemas.microsoft.com/office/drawing/2014/main" val="1346213981"/>
+                  </a:ext>
+                </a:extLst>
+              </a:tr>
+              <a:tr h="190500">
+                <a:tc>
+                  <a:txBody>
+                    <a:bodyPr/>
+                    <a:lstStyle/>
+                    <a:p>
+                      <a:pPr algn="l" rtl="0" fontAlgn="ctr">
+                        <a:buNone/>
+                      </a:pPr>
+                      <a:r>
+                        <a:rPr lang="en-US" sz="1000" u="none" strike="noStrike">
+                          <a:effectLst/>
+                          <a:latin typeface="Consolas" panose="020B0609020204030204" pitchFamily="49" charset="0"/>
+                        </a:rPr>
+                        <a:t>Categories_Page.py</a:t>
+                      </a:r>
+                      <a:endParaRPr lang="en-US" sz="1000" b="0" i="0" u="none" strike="noStrike">
+                        <a:solidFill>
+                          <a:srgbClr val="000000"/>
+                        </a:solidFill>
+                        <a:effectLst/>
+                        <a:latin typeface="Consolas" panose="020B0609020204030204" pitchFamily="49" charset="0"/>
+                      </a:endParaRPr>
+                    </a:p>
+                  </a:txBody>
+                  <a:tcPr marL="9525" marR="9525" marT="9525" marB="0" anchor="ctr"/>
+                </a:tc>
+                <a:tc>
+                  <a:txBody>
+                    <a:bodyPr/>
+                    <a:lstStyle/>
+                    <a:p>
+                      <a:pPr algn="l" fontAlgn="b">
+                        <a:buNone/>
+                      </a:pPr>
+                      <a:r>
+                        <a:rPr lang="en-US" sz="1000" u="none" strike="noStrike">
+                          <a:effectLst/>
+                          <a:latin typeface="Consolas" panose="020B0609020204030204" pitchFamily="49" charset="0"/>
+                        </a:rPr>
+                        <a:t>CRUD </a:t>
+                      </a:r>
+                      <a:r>
+                        <a:rPr lang="el-GR" sz="1000" u="none" strike="noStrike">
+                          <a:effectLst/>
+                          <a:latin typeface="Consolas" panose="020B0609020204030204" pitchFamily="49" charset="0"/>
+                        </a:rPr>
+                        <a:t>κατηγοριών.</a:t>
+                      </a:r>
+                      <a:endParaRPr lang="el-GR" sz="1000" b="0" i="0" u="none" strike="noStrike">
+                        <a:solidFill>
+                          <a:srgbClr val="000000"/>
+                        </a:solidFill>
+                        <a:effectLst/>
+                        <a:latin typeface="Consolas" panose="020B0609020204030204" pitchFamily="49" charset="0"/>
+                      </a:endParaRPr>
+                    </a:p>
+                  </a:txBody>
+                  <a:tcPr marL="9525" marR="9525" marT="9525" marB="0" anchor="b"/>
+                </a:tc>
+                <a:extLst>
+                  <a:ext uri="{0D108BD9-81ED-4DB2-BD59-A6C34878D82A}">
+                    <a16:rowId xmlns:a16="http://schemas.microsoft.com/office/drawing/2014/main" val="898650595"/>
+                  </a:ext>
+                </a:extLst>
+              </a:tr>
+              <a:tr h="190500">
+                <a:tc>
+                  <a:txBody>
+                    <a:bodyPr/>
+                    <a:lstStyle/>
+                    <a:p>
+                      <a:pPr algn="l" rtl="0" fontAlgn="ctr">
+                        <a:buNone/>
+                      </a:pPr>
+                      <a:r>
+                        <a:rPr lang="en-US" sz="1000" u="none" strike="noStrike">
+                          <a:effectLst/>
+                          <a:latin typeface="Consolas" panose="020B0609020204030204" pitchFamily="49" charset="0"/>
+                        </a:rPr>
+                        <a:t>Loans_Page.py</a:t>
+                      </a:r>
+                      <a:endParaRPr lang="en-US" sz="1000" b="0" i="0" u="none" strike="noStrike">
+                        <a:solidFill>
+                          <a:srgbClr val="000000"/>
+                        </a:solidFill>
+                        <a:effectLst/>
+                        <a:latin typeface="Consolas" panose="020B0609020204030204" pitchFamily="49" charset="0"/>
+                      </a:endParaRPr>
+                    </a:p>
+                  </a:txBody>
+                  <a:tcPr marL="9525" marR="9525" marT="9525" marB="0" anchor="ctr"/>
+                </a:tc>
+                <a:tc>
+                  <a:txBody>
+                    <a:bodyPr/>
+                    <a:lstStyle/>
+                    <a:p>
+                      <a:pPr algn="l" fontAlgn="b">
+                        <a:buNone/>
+                      </a:pPr>
+                      <a:r>
+                        <a:rPr lang="el-GR" sz="1000" u="none" strike="noStrike">
+                          <a:effectLst/>
+                          <a:latin typeface="Consolas" panose="020B0609020204030204" pitchFamily="49" charset="0"/>
+                        </a:rPr>
+                        <a:t>Δανεισμός και επιστροφή.</a:t>
+                      </a:r>
+                      <a:endParaRPr lang="el-GR" sz="1000" b="0" i="0" u="none" strike="noStrike">
+                        <a:solidFill>
+                          <a:srgbClr val="000000"/>
+                        </a:solidFill>
+                        <a:effectLst/>
+                        <a:latin typeface="Consolas" panose="020B0609020204030204" pitchFamily="49" charset="0"/>
+                      </a:endParaRPr>
+                    </a:p>
+                  </a:txBody>
+                  <a:tcPr marL="9525" marR="9525" marT="9525" marB="0" anchor="b"/>
+                </a:tc>
+                <a:extLst>
+                  <a:ext uri="{0D108BD9-81ED-4DB2-BD59-A6C34878D82A}">
+                    <a16:rowId xmlns:a16="http://schemas.microsoft.com/office/drawing/2014/main" val="1318515075"/>
+                  </a:ext>
+                </a:extLst>
+              </a:tr>
+              <a:tr h="190500">
+                <a:tc>
+                  <a:txBody>
+                    <a:bodyPr/>
+                    <a:lstStyle/>
+                    <a:p>
+                      <a:pPr algn="l" rtl="0" fontAlgn="ctr">
+                        <a:buNone/>
+                      </a:pPr>
+                      <a:r>
+                        <a:rPr lang="en-US" sz="1000" u="none" strike="noStrike">
+                          <a:effectLst/>
+                          <a:latin typeface="Consolas" panose="020B0609020204030204" pitchFamily="49" charset="0"/>
+                        </a:rPr>
+                        <a:t>Members_Page.py</a:t>
+                      </a:r>
+                      <a:endParaRPr lang="en-US" sz="1000" b="0" i="0" u="none" strike="noStrike">
+                        <a:solidFill>
+                          <a:srgbClr val="000000"/>
+                        </a:solidFill>
+                        <a:effectLst/>
+                        <a:latin typeface="Consolas" panose="020B0609020204030204" pitchFamily="49" charset="0"/>
+                      </a:endParaRPr>
+                    </a:p>
+                  </a:txBody>
+                  <a:tcPr marL="9525" marR="9525" marT="9525" marB="0" anchor="ctr"/>
+                </a:tc>
+                <a:tc>
+                  <a:txBody>
+                    <a:bodyPr/>
+                    <a:lstStyle/>
+                    <a:p>
+                      <a:pPr algn="l" fontAlgn="b">
+                        <a:buNone/>
+                      </a:pPr>
+                      <a:r>
+                        <a:rPr lang="en-US" sz="1000" u="none" strike="noStrike">
+                          <a:effectLst/>
+                          <a:latin typeface="Consolas" panose="020B0609020204030204" pitchFamily="49" charset="0"/>
+                        </a:rPr>
+                        <a:t>CRUD </a:t>
+                      </a:r>
+                      <a:r>
+                        <a:rPr lang="el-GR" sz="1000" u="none" strike="noStrike">
+                          <a:effectLst/>
+                          <a:latin typeface="Consolas" panose="020B0609020204030204" pitchFamily="49" charset="0"/>
+                        </a:rPr>
+                        <a:t>μελών.</a:t>
+                      </a:r>
+                      <a:endParaRPr lang="el-GR" sz="1000" b="0" i="0" u="none" strike="noStrike">
+                        <a:solidFill>
+                          <a:srgbClr val="000000"/>
+                        </a:solidFill>
+                        <a:effectLst/>
+                        <a:latin typeface="Consolas" panose="020B0609020204030204" pitchFamily="49" charset="0"/>
+                      </a:endParaRPr>
+                    </a:p>
+                  </a:txBody>
+                  <a:tcPr marL="9525" marR="9525" marT="9525" marB="0" anchor="b"/>
+                </a:tc>
+                <a:extLst>
+                  <a:ext uri="{0D108BD9-81ED-4DB2-BD59-A6C34878D82A}">
+                    <a16:rowId xmlns:a16="http://schemas.microsoft.com/office/drawing/2014/main" val="2801498337"/>
+                  </a:ext>
+                </a:extLst>
+              </a:tr>
+              <a:tr h="190500">
+                <a:tc>
+                  <a:txBody>
+                    <a:bodyPr/>
+                    <a:lstStyle/>
+                    <a:p>
+                      <a:pPr algn="l" rtl="0" fontAlgn="ctr">
+                        <a:buNone/>
+                      </a:pPr>
+                      <a:r>
+                        <a:rPr lang="en-US" sz="1000" u="none" strike="noStrike">
+                          <a:effectLst/>
+                          <a:latin typeface="Consolas" panose="020B0609020204030204" pitchFamily="49" charset="0"/>
+                        </a:rPr>
+                        <a:t>Rating_Page.py</a:t>
+                      </a:r>
+                      <a:endParaRPr lang="en-US" sz="1000" b="0" i="0" u="none" strike="noStrike">
+                        <a:solidFill>
+                          <a:srgbClr val="000000"/>
+                        </a:solidFill>
+                        <a:effectLst/>
+                        <a:latin typeface="Consolas" panose="020B0609020204030204" pitchFamily="49" charset="0"/>
+                      </a:endParaRPr>
+                    </a:p>
+                  </a:txBody>
+                  <a:tcPr marL="9525" marR="9525" marT="9525" marB="0" anchor="ctr"/>
+                </a:tc>
+                <a:tc>
+                  <a:txBody>
+                    <a:bodyPr/>
+                    <a:lstStyle/>
+                    <a:p>
+                      <a:pPr algn="l" fontAlgn="b">
+                        <a:buNone/>
+                      </a:pPr>
+                      <a:r>
+                        <a:rPr lang="el-GR" sz="1000" u="none" strike="noStrike" dirty="0">
+                          <a:effectLst/>
+                          <a:latin typeface="Consolas" panose="020B0609020204030204" pitchFamily="49" charset="0"/>
+                        </a:rPr>
+                        <a:t>Βαθμολόγηση βιβλίων.</a:t>
+                      </a:r>
+                      <a:endParaRPr lang="el-GR" sz="1000" b="0" i="0" u="none" strike="noStrike" dirty="0">
+                        <a:solidFill>
+                          <a:srgbClr val="000000"/>
+                        </a:solidFill>
+                        <a:effectLst/>
+                        <a:latin typeface="Consolas" panose="020B0609020204030204" pitchFamily="49" charset="0"/>
+                      </a:endParaRPr>
+                    </a:p>
+                  </a:txBody>
+                  <a:tcPr marL="9525" marR="9525" marT="9525" marB="0" anchor="b"/>
+                </a:tc>
+                <a:extLst>
+                  <a:ext uri="{0D108BD9-81ED-4DB2-BD59-A6C34878D82A}">
+                    <a16:rowId xmlns:a16="http://schemas.microsoft.com/office/drawing/2014/main" val="2856984972"/>
+                  </a:ext>
+                </a:extLst>
+              </a:tr>
+              <a:tr h="190500">
+                <a:tc>
+                  <a:txBody>
+                    <a:bodyPr/>
+                    <a:lstStyle/>
+                    <a:p>
+                      <a:pPr algn="l" rtl="0" fontAlgn="ctr">
+                        <a:buNone/>
+                      </a:pPr>
+                      <a:r>
+                        <a:rPr lang="en-US" sz="1000" u="none" strike="noStrike">
+                          <a:effectLst/>
+                          <a:latin typeface="Consolas" panose="020B0609020204030204" pitchFamily="49" charset="0"/>
+                        </a:rPr>
+                        <a:t>Recommend_Page.py</a:t>
+                      </a:r>
+                      <a:endParaRPr lang="en-US" sz="1000" b="0" i="0" u="none" strike="noStrike">
+                        <a:solidFill>
+                          <a:srgbClr val="000000"/>
+                        </a:solidFill>
+                        <a:effectLst/>
+                        <a:latin typeface="Consolas" panose="020B0609020204030204" pitchFamily="49" charset="0"/>
+                      </a:endParaRPr>
+                    </a:p>
+                  </a:txBody>
+                  <a:tcPr marL="9525" marR="9525" marT="9525" marB="0" anchor="ctr"/>
+                </a:tc>
+                <a:tc>
+                  <a:txBody>
+                    <a:bodyPr/>
+                    <a:lstStyle/>
+                    <a:p>
+                      <a:pPr algn="l" fontAlgn="b">
+                        <a:buNone/>
+                      </a:pPr>
+                      <a:r>
+                        <a:rPr lang="el-GR" sz="1000" u="none" strike="noStrike">
+                          <a:effectLst/>
+                          <a:latin typeface="Consolas" panose="020B0609020204030204" pitchFamily="49" charset="0"/>
+                        </a:rPr>
+                        <a:t>Προτάσεις ανά μέλος.</a:t>
+                      </a:r>
+                      <a:endParaRPr lang="el-GR" sz="1000" b="0" i="0" u="none" strike="noStrike">
+                        <a:solidFill>
+                          <a:srgbClr val="000000"/>
+                        </a:solidFill>
+                        <a:effectLst/>
+                        <a:latin typeface="Consolas" panose="020B0609020204030204" pitchFamily="49" charset="0"/>
+                      </a:endParaRPr>
+                    </a:p>
+                  </a:txBody>
+                  <a:tcPr marL="9525" marR="9525" marT="9525" marB="0" anchor="b"/>
+                </a:tc>
+                <a:extLst>
+                  <a:ext uri="{0D108BD9-81ED-4DB2-BD59-A6C34878D82A}">
+                    <a16:rowId xmlns:a16="http://schemas.microsoft.com/office/drawing/2014/main" val="232191248"/>
+                  </a:ext>
+                </a:extLst>
+              </a:tr>
+              <a:tr h="190500">
+                <a:tc>
+                  <a:txBody>
+                    <a:bodyPr/>
+                    <a:lstStyle/>
+                    <a:p>
+                      <a:pPr algn="l" rtl="0" fontAlgn="ctr">
+                        <a:buNone/>
+                      </a:pPr>
+                      <a:r>
+                        <a:rPr lang="en-US" sz="1000" u="none" strike="noStrike">
+                          <a:effectLst/>
+                          <a:latin typeface="Consolas" panose="020B0609020204030204" pitchFamily="49" charset="0"/>
+                        </a:rPr>
+                        <a:t>Statistics_Page.py</a:t>
+                      </a:r>
+                      <a:endParaRPr lang="en-US" sz="1000" b="0" i="0" u="none" strike="noStrike">
+                        <a:solidFill>
+                          <a:srgbClr val="000000"/>
+                        </a:solidFill>
+                        <a:effectLst/>
+                        <a:latin typeface="Consolas" panose="020B0609020204030204" pitchFamily="49" charset="0"/>
+                      </a:endParaRPr>
+                    </a:p>
+                  </a:txBody>
+                  <a:tcPr marL="9525" marR="9525" marT="9525" marB="0" anchor="ctr"/>
+                </a:tc>
+                <a:tc>
+                  <a:txBody>
+                    <a:bodyPr/>
+                    <a:lstStyle/>
+                    <a:p>
+                      <a:pPr algn="l" fontAlgn="b">
+                        <a:buNone/>
+                      </a:pPr>
+                      <a:r>
+                        <a:rPr lang="el-GR" sz="1000" u="none" strike="noStrike" dirty="0">
+                          <a:effectLst/>
+                          <a:latin typeface="Consolas" panose="020B0609020204030204" pitchFamily="49" charset="0"/>
+                        </a:rPr>
+                        <a:t>Ενότητες στατιστικών.</a:t>
+                      </a:r>
+                      <a:endParaRPr lang="el-GR" sz="1000" b="0" i="0" u="none" strike="noStrike" dirty="0">
+                        <a:solidFill>
+                          <a:srgbClr val="000000"/>
+                        </a:solidFill>
+                        <a:effectLst/>
+                        <a:latin typeface="Consolas" panose="020B0609020204030204" pitchFamily="49" charset="0"/>
+                      </a:endParaRPr>
+                    </a:p>
+                  </a:txBody>
+                  <a:tcPr marL="9525" marR="9525" marT="9525" marB="0" anchor="b"/>
+                </a:tc>
+                <a:extLst>
+                  <a:ext uri="{0D108BD9-81ED-4DB2-BD59-A6C34878D82A}">
+                    <a16:rowId xmlns:a16="http://schemas.microsoft.com/office/drawing/2014/main" val="2475861581"/>
+                  </a:ext>
+                </a:extLst>
+              </a:tr>
+            </a:tbl>
+          </a:graphicData>
+        </a:graphic>
+      </p:graphicFrame>
+      <p:sp>
+        <p:nvSpPr>
+          <p:cNvPr id="8" name="TextBox 7">
+            <a:extLst>
+              <a:ext uri="{FF2B5EF4-FFF2-40B4-BE49-F238E27FC236}">
+                <a16:creationId xmlns:a16="http://schemas.microsoft.com/office/drawing/2014/main" id="{A151ABA6-8902-BA20-02F8-BF99DCD72FAB}"/>
+              </a:ext>
+            </a:extLst>
+          </p:cNvPr>
+          <p:cNvSpPr txBox="1"/>
+          <p:nvPr/>
+        </p:nvSpPr>
+        <p:spPr>
+          <a:xfrm>
+            <a:off x="457200" y="4135589"/>
+            <a:ext cx="8054622" cy="276999"/>
+          </a:xfrm>
+          <a:prstGeom prst="rect">
+            <a:avLst/>
+          </a:prstGeom>
+          <a:noFill/>
+        </p:spPr>
+        <p:txBody>
+          <a:bodyPr wrap="square">
+            <a:spAutoFit/>
+          </a:bodyPr>
+          <a:lstStyle/>
+          <a:p>
+            <a:r>
+              <a:rPr lang="el-GR" sz="1200" dirty="0"/>
+              <a:t>Κάθε σελίδα είναι μία κλάση που κληρονομεί από </a:t>
+            </a:r>
+            <a:r>
+              <a:rPr lang="el-GR" sz="1200" dirty="0" err="1"/>
+              <a:t>ttk.Frame</a:t>
+            </a:r>
+            <a:endParaRPr lang="en-US" sz="1200" b="1" dirty="0"/>
+          </a:p>
+        </p:txBody>
+      </p:sp>
+    </p:spTree>
+    <p:extLst>
+      <p:ext uri="{BB962C8B-B14F-4D97-AF65-F5344CB8AC3E}">
+        <p14:creationId xmlns:p14="http://schemas.microsoft.com/office/powerpoint/2010/main" val="2481230961"/>
+      </p:ext>
+    </p:extLst>
+  </p:cSld>
+  <p:clrMapOvr>
+    <a:masterClrMapping/>
+  </p:clrMapOvr>
+</p:sld>
+</file>
+
+<file path=ppt/slides/slide12.xml><?xml version="1.0" encoding="utf-8"?>
+<p:sld xmlns:a="http://schemas.openxmlformats.org/drawingml/2006/main" xmlns:r="http://schemas.openxmlformats.org/officeDocument/2006/relationships" xmlns:p="http://schemas.openxmlformats.org/presentationml/2006/main">
+  <p:cSld>
+    <p:spTree>
+      <p:nvGrpSpPr>
+        <p:cNvPr id="1" name="">
+          <a:extLst>
+            <a:ext uri="{FF2B5EF4-FFF2-40B4-BE49-F238E27FC236}">
+              <a16:creationId xmlns:a16="http://schemas.microsoft.com/office/drawing/2014/main" id="{A04741C5-3995-5875-7E6E-6637170B1528}"/>
+            </a:ext>
+          </a:extLst>
+        </p:cNvPr>
+        <p:cNvGrpSpPr/>
+        <p:nvPr/>
+      </p:nvGrpSpPr>
+      <p:grpSpPr>
+        <a:xfrm>
+          <a:off x="0" y="0"/>
+          <a:ext cx="0" cy="0"/>
+          <a:chOff x="0" y="0"/>
+          <a:chExt cx="0" cy="0"/>
+        </a:xfrm>
+      </p:grpSpPr>
+      <p:sp>
+        <p:nvSpPr>
+          <p:cNvPr id="3" name="TextBox 2">
+            <a:extLst>
+              <a:ext uri="{FF2B5EF4-FFF2-40B4-BE49-F238E27FC236}">
+                <a16:creationId xmlns:a16="http://schemas.microsoft.com/office/drawing/2014/main" id="{60816DBD-1A79-A07A-B279-A77CDF4BF98E}"/>
+              </a:ext>
+            </a:extLst>
+          </p:cNvPr>
+          <p:cNvSpPr txBox="1"/>
+          <p:nvPr/>
+        </p:nvSpPr>
+        <p:spPr>
+          <a:xfrm>
+            <a:off x="457200" y="657956"/>
+            <a:ext cx="8054622" cy="2862322"/>
+          </a:xfrm>
+          <a:prstGeom prst="rect">
+            <a:avLst/>
+          </a:prstGeom>
+          <a:noFill/>
+        </p:spPr>
+        <p:txBody>
+          <a:bodyPr wrap="square">
+            <a:spAutoFit/>
+          </a:bodyPr>
+          <a:lstStyle/>
+          <a:p>
+            <a:endParaRPr lang="en-US" dirty="0"/>
+          </a:p>
+          <a:p>
+            <a:r>
+              <a:rPr lang="el-GR" sz="1200" dirty="0">
+                <a:solidFill>
+                  <a:srgbClr val="1E293B"/>
+                </a:solidFill>
+                <a:latin typeface="Calibri" pitchFamily="34" charset="0"/>
+                <a:cs typeface="Calibri" pitchFamily="34" charset="-120"/>
+              </a:rPr>
+              <a:t>Η σχεδίαση του </a:t>
+            </a:r>
+            <a:r>
+              <a:rPr lang="en-US" sz="1200" dirty="0">
+                <a:solidFill>
+                  <a:srgbClr val="1E293B"/>
+                </a:solidFill>
+                <a:latin typeface="Calibri" pitchFamily="34" charset="0"/>
+                <a:cs typeface="Calibri" pitchFamily="34" charset="-120"/>
+              </a:rPr>
+              <a:t>GUI </a:t>
+            </a:r>
+            <a:r>
+              <a:rPr lang="el-GR" sz="1200" dirty="0">
+                <a:solidFill>
+                  <a:srgbClr val="1E293B"/>
+                </a:solidFill>
+                <a:latin typeface="Calibri" pitchFamily="34" charset="0"/>
+                <a:cs typeface="Calibri" pitchFamily="34" charset="-120"/>
+              </a:rPr>
+              <a:t>ακολουθεί συγκεκριμένες </a:t>
+            </a:r>
+            <a:r>
+              <a:rPr lang="en-US" sz="1200" dirty="0">
+                <a:solidFill>
+                  <a:srgbClr val="1E293B"/>
+                </a:solidFill>
+                <a:latin typeface="Calibri" pitchFamily="34" charset="0"/>
+                <a:cs typeface="Calibri" pitchFamily="34" charset="-120"/>
+              </a:rPr>
+              <a:t>UX </a:t>
+            </a:r>
+            <a:r>
+              <a:rPr lang="el-GR" sz="1200" dirty="0">
+                <a:solidFill>
+                  <a:srgbClr val="1E293B"/>
+                </a:solidFill>
+                <a:latin typeface="Calibri" pitchFamily="34" charset="0"/>
+                <a:cs typeface="Calibri" pitchFamily="34" charset="-120"/>
+              </a:rPr>
+              <a:t>αρχές:</a:t>
+            </a:r>
+            <a:endParaRPr lang="en-US" sz="1200" dirty="0">
+              <a:solidFill>
+                <a:srgbClr val="1E293B"/>
+              </a:solidFill>
+              <a:latin typeface="Calibri" pitchFamily="34" charset="0"/>
+              <a:cs typeface="Calibri" pitchFamily="34" charset="-120"/>
+            </a:endParaRPr>
+          </a:p>
+          <a:p>
+            <a:endParaRPr lang="el-GR" sz="1200" dirty="0">
+              <a:solidFill>
+                <a:srgbClr val="1E293B"/>
+              </a:solidFill>
+              <a:latin typeface="Calibri" pitchFamily="34" charset="0"/>
+              <a:cs typeface="Calibri" pitchFamily="34" charset="-120"/>
+            </a:endParaRPr>
+          </a:p>
+          <a:p>
+            <a:pPr marL="285750" indent="-285750">
+              <a:buFont typeface="Arial" panose="020B0604020202020204" pitchFamily="34" charset="0"/>
+              <a:buChar char="•"/>
+            </a:pPr>
+            <a:r>
+              <a:rPr lang="en-US" sz="1200" dirty="0">
+                <a:solidFill>
+                  <a:srgbClr val="1E293B"/>
+                </a:solidFill>
+                <a:latin typeface="Calibri" pitchFamily="34" charset="0"/>
+                <a:cs typeface="Calibri" pitchFamily="34" charset="-120"/>
+              </a:rPr>
+              <a:t>Consistent spacing (20px margins, 10px paddings)</a:t>
+            </a:r>
+          </a:p>
+          <a:p>
+            <a:pPr marL="285750" indent="-285750">
+              <a:buFont typeface="Arial" panose="020B0604020202020204" pitchFamily="34" charset="0"/>
+              <a:buChar char="•"/>
+            </a:pPr>
+            <a:r>
+              <a:rPr lang="en-US" sz="1200" dirty="0">
+                <a:solidFill>
+                  <a:srgbClr val="1E293B"/>
+                </a:solidFill>
+                <a:latin typeface="Calibri" pitchFamily="34" charset="0"/>
+                <a:cs typeface="Calibri" pitchFamily="34" charset="-120"/>
+              </a:rPr>
+              <a:t>Flat modern buttons </a:t>
+            </a:r>
+            <a:r>
+              <a:rPr lang="el-GR" sz="1200" dirty="0">
+                <a:solidFill>
+                  <a:srgbClr val="1E293B"/>
+                </a:solidFill>
+                <a:latin typeface="Calibri" pitchFamily="34" charset="0"/>
+                <a:cs typeface="Calibri" pitchFamily="34" charset="-120"/>
+              </a:rPr>
+              <a:t>χωρίς περιττά </a:t>
+            </a:r>
+            <a:r>
+              <a:rPr lang="en-US" sz="1200" dirty="0">
+                <a:solidFill>
+                  <a:srgbClr val="1E293B"/>
+                </a:solidFill>
+                <a:latin typeface="Calibri" pitchFamily="34" charset="0"/>
+                <a:cs typeface="Calibri" pitchFamily="34" charset="-120"/>
+              </a:rPr>
+              <a:t>borders</a:t>
+            </a:r>
+          </a:p>
+          <a:p>
+            <a:pPr marL="285750" indent="-285750">
+              <a:buFont typeface="Arial" panose="020B0604020202020204" pitchFamily="34" charset="0"/>
+              <a:buChar char="•"/>
+            </a:pPr>
+            <a:r>
+              <a:rPr lang="en-US" sz="1200" dirty="0">
+                <a:solidFill>
+                  <a:srgbClr val="1E293B"/>
+                </a:solidFill>
+                <a:latin typeface="Calibri" pitchFamily="34" charset="0"/>
+                <a:cs typeface="Calibri" pitchFamily="34" charset="-120"/>
+              </a:rPr>
+              <a:t>Dark sidebar / light content contrast </a:t>
+            </a:r>
+            <a:r>
+              <a:rPr lang="el-GR" sz="1200" dirty="0">
+                <a:solidFill>
+                  <a:srgbClr val="1E293B"/>
+                </a:solidFill>
+                <a:latin typeface="Calibri" pitchFamily="34" charset="0"/>
+                <a:cs typeface="Calibri" pitchFamily="34" charset="-120"/>
+              </a:rPr>
+              <a:t>για καθαρή οπτική ιεραρχία</a:t>
+            </a:r>
+          </a:p>
+          <a:p>
+            <a:pPr marL="285750" indent="-285750">
+              <a:buFont typeface="Arial" panose="020B0604020202020204" pitchFamily="34" charset="0"/>
+              <a:buChar char="•"/>
+            </a:pPr>
+            <a:r>
+              <a:rPr lang="en-US" sz="1200" dirty="0">
+                <a:solidFill>
+                  <a:srgbClr val="1E293B"/>
+                </a:solidFill>
+                <a:latin typeface="Calibri" pitchFamily="34" charset="0"/>
+                <a:cs typeface="Calibri" pitchFamily="34" charset="-120"/>
+              </a:rPr>
+              <a:t>Responsive layout </a:t>
+            </a:r>
+            <a:r>
+              <a:rPr lang="el-GR" sz="1200" dirty="0">
+                <a:solidFill>
+                  <a:srgbClr val="1E293B"/>
+                </a:solidFill>
+                <a:latin typeface="Calibri" pitchFamily="34" charset="0"/>
+                <a:cs typeface="Calibri" pitchFamily="34" charset="-120"/>
+              </a:rPr>
+              <a:t>με συνδυασμό </a:t>
+            </a:r>
+            <a:r>
+              <a:rPr lang="en-US" sz="1200" dirty="0">
+                <a:solidFill>
+                  <a:srgbClr val="1E293B"/>
+                </a:solidFill>
+                <a:latin typeface="Calibri" pitchFamily="34" charset="0"/>
+                <a:cs typeface="Calibri" pitchFamily="34" charset="-120"/>
+              </a:rPr>
+              <a:t>grid/pack</a:t>
+            </a:r>
+          </a:p>
+          <a:p>
+            <a:pPr marL="285750" indent="-285750">
+              <a:buFont typeface="Arial" panose="020B0604020202020204" pitchFamily="34" charset="0"/>
+              <a:buChar char="•"/>
+            </a:pPr>
+            <a:r>
+              <a:rPr lang="en-US" sz="1200" dirty="0">
+                <a:solidFill>
+                  <a:srgbClr val="1E293B"/>
+                </a:solidFill>
+                <a:latin typeface="Calibri" pitchFamily="34" charset="0"/>
+                <a:cs typeface="Calibri" pitchFamily="34" charset="-120"/>
+              </a:rPr>
+              <a:t>Clear separation of concerns (</a:t>
+            </a:r>
+            <a:r>
+              <a:rPr lang="el-GR" sz="1200" dirty="0">
+                <a:solidFill>
+                  <a:srgbClr val="1E293B"/>
+                </a:solidFill>
+                <a:latin typeface="Calibri" pitchFamily="34" charset="0"/>
+                <a:cs typeface="Calibri" pitchFamily="34" charset="-120"/>
+              </a:rPr>
+              <a:t>κάθε σελίδα κάνει ένα πράγμα)</a:t>
+            </a:r>
+          </a:p>
+          <a:p>
+            <a:pPr marL="285750" indent="-285750">
+              <a:buFont typeface="Arial" panose="020B0604020202020204" pitchFamily="34" charset="0"/>
+              <a:buChar char="•"/>
+            </a:pPr>
+            <a:r>
+              <a:rPr lang="en-US" sz="1200" dirty="0">
+                <a:solidFill>
+                  <a:srgbClr val="1E293B"/>
+                </a:solidFill>
+                <a:latin typeface="Calibri" pitchFamily="34" charset="0"/>
+                <a:cs typeface="Calibri" pitchFamily="34" charset="-120"/>
+              </a:rPr>
+              <a:t>Minimal cognitive load — </a:t>
+            </a:r>
+            <a:r>
+              <a:rPr lang="el-GR" sz="1200" dirty="0">
+                <a:solidFill>
+                  <a:srgbClr val="1E293B"/>
+                </a:solidFill>
+                <a:latin typeface="Calibri" pitchFamily="34" charset="0"/>
+                <a:cs typeface="Calibri" pitchFamily="34" charset="-120"/>
+              </a:rPr>
+              <a:t>απλές φόρμες, καθαρά </a:t>
+            </a:r>
+            <a:r>
+              <a:rPr lang="en-US" sz="1200" dirty="0">
+                <a:solidFill>
+                  <a:srgbClr val="1E293B"/>
+                </a:solidFill>
+                <a:latin typeface="Calibri" pitchFamily="34" charset="0"/>
+                <a:cs typeface="Calibri" pitchFamily="34" charset="-120"/>
+              </a:rPr>
+              <a:t>tables, </a:t>
+            </a:r>
+            <a:r>
+              <a:rPr lang="el-GR" sz="1200" dirty="0">
+                <a:solidFill>
+                  <a:srgbClr val="1E293B"/>
+                </a:solidFill>
+                <a:latin typeface="Calibri" pitchFamily="34" charset="0"/>
+                <a:cs typeface="Calibri" pitchFamily="34" charset="-120"/>
+              </a:rPr>
+              <a:t>ξεκάθαρα κουμπιά</a:t>
+            </a:r>
+          </a:p>
+          <a:p>
+            <a:pPr marL="285750" indent="-285750">
+              <a:buFont typeface="Arial" panose="020B0604020202020204" pitchFamily="34" charset="0"/>
+              <a:buChar char="•"/>
+            </a:pPr>
+            <a:r>
+              <a:rPr lang="el-GR" sz="1200" dirty="0">
+                <a:solidFill>
+                  <a:srgbClr val="1E293B"/>
+                </a:solidFill>
+                <a:latin typeface="Calibri" pitchFamily="34" charset="0"/>
+                <a:cs typeface="Calibri" pitchFamily="34" charset="-120"/>
+              </a:rPr>
+              <a:t>Ομοιομορφία σε τίτλους, υπότιτλους και </a:t>
+            </a:r>
+            <a:r>
+              <a:rPr lang="en-US" sz="1200" dirty="0">
+                <a:solidFill>
+                  <a:srgbClr val="1E293B"/>
+                </a:solidFill>
+                <a:latin typeface="Calibri" pitchFamily="34" charset="0"/>
+                <a:cs typeface="Calibri" pitchFamily="34" charset="-120"/>
+              </a:rPr>
+              <a:t>card components</a:t>
+            </a:r>
+          </a:p>
+          <a:p>
+            <a:pPr marL="285750" indent="-285750">
+              <a:buFont typeface="Arial" panose="020B0604020202020204" pitchFamily="34" charset="0"/>
+              <a:buChar char="•"/>
+            </a:pPr>
+            <a:r>
+              <a:rPr lang="en-US" sz="1200" dirty="0">
+                <a:solidFill>
+                  <a:srgbClr val="1E293B"/>
+                </a:solidFill>
+                <a:latin typeface="Calibri" pitchFamily="34" charset="0"/>
+                <a:cs typeface="Calibri" pitchFamily="34" charset="-120"/>
+              </a:rPr>
+              <a:t>Scrollable pages </a:t>
+            </a:r>
+            <a:r>
+              <a:rPr lang="el-GR" sz="1200" dirty="0">
+                <a:solidFill>
+                  <a:srgbClr val="1E293B"/>
+                </a:solidFill>
+                <a:latin typeface="Calibri" pitchFamily="34" charset="0"/>
+                <a:cs typeface="Calibri" pitchFamily="34" charset="-120"/>
+              </a:rPr>
+              <a:t>όπου το περιεχόμενο είναι μεγάλο (</a:t>
+            </a:r>
+            <a:r>
+              <a:rPr lang="en-US" sz="1200" dirty="0" err="1">
+                <a:solidFill>
+                  <a:srgbClr val="1E293B"/>
+                </a:solidFill>
+                <a:latin typeface="Calibri" pitchFamily="34" charset="0"/>
+                <a:cs typeface="Calibri" pitchFamily="34" charset="-120"/>
+              </a:rPr>
+              <a:t>Statistics_Page</a:t>
+            </a:r>
+            <a:r>
+              <a:rPr lang="en-US" sz="1200" dirty="0">
+                <a:solidFill>
+                  <a:srgbClr val="1E293B"/>
+                </a:solidFill>
+                <a:latin typeface="Calibri" pitchFamily="34" charset="0"/>
+                <a:cs typeface="Calibri" pitchFamily="34" charset="-120"/>
+              </a:rPr>
+              <a:t>)</a:t>
+            </a:r>
+          </a:p>
+          <a:p>
+            <a:endParaRPr lang="en-US" sz="1200" dirty="0">
+              <a:solidFill>
+                <a:srgbClr val="1E293B"/>
+              </a:solidFill>
+              <a:latin typeface="Calibri" pitchFamily="34" charset="0"/>
+              <a:cs typeface="Calibri" pitchFamily="34" charset="-120"/>
+            </a:endParaRPr>
+          </a:p>
+          <a:p>
+            <a:r>
+              <a:rPr lang="el-GR" sz="1200" dirty="0">
+                <a:solidFill>
+                  <a:srgbClr val="1E293B"/>
+                </a:solidFill>
+                <a:latin typeface="Calibri" pitchFamily="34" charset="0"/>
+                <a:cs typeface="Calibri" pitchFamily="34" charset="-120"/>
+              </a:rPr>
+              <a:t>Αυτές οι αρχές εξασφαλίζουν ότι η εφαρμογή είναι εύχρηστη, καθαρή και συνεπής σε όλο το </a:t>
+            </a:r>
+            <a:r>
+              <a:rPr lang="en-US" sz="1200" dirty="0">
+                <a:solidFill>
+                  <a:srgbClr val="1E293B"/>
+                </a:solidFill>
+                <a:latin typeface="Calibri" pitchFamily="34" charset="0"/>
+                <a:cs typeface="Calibri" pitchFamily="34" charset="-120"/>
+              </a:rPr>
+              <a:t>UI.</a:t>
+            </a:r>
+          </a:p>
+          <a:p>
+            <a:endParaRPr lang="en-US" dirty="0"/>
+          </a:p>
+        </p:txBody>
+      </p:sp>
+      <p:sp>
+        <p:nvSpPr>
+          <p:cNvPr id="4" name="Text 0">
+            <a:extLst>
+              <a:ext uri="{FF2B5EF4-FFF2-40B4-BE49-F238E27FC236}">
+                <a16:creationId xmlns:a16="http://schemas.microsoft.com/office/drawing/2014/main" id="{88EA328D-3CD5-BCB8-F340-554ED58C1891}"/>
+              </a:ext>
+            </a:extLst>
+          </p:cNvPr>
+          <p:cNvSpPr/>
+          <p:nvPr/>
+        </p:nvSpPr>
+        <p:spPr>
+          <a:xfrm>
+            <a:off x="457200" y="274320"/>
+            <a:ext cx="8229600" cy="502920"/>
+          </a:xfrm>
+          <a:prstGeom prst="rect">
+            <a:avLst/>
+          </a:prstGeom>
+          <a:noFill/>
+          <a:ln/>
+        </p:spPr>
+        <p:txBody>
+          <a:bodyPr wrap="square" lIns="0" tIns="0" rIns="0" bIns="0" rtlCol="0" anchor="ctr"/>
+          <a:lstStyle/>
+          <a:p>
+            <a:r>
+              <a:rPr lang="en-US" sz="2600" b="1" dirty="0">
+                <a:solidFill>
+                  <a:srgbClr val="065A82"/>
+                </a:solidFill>
+                <a:latin typeface="Calibri" pitchFamily="34" charset="0"/>
+                <a:cs typeface="Calibri" pitchFamily="34" charset="-120"/>
+              </a:rPr>
+              <a:t>UX</a:t>
+            </a:r>
+            <a:r>
+              <a:rPr lang="en-US" sz="2800" dirty="0"/>
+              <a:t> </a:t>
+            </a:r>
+            <a:r>
+              <a:rPr lang="en-US" sz="2600" b="1" dirty="0">
+                <a:solidFill>
+                  <a:srgbClr val="065A82"/>
+                </a:solidFill>
+                <a:latin typeface="Calibri" pitchFamily="34" charset="0"/>
+                <a:cs typeface="Calibri" pitchFamily="34" charset="-120"/>
+              </a:rPr>
+              <a:t>Guidelines</a:t>
+            </a:r>
+          </a:p>
+        </p:txBody>
+      </p:sp>
+    </p:spTree>
+    <p:extLst>
+      <p:ext uri="{BB962C8B-B14F-4D97-AF65-F5344CB8AC3E}">
+        <p14:creationId xmlns:p14="http://schemas.microsoft.com/office/powerpoint/2010/main" val="3118078300"/>
+      </p:ext>
+    </p:extLst>
+  </p:cSld>
+  <p:clrMapOvr>
+    <a:masterClrMapping/>
+  </p:clrMapOvr>
+</p:sld>
+</file>
+
+<file path=ppt/slides/slide13.xml><?xml version="1.0" encoding="utf-8"?>
+<p:sld xmlns:a="http://schemas.openxmlformats.org/drawingml/2006/main" xmlns:r="http://schemas.openxmlformats.org/officeDocument/2006/relationships" xmlns:p="http://schemas.openxmlformats.org/presentationml/2006/main">
   <p:cSld name="Slide 10">
     <p:bg>
       <p:bgPr>
@@ -2347,7 +4503,7 @@
 </p:sld>
 </file>
 
-<file path=ppt/slides/slide11.xml><?xml version="1.0" encoding="utf-8"?>
+<file path=ppt/slides/slide14.xml><?xml version="1.0" encoding="utf-8"?>
 <p:sld xmlns:a="http://schemas.openxmlformats.org/drawingml/2006/main" xmlns:r="http://schemas.openxmlformats.org/officeDocument/2006/relationships" xmlns:p="http://schemas.openxmlformats.org/presentationml/2006/main">
   <p:cSld name="Slide 11">
     <p:bg>
@@ -2508,7 +4664,7 @@
 </p:sld>
 </file>
 
-<file path=ppt/slides/slide12.xml><?xml version="1.0" encoding="utf-8"?>
+<file path=ppt/slides/slide15.xml><?xml version="1.0" encoding="utf-8"?>
 <p:sld xmlns:a="http://schemas.openxmlformats.org/drawingml/2006/main" xmlns:r="http://schemas.openxmlformats.org/officeDocument/2006/relationships" xmlns:p="http://schemas.openxmlformats.org/presentationml/2006/main">
   <p:cSld name="Slide 12">
     <p:bg>
@@ -2669,7 +4825,7 @@
 </p:sld>
 </file>
 
-<file path=ppt/slides/slide13.xml><?xml version="1.0" encoding="utf-8"?>
+<file path=ppt/slides/slide16.xml><?xml version="1.0" encoding="utf-8"?>
 <p:sld xmlns:a="http://schemas.openxmlformats.org/drawingml/2006/main" xmlns:r="http://schemas.openxmlformats.org/officeDocument/2006/relationships" xmlns:p="http://schemas.openxmlformats.org/presentationml/2006/main">
   <p:cSld name="Slide 13">
     <p:bg>
@@ -2830,7 +4986,7 @@
 </p:sld>
 </file>
 
-<file path=ppt/slides/slide14.xml><?xml version="1.0" encoding="utf-8"?>
+<file path=ppt/slides/slide17.xml><?xml version="1.0" encoding="utf-8"?>
 <p:sld xmlns:a="http://schemas.openxmlformats.org/drawingml/2006/main" xmlns:r="http://schemas.openxmlformats.org/officeDocument/2006/relationships" xmlns:p="http://schemas.openxmlformats.org/presentationml/2006/main">
   <p:cSld name="Slide 14">
     <p:bg>
@@ -2991,7 +5147,7 @@
 </p:sld>
 </file>
 
-<file path=ppt/slides/slide15.xml><?xml version="1.0" encoding="utf-8"?>
+<file path=ppt/slides/slide18.xml><?xml version="1.0" encoding="utf-8"?>
 <p:sld xmlns:a="http://schemas.openxmlformats.org/drawingml/2006/main" xmlns:r="http://schemas.openxmlformats.org/officeDocument/2006/relationships" xmlns:p="http://schemas.openxmlformats.org/presentationml/2006/main">
   <p:cSld name="Slide 15">
     <p:bg>
@@ -3159,7 +5315,7 @@
 </p:sld>
 </file>
 
-<file path=ppt/slides/slide16.xml><?xml version="1.0" encoding="utf-8"?>
+<file path=ppt/slides/slide19.xml><?xml version="1.0" encoding="utf-8"?>
 <p:sld xmlns:a="http://schemas.openxmlformats.org/drawingml/2006/main" xmlns:r="http://schemas.openxmlformats.org/officeDocument/2006/relationships" xmlns:p="http://schemas.openxmlformats.org/presentationml/2006/main">
   <p:cSld name="Slide 16">
     <p:bg>

--- a/presentation/presentation.pptx
+++ b/presentation/presentation.pptx
@@ -328,6 +328,13 @@
           </p:nvPr>
         </p:nvSpPr>
         <p:spPr/>
+        <p:txBody>
+          <a:bodyPr/>
+          <a:lstStyle/>
+          <a:p>
+            <a:endParaRPr lang="en-US"/>
+          </a:p>
+        </p:txBody>
       </p:sp>
       <p:sp>
         <p:nvSpPr>
@@ -412,6 +419,13 @@
           </p:nvPr>
         </p:nvSpPr>
         <p:spPr/>
+        <p:txBody>
+          <a:bodyPr/>
+          <a:lstStyle/>
+          <a:p>
+            <a:endParaRPr lang="en-US"/>
+          </a:p>
+        </p:txBody>
       </p:sp>
       <p:sp>
         <p:nvSpPr>
@@ -496,6 +510,13 @@
           </p:nvPr>
         </p:nvSpPr>
         <p:spPr/>
+        <p:txBody>
+          <a:bodyPr/>
+          <a:lstStyle/>
+          <a:p>
+            <a:endParaRPr lang="en-US"/>
+          </a:p>
+        </p:txBody>
       </p:sp>
       <p:sp>
         <p:nvSpPr>
@@ -580,6 +601,13 @@
           </p:nvPr>
         </p:nvSpPr>
         <p:spPr/>
+        <p:txBody>
+          <a:bodyPr/>
+          <a:lstStyle/>
+          <a:p>
+            <a:endParaRPr lang="en-US"/>
+          </a:p>
+        </p:txBody>
       </p:sp>
       <p:sp>
         <p:nvSpPr>
@@ -664,6 +692,13 @@
           </p:nvPr>
         </p:nvSpPr>
         <p:spPr/>
+        <p:txBody>
+          <a:bodyPr/>
+          <a:lstStyle/>
+          <a:p>
+            <a:endParaRPr lang="en-US"/>
+          </a:p>
+        </p:txBody>
       </p:sp>
       <p:sp>
         <p:nvSpPr>
@@ -748,6 +783,13 @@
           </p:nvPr>
         </p:nvSpPr>
         <p:spPr/>
+        <p:txBody>
+          <a:bodyPr/>
+          <a:lstStyle/>
+          <a:p>
+            <a:endParaRPr lang="en-US"/>
+          </a:p>
+        </p:txBody>
       </p:sp>
       <p:sp>
         <p:nvSpPr>
@@ -832,6 +874,13 @@
           </p:nvPr>
         </p:nvSpPr>
         <p:spPr/>
+        <p:txBody>
+          <a:bodyPr/>
+          <a:lstStyle/>
+          <a:p>
+            <a:endParaRPr lang="en-US"/>
+          </a:p>
+        </p:txBody>
       </p:sp>
       <p:sp>
         <p:nvSpPr>
@@ -916,6 +965,13 @@
           </p:nvPr>
         </p:nvSpPr>
         <p:spPr/>
+        <p:txBody>
+          <a:bodyPr/>
+          <a:lstStyle/>
+          <a:p>
+            <a:endParaRPr lang="en-US"/>
+          </a:p>
+        </p:txBody>
       </p:sp>
       <p:sp>
         <p:nvSpPr>
@@ -1000,6 +1056,13 @@
           </p:nvPr>
         </p:nvSpPr>
         <p:spPr/>
+        <p:txBody>
+          <a:bodyPr/>
+          <a:lstStyle/>
+          <a:p>
+            <a:endParaRPr lang="en-US"/>
+          </a:p>
+        </p:txBody>
       </p:sp>
       <p:sp>
         <p:nvSpPr>
@@ -1084,6 +1147,13 @@
           </p:nvPr>
         </p:nvSpPr>
         <p:spPr/>
+        <p:txBody>
+          <a:bodyPr/>
+          <a:lstStyle/>
+          <a:p>
+            <a:endParaRPr lang="en-US"/>
+          </a:p>
+        </p:txBody>
       </p:sp>
       <p:sp>
         <p:nvSpPr>
@@ -1168,6 +1238,13 @@
           </p:nvPr>
         </p:nvSpPr>
         <p:spPr/>
+        <p:txBody>
+          <a:bodyPr/>
+          <a:lstStyle/>
+          <a:p>
+            <a:endParaRPr lang="en-US"/>
+          </a:p>
+        </p:txBody>
       </p:sp>
       <p:sp>
         <p:nvSpPr>
@@ -1252,6 +1329,13 @@
           </p:nvPr>
         </p:nvSpPr>
         <p:spPr/>
+        <p:txBody>
+          <a:bodyPr/>
+          <a:lstStyle/>
+          <a:p>
+            <a:endParaRPr lang="en-US"/>
+          </a:p>
+        </p:txBody>
       </p:sp>
       <p:sp>
         <p:nvSpPr>
@@ -1336,6 +1420,13 @@
           </p:nvPr>
         </p:nvSpPr>
         <p:spPr/>
+        <p:txBody>
+          <a:bodyPr/>
+          <a:lstStyle/>
+          <a:p>
+            <a:endParaRPr lang="en-US"/>
+          </a:p>
+        </p:txBody>
       </p:sp>
       <p:sp>
         <p:nvSpPr>
@@ -1420,6 +1511,13 @@
           </p:nvPr>
         </p:nvSpPr>
         <p:spPr/>
+        <p:txBody>
+          <a:bodyPr/>
+          <a:lstStyle/>
+          <a:p>
+            <a:endParaRPr lang="en-US"/>
+          </a:p>
+        </p:txBody>
       </p:sp>
       <p:sp>
         <p:nvSpPr>
@@ -1504,6 +1602,13 @@
           </p:nvPr>
         </p:nvSpPr>
         <p:spPr/>
+        <p:txBody>
+          <a:bodyPr/>
+          <a:lstStyle/>
+          <a:p>
+            <a:endParaRPr lang="en-US"/>
+          </a:p>
+        </p:txBody>
       </p:sp>
       <p:sp>
         <p:nvSpPr>
@@ -1588,6 +1693,13 @@
           </p:nvPr>
         </p:nvSpPr>
         <p:spPr/>
+        <p:txBody>
+          <a:bodyPr/>
+          <a:lstStyle/>
+          <a:p>
+            <a:endParaRPr lang="en-US"/>
+          </a:p>
+        </p:txBody>
       </p:sp>
       <p:sp>
         <p:nvSpPr>
@@ -2070,7 +2182,51 @@
                 <a:ea typeface="Calibri" pitchFamily="34" charset="-122"/>
                 <a:cs typeface="Calibri" pitchFamily="34" charset="-120"/>
               </a:rPr>
-              <a:t>ΠΛΗΠΡΟ Project 31 - Hellenic Open University</a:t>
+              <a:t>ΠΛΗΠΡΟ-</a:t>
+            </a:r>
+            <a:r>
+              <a:rPr lang="el-GR" sz="1800" dirty="0">
+                <a:solidFill>
+                  <a:srgbClr val="94A3B8"/>
+                </a:solidFill>
+                <a:latin typeface="Calibri" pitchFamily="34" charset="0"/>
+                <a:ea typeface="Calibri" pitchFamily="34" charset="-122"/>
+                <a:cs typeface="Calibri" pitchFamily="34" charset="-120"/>
+              </a:rPr>
+              <a:t>ΗΛΕ51</a:t>
+            </a:r>
+            <a:r>
+              <a:rPr lang="en-US" sz="1800" dirty="0">
+                <a:solidFill>
+                  <a:srgbClr val="94A3B8"/>
+                </a:solidFill>
+                <a:latin typeface="Calibri" pitchFamily="34" charset="0"/>
+                <a:ea typeface="Calibri" pitchFamily="34" charset="-122"/>
+                <a:cs typeface="Calibri" pitchFamily="34" charset="-120"/>
+              </a:rPr>
+              <a:t> Project </a:t>
+            </a:r>
+            <a:r>
+              <a:rPr lang="en-US" dirty="0">
+                <a:solidFill>
+                  <a:srgbClr val="94A3B8"/>
+                </a:solidFill>
+                <a:latin typeface="Calibri" pitchFamily="34" charset="0"/>
+                <a:ea typeface="Calibri" pitchFamily="34" charset="-122"/>
+                <a:cs typeface="Calibri" pitchFamily="34" charset="-120"/>
+              </a:rPr>
+              <a:t>31</a:t>
+            </a:r>
+            <a:r>
+              <a:rPr lang="en-US" sz="1800" dirty="0">
+                <a:solidFill>
+                  <a:srgbClr val="94A3B8"/>
+                </a:solidFill>
+                <a:latin typeface="Calibri" pitchFamily="34" charset="0"/>
+                <a:ea typeface="Calibri" pitchFamily="34" charset="-122"/>
+                <a:cs typeface="Calibri" pitchFamily="34" charset="-120"/>
+              </a:rPr>
+              <a:t> - Hellenic Open University</a:t>
             </a:r>
             <a:endParaRPr lang="en-US" sz="1800" dirty="0"/>
           </a:p>
@@ -2136,9 +2292,30 @@
                 <a:ea typeface="Calibri" pitchFamily="34" charset="-122"/>
                 <a:cs typeface="Calibri" pitchFamily="34" charset="-120"/>
               </a:rPr>
-              <a:t>Παρουσίαση Έργου</a:t>
-            </a:r>
-            <a:endParaRPr lang="en-US" sz="1400" dirty="0"/>
+              <a:t>Πα</a:t>
+            </a:r>
+            <a:r>
+              <a:rPr lang="en-US" sz="1400" dirty="0" err="1">
+                <a:solidFill>
+                  <a:srgbClr val="CBD5E1"/>
+                </a:solidFill>
+                <a:latin typeface="Calibri" pitchFamily="34" charset="0"/>
+                <a:ea typeface="Calibri" pitchFamily="34" charset="-122"/>
+                <a:cs typeface="Calibri" pitchFamily="34" charset="-120"/>
+              </a:rPr>
+              <a:t>ρουσί</a:t>
+            </a:r>
+            <a:r>
+              <a:rPr lang="en-US" sz="1400" dirty="0">
+                <a:solidFill>
+                  <a:srgbClr val="CBD5E1"/>
+                </a:solidFill>
+                <a:latin typeface="Calibri" pitchFamily="34" charset="0"/>
+                <a:ea typeface="Calibri" pitchFamily="34" charset="-122"/>
+                <a:cs typeface="Calibri" pitchFamily="34" charset="-120"/>
+              </a:rPr>
+              <a:t>αση Έργου</a:t>
+            </a:r>
           </a:p>
         </p:txBody>
       </p:sp>
@@ -2392,7 +2569,7 @@
                 <a:latin typeface="Calibri" pitchFamily="34" charset="0"/>
                 <a:cs typeface="Calibri" pitchFamily="34" charset="-120"/>
               </a:rPr>
-              <a:t> (Facade).</a:t>
+              <a:t>.</a:t>
             </a:r>
           </a:p>
           <a:p>
@@ -5751,7 +5928,29 @@
                 <a:ea typeface="Calibri" pitchFamily="34" charset="-122"/>
                 <a:cs typeface="Calibri" pitchFamily="34" charset="-120"/>
               </a:rPr>
-              <a:t>Dashboard, Books, Loans, Members, …</a:t>
+              <a:t>Dashboard, Books, Loans, Members</a:t>
+            </a:r>
+            <a:r>
+              <a:rPr lang="el-GR" sz="1100" dirty="0">
+                <a:solidFill>
+                  <a:srgbClr val="94A3B8"/>
+                </a:solidFill>
+                <a:latin typeface="Calibri" pitchFamily="34" charset="0"/>
+                <a:ea typeface="Calibri" pitchFamily="34" charset="-122"/>
+                <a:cs typeface="Calibri" pitchFamily="34" charset="-120"/>
+              </a:rPr>
+              <a:t>, </a:t>
+            </a:r>
+            <a:r>
+              <a:rPr lang="en-US" sz="1100" dirty="0">
+                <a:solidFill>
+                  <a:srgbClr val="94A3B8"/>
+                </a:solidFill>
+                <a:latin typeface="Calibri" pitchFamily="34" charset="0"/>
+                <a:ea typeface="Calibri" pitchFamily="34" charset="-122"/>
+                <a:cs typeface="Calibri" pitchFamily="34" charset="-120"/>
+              </a:rPr>
+              <a:t>Statistics</a:t>
             </a:r>
             <a:endParaRPr lang="en-US" sz="1100" dirty="0"/>
           </a:p>
@@ -5790,7 +5989,7 @@
                 <a:ea typeface="Calibri" pitchFamily="34" charset="-122"/>
                 <a:cs typeface="Calibri" pitchFamily="34" charset="-120"/>
               </a:rPr>
-              <a:t>3</a:t>
+              <a:t>5</a:t>
             </a:r>
             <a:endParaRPr lang="en-US" sz="6400" dirty="0"/>
           </a:p>
@@ -5856,11 +6055,8 @@
           <a:bodyPr wrap="square" lIns="0" tIns="0" rIns="0" bIns="0" rtlCol="0" anchor="ctr"/>
           <a:lstStyle/>
           <a:p>
-            <a:pPr marL="0" indent="0">
-              <a:buNone/>
-            </a:pPr>
-            <a:r>
-              <a:rPr lang="en-US" sz="1100" dirty="0">
+            <a:r>
+              <a:rPr lang="en-US" sz="1000" dirty="0">
                 <a:solidFill>
                   <a:srgbClr val="94A3B8"/>
                 </a:solidFill>
@@ -5868,9 +6064,20 @@
                 <a:ea typeface="Calibri" pitchFamily="34" charset="-122"/>
                 <a:cs typeface="Calibri" pitchFamily="34" charset="-120"/>
               </a:rPr>
-              <a:t>matplotlib · pandas · pillow</a:t>
-            </a:r>
-            <a:endParaRPr lang="en-US" sz="1100" dirty="0"/>
+              <a:t>matplotlib · pandas · pillow · numpy · </a:t>
+            </a:r>
+            <a:r>
+              <a:rPr lang="en-US" sz="1000" dirty="0" err="1">
+                <a:solidFill>
+                  <a:srgbClr val="94A3B8"/>
+                </a:solidFill>
+                <a:latin typeface="Calibri" pitchFamily="34" charset="0"/>
+                <a:ea typeface="Calibri" pitchFamily="34" charset="-122"/>
+                <a:cs typeface="Calibri" pitchFamily="34" charset="-120"/>
+              </a:rPr>
+              <a:t>mplcursors</a:t>
+            </a:r>
+            <a:endParaRPr lang="en-US" sz="1000" dirty="0"/>
           </a:p>
         </p:txBody>
       </p:sp>
@@ -6024,82 +6231,854 @@
           </a:p>
         </p:txBody>
       </p:sp>
-      <p:sp>
-        <p:nvSpPr>
-          <p:cNvPr id="4" name="Shape 2"/>
+      <p:grpSp>
+        <p:nvGrpSpPr>
+          <p:cNvPr id="32" name="Group 31">
+            <a:extLst>
+              <a:ext uri="{FF2B5EF4-FFF2-40B4-BE49-F238E27FC236}">
+                <a16:creationId xmlns:a16="http://schemas.microsoft.com/office/drawing/2014/main" id="{7A1FF900-2B19-630F-423D-1E76B5159C94}"/>
+              </a:ext>
+            </a:extLst>
+          </p:cNvPr>
+          <p:cNvGrpSpPr/>
+          <p:nvPr/>
+        </p:nvGrpSpPr>
+        <p:grpSpPr>
+          <a:xfrm>
+            <a:off x="381888" y="2236777"/>
+            <a:ext cx="1840009" cy="1423588"/>
+            <a:chOff x="400271" y="2240280"/>
+            <a:chExt cx="1840009" cy="1423588"/>
+          </a:xfrm>
+        </p:grpSpPr>
+        <p:sp>
+          <p:nvSpPr>
+            <p:cNvPr id="4" name="Shape 2"/>
+            <p:cNvSpPr/>
+            <p:nvPr/>
+          </p:nvSpPr>
+          <p:spPr>
+            <a:xfrm>
+              <a:off x="400271" y="2246548"/>
+              <a:ext cx="1413190" cy="1417320"/>
+            </a:xfrm>
+            <a:prstGeom prst="rect">
+              <a:avLst/>
+            </a:prstGeom>
+            <a:solidFill>
+              <a:srgbClr val="FFFFFF"/>
+            </a:solidFill>
+            <a:ln w="12700">
+              <a:solidFill>
+                <a:srgbClr val="E2E8F0"/>
+              </a:solidFill>
+              <a:prstDash val="solid"/>
+            </a:ln>
+            <a:effectLst>
+              <a:outerShdw blurRad="76200" dist="25400" dir="5400000" algn="bl" rotWithShape="0">
+                <a:srgbClr val="000000">
+                  <a:alpha val="8000"/>
+                </a:srgbClr>
+              </a:outerShdw>
+            </a:effectLst>
+          </p:spPr>
+          <p:txBody>
+            <a:bodyPr/>
+            <a:lstStyle/>
+            <a:p>
+              <a:endParaRPr lang="en-US"/>
+            </a:p>
+          </p:txBody>
+        </p:sp>
+        <p:sp>
+          <p:nvSpPr>
+            <p:cNvPr id="5" name="Shape 3"/>
+            <p:cNvSpPr/>
+            <p:nvPr/>
+          </p:nvSpPr>
+          <p:spPr>
+            <a:xfrm>
+              <a:off x="414164" y="2240280"/>
+              <a:ext cx="55149" cy="1417320"/>
+            </a:xfrm>
+            <a:prstGeom prst="rect">
+              <a:avLst/>
+            </a:prstGeom>
+            <a:solidFill>
+              <a:srgbClr val="1C7293"/>
+            </a:solidFill>
+            <a:ln/>
+          </p:spPr>
+          <p:txBody>
+            <a:bodyPr/>
+            <a:lstStyle/>
+            <a:p>
+              <a:endParaRPr lang="en-US"/>
+            </a:p>
+          </p:txBody>
+        </p:sp>
+        <p:sp>
+          <p:nvSpPr>
+            <p:cNvPr id="6" name="Text 4"/>
+            <p:cNvSpPr/>
+            <p:nvPr/>
+          </p:nvSpPr>
+          <p:spPr>
+            <a:xfrm>
+              <a:off x="640080" y="2240280"/>
+              <a:ext cx="1600200" cy="365760"/>
+            </a:xfrm>
+            <a:prstGeom prst="rect">
+              <a:avLst/>
+            </a:prstGeom>
+            <a:noFill/>
+            <a:ln/>
+          </p:spPr>
+          <p:txBody>
+            <a:bodyPr wrap="square" lIns="0" tIns="0" rIns="0" bIns="0" rtlCol="0" anchor="ctr"/>
+            <a:lstStyle/>
+            <a:p>
+              <a:pPr marL="0" indent="0">
+                <a:buNone/>
+              </a:pPr>
+              <a:r>
+                <a:rPr lang="en-US" sz="1100" b="1" dirty="0">
+                  <a:solidFill>
+                    <a:srgbClr val="64748B"/>
+                  </a:solidFill>
+                  <a:latin typeface="Calibri" pitchFamily="34" charset="0"/>
+                  <a:ea typeface="Calibri" pitchFamily="34" charset="-122"/>
+                  <a:cs typeface="Calibri" pitchFamily="34" charset="-120"/>
+                </a:rPr>
+                <a:t>01</a:t>
+              </a:r>
+              <a:endParaRPr lang="en-US" sz="1100" dirty="0"/>
+            </a:p>
+          </p:txBody>
+        </p:sp>
+        <p:sp>
+          <p:nvSpPr>
+            <p:cNvPr id="7" name="Text 5"/>
+            <p:cNvSpPr/>
+            <p:nvPr/>
+          </p:nvSpPr>
+          <p:spPr>
+            <a:xfrm>
+              <a:off x="640080" y="2606040"/>
+              <a:ext cx="1600200" cy="411480"/>
+            </a:xfrm>
+            <a:prstGeom prst="rect">
+              <a:avLst/>
+            </a:prstGeom>
+            <a:noFill/>
+            <a:ln/>
+          </p:spPr>
+          <p:txBody>
+            <a:bodyPr wrap="square" lIns="0" tIns="0" rIns="0" bIns="0" rtlCol="0" anchor="ctr"/>
+            <a:lstStyle/>
+            <a:p>
+              <a:pPr marL="0" indent="0">
+                <a:buNone/>
+              </a:pPr>
+              <a:r>
+                <a:rPr lang="en-US" sz="1700" b="1" dirty="0">
+                  <a:solidFill>
+                    <a:srgbClr val="065A82"/>
+                  </a:solidFill>
+                  <a:latin typeface="Calibri" pitchFamily="34" charset="0"/>
+                  <a:ea typeface="Calibri" pitchFamily="34" charset="-122"/>
+                  <a:cs typeface="Calibri" pitchFamily="34" charset="-120"/>
+                </a:rPr>
+                <a:t>Κατάλογος</a:t>
+              </a:r>
+              <a:endParaRPr lang="en-US" sz="1700" dirty="0"/>
+            </a:p>
+          </p:txBody>
+        </p:sp>
+        <p:sp>
+          <p:nvSpPr>
+            <p:cNvPr id="8" name="Text 6"/>
+            <p:cNvSpPr/>
+            <p:nvPr/>
+          </p:nvSpPr>
+          <p:spPr>
+            <a:xfrm>
+              <a:off x="525072" y="3080569"/>
+              <a:ext cx="1434683" cy="548640"/>
+            </a:xfrm>
+            <a:prstGeom prst="rect">
+              <a:avLst/>
+            </a:prstGeom>
+            <a:noFill/>
+            <a:ln/>
+          </p:spPr>
+          <p:txBody>
+            <a:bodyPr wrap="square" lIns="0" tIns="0" rIns="0" bIns="0" rtlCol="0" anchor="ctr"/>
+            <a:lstStyle/>
+            <a:p>
+              <a:pPr marL="0" indent="0">
+                <a:buNone/>
+              </a:pPr>
+              <a:r>
+                <a:rPr lang="en-US" sz="1100" dirty="0">
+                  <a:solidFill>
+                    <a:srgbClr val="1E293B"/>
+                  </a:solidFill>
+                  <a:latin typeface="Calibri" pitchFamily="34" charset="0"/>
+                  <a:ea typeface="Calibri" pitchFamily="34" charset="-122"/>
+                  <a:cs typeface="Calibri" pitchFamily="34" charset="-120"/>
+                </a:rPr>
+                <a:t>Βιβλία και κατηγ</a:t>
+              </a:r>
+              <a:r>
+                <a:rPr lang="en-US" sz="1100" i="1" dirty="0">
+                  <a:solidFill>
+                    <a:srgbClr val="1E293B"/>
+                  </a:solidFill>
+                  <a:latin typeface="Calibri" pitchFamily="34" charset="0"/>
+                  <a:ea typeface="Calibri" pitchFamily="34" charset="-122"/>
+                  <a:cs typeface="Calibri" pitchFamily="34" charset="-120"/>
+                </a:rPr>
+                <a:t>ορ</a:t>
+              </a:r>
+              <a:r>
+                <a:rPr lang="en-US" sz="1100" dirty="0">
+                  <a:solidFill>
+                    <a:srgbClr val="1E293B"/>
+                  </a:solidFill>
+                  <a:latin typeface="Calibri" pitchFamily="34" charset="0"/>
+                  <a:ea typeface="Calibri" pitchFamily="34" charset="-122"/>
+                  <a:cs typeface="Calibri" pitchFamily="34" charset="-120"/>
+                </a:rPr>
+                <a:t>ίες, αναζήτηση και φίλτρα</a:t>
+              </a:r>
+              <a:endParaRPr lang="en-US" sz="1100" dirty="0"/>
+            </a:p>
+          </p:txBody>
+        </p:sp>
+      </p:grpSp>
+      <p:grpSp>
+        <p:nvGrpSpPr>
+          <p:cNvPr id="31" name="Group 30">
+            <a:extLst>
+              <a:ext uri="{FF2B5EF4-FFF2-40B4-BE49-F238E27FC236}">
+                <a16:creationId xmlns:a16="http://schemas.microsoft.com/office/drawing/2014/main" id="{99C11165-8848-5579-366C-48367808773A}"/>
+              </a:ext>
+            </a:extLst>
+          </p:cNvPr>
+          <p:cNvGrpSpPr/>
+          <p:nvPr/>
+        </p:nvGrpSpPr>
+        <p:grpSpPr>
+          <a:xfrm>
+            <a:off x="2149471" y="2236777"/>
+            <a:ext cx="1808604" cy="1423588"/>
+            <a:chOff x="2126422" y="2234012"/>
+            <a:chExt cx="1808604" cy="1423588"/>
+          </a:xfrm>
+        </p:grpSpPr>
+        <p:sp>
+          <p:nvSpPr>
+            <p:cNvPr id="9" name="Shape 7"/>
+            <p:cNvSpPr/>
+            <p:nvPr/>
+          </p:nvSpPr>
+          <p:spPr>
+            <a:xfrm>
+              <a:off x="2126422" y="2234012"/>
+              <a:ext cx="1413190" cy="1417320"/>
+            </a:xfrm>
+            <a:prstGeom prst="rect">
+              <a:avLst/>
+            </a:prstGeom>
+            <a:solidFill>
+              <a:srgbClr val="FFFFFF"/>
+            </a:solidFill>
+            <a:ln w="12700">
+              <a:solidFill>
+                <a:srgbClr val="E2E8F0"/>
+              </a:solidFill>
+              <a:prstDash val="solid"/>
+            </a:ln>
+            <a:effectLst>
+              <a:outerShdw blurRad="76200" dist="25400" dir="5400000" algn="bl" rotWithShape="0">
+                <a:srgbClr val="000000">
+                  <a:alpha val="8000"/>
+                </a:srgbClr>
+              </a:outerShdw>
+            </a:effectLst>
+          </p:spPr>
+          <p:txBody>
+            <a:bodyPr/>
+            <a:lstStyle/>
+            <a:p>
+              <a:endParaRPr lang="en-US"/>
+            </a:p>
+          </p:txBody>
+        </p:sp>
+        <p:sp>
+          <p:nvSpPr>
+            <p:cNvPr id="10" name="Shape 8"/>
+            <p:cNvSpPr/>
+            <p:nvPr/>
+          </p:nvSpPr>
+          <p:spPr>
+            <a:xfrm>
+              <a:off x="2129912" y="2240280"/>
+              <a:ext cx="55149" cy="1417320"/>
+            </a:xfrm>
+            <a:prstGeom prst="rect">
+              <a:avLst/>
+            </a:prstGeom>
+            <a:solidFill>
+              <a:srgbClr val="1C7293"/>
+            </a:solidFill>
+            <a:ln/>
+          </p:spPr>
+          <p:txBody>
+            <a:bodyPr/>
+            <a:lstStyle/>
+            <a:p>
+              <a:endParaRPr lang="en-US"/>
+            </a:p>
+          </p:txBody>
+        </p:sp>
+        <p:sp>
+          <p:nvSpPr>
+            <p:cNvPr id="11" name="Text 9"/>
+            <p:cNvSpPr/>
+            <p:nvPr/>
+          </p:nvSpPr>
+          <p:spPr>
+            <a:xfrm>
+              <a:off x="2334826" y="2240280"/>
+              <a:ext cx="1600200" cy="365760"/>
+            </a:xfrm>
+            <a:prstGeom prst="rect">
+              <a:avLst/>
+            </a:prstGeom>
+            <a:noFill/>
+            <a:ln/>
+          </p:spPr>
+          <p:txBody>
+            <a:bodyPr wrap="square" lIns="0" tIns="0" rIns="0" bIns="0" rtlCol="0" anchor="ctr"/>
+            <a:lstStyle/>
+            <a:p>
+              <a:pPr marL="0" indent="0">
+                <a:buNone/>
+              </a:pPr>
+              <a:r>
+                <a:rPr lang="en-US" sz="1100" b="1" dirty="0">
+                  <a:solidFill>
+                    <a:srgbClr val="64748B"/>
+                  </a:solidFill>
+                  <a:latin typeface="Calibri" pitchFamily="34" charset="0"/>
+                  <a:ea typeface="Calibri" pitchFamily="34" charset="-122"/>
+                  <a:cs typeface="Calibri" pitchFamily="34" charset="-120"/>
+                </a:rPr>
+                <a:t>02</a:t>
+              </a:r>
+              <a:endParaRPr lang="en-US" sz="1100" dirty="0"/>
+            </a:p>
+          </p:txBody>
+        </p:sp>
+        <p:sp>
+          <p:nvSpPr>
+            <p:cNvPr id="12" name="Text 10"/>
+            <p:cNvSpPr/>
+            <p:nvPr/>
+          </p:nvSpPr>
+          <p:spPr>
+            <a:xfrm>
+              <a:off x="2334826" y="2606040"/>
+              <a:ext cx="1600200" cy="411480"/>
+            </a:xfrm>
+            <a:prstGeom prst="rect">
+              <a:avLst/>
+            </a:prstGeom>
+            <a:noFill/>
+            <a:ln/>
+          </p:spPr>
+          <p:txBody>
+            <a:bodyPr wrap="square" lIns="0" tIns="0" rIns="0" bIns="0" rtlCol="0" anchor="ctr"/>
+            <a:lstStyle/>
+            <a:p>
+              <a:pPr marL="0" indent="0">
+                <a:buNone/>
+              </a:pPr>
+              <a:r>
+                <a:rPr lang="en-US" sz="1700" b="1" dirty="0">
+                  <a:solidFill>
+                    <a:srgbClr val="065A82"/>
+                  </a:solidFill>
+                  <a:latin typeface="Calibri" pitchFamily="34" charset="0"/>
+                  <a:ea typeface="Calibri" pitchFamily="34" charset="-122"/>
+                  <a:cs typeface="Calibri" pitchFamily="34" charset="-120"/>
+                </a:rPr>
+                <a:t>Μέλη</a:t>
+              </a:r>
+              <a:endParaRPr lang="en-US" sz="1700" dirty="0"/>
+            </a:p>
+          </p:txBody>
+        </p:sp>
+        <p:sp>
+          <p:nvSpPr>
+            <p:cNvPr id="13" name="Text 11"/>
+            <p:cNvSpPr/>
+            <p:nvPr/>
+          </p:nvSpPr>
+          <p:spPr>
+            <a:xfrm>
+              <a:off x="2334826" y="3148412"/>
+              <a:ext cx="1149637" cy="463468"/>
+            </a:xfrm>
+            <a:prstGeom prst="rect">
+              <a:avLst/>
+            </a:prstGeom>
+            <a:noFill/>
+            <a:ln/>
+          </p:spPr>
+          <p:txBody>
+            <a:bodyPr wrap="square" lIns="0" tIns="0" rIns="0" bIns="0" rtlCol="0" anchor="ctr"/>
+            <a:lstStyle/>
+            <a:p>
+              <a:pPr marL="0" indent="0">
+                <a:buNone/>
+              </a:pPr>
+              <a:r>
+                <a:rPr lang="en-US" sz="1100" dirty="0">
+                  <a:solidFill>
+                    <a:srgbClr val="1E293B"/>
+                  </a:solidFill>
+                  <a:latin typeface="Calibri" pitchFamily="34" charset="0"/>
+                  <a:ea typeface="Calibri" pitchFamily="34" charset="-122"/>
+                  <a:cs typeface="Calibri" pitchFamily="34" charset="-120"/>
+                </a:rPr>
+                <a:t>Πλήρες CRUD και ιστορικό</a:t>
+              </a:r>
+              <a:endParaRPr lang="en-US" sz="1100" dirty="0"/>
+            </a:p>
+          </p:txBody>
+        </p:sp>
+      </p:grpSp>
+      <p:grpSp>
+        <p:nvGrpSpPr>
+          <p:cNvPr id="30" name="Group 29">
+            <a:extLst>
+              <a:ext uri="{FF2B5EF4-FFF2-40B4-BE49-F238E27FC236}">
+                <a16:creationId xmlns:a16="http://schemas.microsoft.com/office/drawing/2014/main" id="{76C4416B-3946-199D-BA6E-314BCB0B283A}"/>
+              </a:ext>
+            </a:extLst>
+          </p:cNvPr>
+          <p:cNvGrpSpPr/>
+          <p:nvPr/>
+        </p:nvGrpSpPr>
+        <p:grpSpPr>
+          <a:xfrm>
+            <a:off x="3885649" y="2239911"/>
+            <a:ext cx="1783080" cy="1417320"/>
+            <a:chOff x="3852573" y="2227006"/>
+            <a:chExt cx="1783080" cy="1417320"/>
+          </a:xfrm>
+        </p:grpSpPr>
+        <p:sp>
+          <p:nvSpPr>
+            <p:cNvPr id="14" name="Shape 12"/>
+            <p:cNvSpPr/>
+            <p:nvPr/>
+          </p:nvSpPr>
+          <p:spPr>
+            <a:xfrm>
+              <a:off x="3852573" y="2227006"/>
+              <a:ext cx="1413190" cy="1417320"/>
+            </a:xfrm>
+            <a:prstGeom prst="rect">
+              <a:avLst/>
+            </a:prstGeom>
+            <a:solidFill>
+              <a:srgbClr val="FFFFFF"/>
+            </a:solidFill>
+            <a:ln w="12700">
+              <a:solidFill>
+                <a:srgbClr val="E2E8F0"/>
+              </a:solidFill>
+              <a:prstDash val="solid"/>
+            </a:ln>
+            <a:effectLst>
+              <a:outerShdw blurRad="76200" dist="25400" dir="5400000" algn="bl" rotWithShape="0">
+                <a:srgbClr val="000000">
+                  <a:alpha val="8000"/>
+                </a:srgbClr>
+              </a:outerShdw>
+            </a:effectLst>
+          </p:spPr>
+          <p:txBody>
+            <a:bodyPr/>
+            <a:lstStyle/>
+            <a:p>
+              <a:endParaRPr lang="en-US"/>
+            </a:p>
+          </p:txBody>
+        </p:sp>
+        <p:sp>
+          <p:nvSpPr>
+            <p:cNvPr id="15" name="Shape 13"/>
+            <p:cNvSpPr/>
+            <p:nvPr/>
+          </p:nvSpPr>
+          <p:spPr>
+            <a:xfrm>
+              <a:off x="3852573" y="2227006"/>
+              <a:ext cx="55149" cy="1417320"/>
+            </a:xfrm>
+            <a:prstGeom prst="rect">
+              <a:avLst/>
+            </a:prstGeom>
+            <a:solidFill>
+              <a:srgbClr val="1C7293"/>
+            </a:solidFill>
+            <a:ln/>
+          </p:spPr>
+          <p:txBody>
+            <a:bodyPr/>
+            <a:lstStyle/>
+            <a:p>
+              <a:endParaRPr lang="en-US"/>
+            </a:p>
+          </p:txBody>
+        </p:sp>
+        <p:sp>
+          <p:nvSpPr>
+            <p:cNvPr id="16" name="Text 14"/>
+            <p:cNvSpPr/>
+            <p:nvPr/>
+          </p:nvSpPr>
+          <p:spPr>
+            <a:xfrm>
+              <a:off x="4035453" y="2227006"/>
+              <a:ext cx="1600200" cy="365760"/>
+            </a:xfrm>
+            <a:prstGeom prst="rect">
+              <a:avLst/>
+            </a:prstGeom>
+            <a:noFill/>
+            <a:ln/>
+          </p:spPr>
+          <p:txBody>
+            <a:bodyPr wrap="square" lIns="0" tIns="0" rIns="0" bIns="0" rtlCol="0" anchor="ctr"/>
+            <a:lstStyle/>
+            <a:p>
+              <a:pPr marL="0" indent="0">
+                <a:buNone/>
+              </a:pPr>
+              <a:r>
+                <a:rPr lang="en-US" sz="1100" b="1" dirty="0">
+                  <a:solidFill>
+                    <a:srgbClr val="64748B"/>
+                  </a:solidFill>
+                  <a:latin typeface="Calibri" pitchFamily="34" charset="0"/>
+                  <a:ea typeface="Calibri" pitchFamily="34" charset="-122"/>
+                  <a:cs typeface="Calibri" pitchFamily="34" charset="-120"/>
+                </a:rPr>
+                <a:t>03</a:t>
+              </a:r>
+              <a:endParaRPr lang="en-US" sz="1100" dirty="0"/>
+            </a:p>
+          </p:txBody>
+        </p:sp>
+        <p:sp>
+          <p:nvSpPr>
+            <p:cNvPr id="17" name="Text 15"/>
+            <p:cNvSpPr/>
+            <p:nvPr/>
+          </p:nvSpPr>
+          <p:spPr>
+            <a:xfrm>
+              <a:off x="4035453" y="2592766"/>
+              <a:ext cx="1600200" cy="411480"/>
+            </a:xfrm>
+            <a:prstGeom prst="rect">
+              <a:avLst/>
+            </a:prstGeom>
+            <a:noFill/>
+            <a:ln/>
+          </p:spPr>
+          <p:txBody>
+            <a:bodyPr wrap="square" lIns="0" tIns="0" rIns="0" bIns="0" rtlCol="0" anchor="ctr"/>
+            <a:lstStyle/>
+            <a:p>
+              <a:pPr marL="0" indent="0">
+                <a:buNone/>
+              </a:pPr>
+              <a:r>
+                <a:rPr lang="en-US" sz="1700" b="1" dirty="0">
+                  <a:solidFill>
+                    <a:srgbClr val="065A82"/>
+                  </a:solidFill>
+                  <a:latin typeface="Calibri" pitchFamily="34" charset="0"/>
+                  <a:ea typeface="Calibri" pitchFamily="34" charset="-122"/>
+                  <a:cs typeface="Calibri" pitchFamily="34" charset="-120"/>
+                </a:rPr>
+                <a:t>Δανεισμοί</a:t>
+              </a:r>
+              <a:endParaRPr lang="en-US" sz="1700" dirty="0"/>
+            </a:p>
+          </p:txBody>
+        </p:sp>
+        <p:sp>
+          <p:nvSpPr>
+            <p:cNvPr id="18" name="Text 16"/>
+            <p:cNvSpPr/>
+            <p:nvPr/>
+          </p:nvSpPr>
+          <p:spPr>
+            <a:xfrm>
+              <a:off x="4035453" y="3047202"/>
+              <a:ext cx="1336168" cy="540712"/>
+            </a:xfrm>
+            <a:prstGeom prst="rect">
+              <a:avLst/>
+            </a:prstGeom>
+            <a:noFill/>
+            <a:ln/>
+          </p:spPr>
+          <p:txBody>
+            <a:bodyPr wrap="square" lIns="0" tIns="0" rIns="0" bIns="0" rtlCol="0" anchor="ctr"/>
+            <a:lstStyle/>
+            <a:p>
+              <a:pPr marL="0" indent="0">
+                <a:buNone/>
+              </a:pPr>
+              <a:r>
+                <a:rPr lang="en-US" sz="1100" dirty="0">
+                  <a:solidFill>
+                    <a:srgbClr val="1E293B"/>
+                  </a:solidFill>
+                  <a:latin typeface="Calibri" pitchFamily="34" charset="0"/>
+                  <a:ea typeface="Calibri" pitchFamily="34" charset="-122"/>
+                  <a:cs typeface="Calibri" pitchFamily="34" charset="-120"/>
+                </a:rPr>
+                <a:t>Δανεισμός / επιστροφή με βαθμολόγηση</a:t>
+              </a:r>
+              <a:endParaRPr lang="en-US" sz="1100" dirty="0"/>
+            </a:p>
+          </p:txBody>
+        </p:sp>
+      </p:grpSp>
+      <p:grpSp>
+        <p:nvGrpSpPr>
+          <p:cNvPr id="29" name="Group 28">
+            <a:extLst>
+              <a:ext uri="{FF2B5EF4-FFF2-40B4-BE49-F238E27FC236}">
+                <a16:creationId xmlns:a16="http://schemas.microsoft.com/office/drawing/2014/main" id="{F2AF7624-AA1A-568A-1F40-E76D6F33BC5B}"/>
+              </a:ext>
+            </a:extLst>
+          </p:cNvPr>
+          <p:cNvGrpSpPr/>
+          <p:nvPr/>
+        </p:nvGrpSpPr>
+        <p:grpSpPr>
+          <a:xfrm>
+            <a:off x="5596303" y="2239911"/>
+            <a:ext cx="1783080" cy="1417320"/>
+            <a:chOff x="5600898" y="2240280"/>
+            <a:chExt cx="1783080" cy="1417320"/>
+          </a:xfrm>
+        </p:grpSpPr>
+        <p:sp>
+          <p:nvSpPr>
+            <p:cNvPr id="19" name="Shape 17"/>
+            <p:cNvSpPr/>
+            <p:nvPr/>
+          </p:nvSpPr>
+          <p:spPr>
+            <a:xfrm>
+              <a:off x="5600898" y="2240280"/>
+              <a:ext cx="1413190" cy="1417320"/>
+            </a:xfrm>
+            <a:prstGeom prst="rect">
+              <a:avLst/>
+            </a:prstGeom>
+            <a:solidFill>
+              <a:srgbClr val="FFFFFF"/>
+            </a:solidFill>
+            <a:ln w="12700">
+              <a:solidFill>
+                <a:srgbClr val="E2E8F0"/>
+              </a:solidFill>
+              <a:prstDash val="solid"/>
+            </a:ln>
+            <a:effectLst>
+              <a:outerShdw blurRad="76200" dist="25400" dir="5400000" algn="bl" rotWithShape="0">
+                <a:srgbClr val="000000">
+                  <a:alpha val="8000"/>
+                </a:srgbClr>
+              </a:outerShdw>
+            </a:effectLst>
+          </p:spPr>
+          <p:txBody>
+            <a:bodyPr/>
+            <a:lstStyle/>
+            <a:p>
+              <a:endParaRPr lang="en-US"/>
+            </a:p>
+          </p:txBody>
+        </p:sp>
+        <p:sp>
+          <p:nvSpPr>
+            <p:cNvPr id="20" name="Shape 18"/>
+            <p:cNvSpPr/>
+            <p:nvPr/>
+          </p:nvSpPr>
+          <p:spPr>
+            <a:xfrm>
+              <a:off x="5600898" y="2240280"/>
+              <a:ext cx="55149" cy="1417320"/>
+            </a:xfrm>
+            <a:prstGeom prst="rect">
+              <a:avLst/>
+            </a:prstGeom>
+            <a:solidFill>
+              <a:srgbClr val="1C7293"/>
+            </a:solidFill>
+            <a:ln/>
+          </p:spPr>
+          <p:txBody>
+            <a:bodyPr/>
+            <a:lstStyle/>
+            <a:p>
+              <a:endParaRPr lang="en-US"/>
+            </a:p>
+          </p:txBody>
+        </p:sp>
+        <p:sp>
+          <p:nvSpPr>
+            <p:cNvPr id="21" name="Text 19"/>
+            <p:cNvSpPr/>
+            <p:nvPr/>
+          </p:nvSpPr>
+          <p:spPr>
+            <a:xfrm>
+              <a:off x="5783778" y="2240280"/>
+              <a:ext cx="1600200" cy="365760"/>
+            </a:xfrm>
+            <a:prstGeom prst="rect">
+              <a:avLst/>
+            </a:prstGeom>
+            <a:noFill/>
+            <a:ln/>
+          </p:spPr>
+          <p:txBody>
+            <a:bodyPr wrap="square" lIns="0" tIns="0" rIns="0" bIns="0" rtlCol="0" anchor="ctr"/>
+            <a:lstStyle/>
+            <a:p>
+              <a:pPr marL="0" indent="0">
+                <a:buNone/>
+              </a:pPr>
+              <a:r>
+                <a:rPr lang="en-US" sz="1100" b="1" dirty="0">
+                  <a:solidFill>
+                    <a:srgbClr val="64748B"/>
+                  </a:solidFill>
+                  <a:latin typeface="Calibri" pitchFamily="34" charset="0"/>
+                  <a:ea typeface="Calibri" pitchFamily="34" charset="-122"/>
+                  <a:cs typeface="Calibri" pitchFamily="34" charset="-120"/>
+                </a:rPr>
+                <a:t>04</a:t>
+              </a:r>
+              <a:endParaRPr lang="en-US" sz="1100" dirty="0"/>
+            </a:p>
+          </p:txBody>
+        </p:sp>
+        <p:sp>
+          <p:nvSpPr>
+            <p:cNvPr id="22" name="Text 20"/>
+            <p:cNvSpPr/>
+            <p:nvPr/>
+          </p:nvSpPr>
+          <p:spPr>
+            <a:xfrm>
+              <a:off x="5783778" y="2606040"/>
+              <a:ext cx="1600200" cy="411480"/>
+            </a:xfrm>
+            <a:prstGeom prst="rect">
+              <a:avLst/>
+            </a:prstGeom>
+            <a:noFill/>
+            <a:ln/>
+          </p:spPr>
+          <p:txBody>
+            <a:bodyPr wrap="square" lIns="0" tIns="0" rIns="0" bIns="0" rtlCol="0" anchor="ctr"/>
+            <a:lstStyle/>
+            <a:p>
+              <a:pPr marL="0" indent="0">
+                <a:buNone/>
+              </a:pPr>
+              <a:r>
+                <a:rPr lang="en-US" sz="1700" b="1" dirty="0">
+                  <a:solidFill>
+                    <a:srgbClr val="065A82"/>
+                  </a:solidFill>
+                  <a:latin typeface="Calibri" pitchFamily="34" charset="0"/>
+                  <a:ea typeface="Calibri" pitchFamily="34" charset="-122"/>
+                  <a:cs typeface="Calibri" pitchFamily="34" charset="-120"/>
+                </a:rPr>
+                <a:t>Προτάσεις</a:t>
+              </a:r>
+              <a:endParaRPr lang="en-US" sz="1700" dirty="0"/>
+            </a:p>
+          </p:txBody>
+        </p:sp>
+        <p:sp>
+          <p:nvSpPr>
+            <p:cNvPr id="23" name="Text 21"/>
+            <p:cNvSpPr/>
+            <p:nvPr/>
+          </p:nvSpPr>
+          <p:spPr>
+            <a:xfrm>
+              <a:off x="5783778" y="3060476"/>
+              <a:ext cx="1230310" cy="551404"/>
+            </a:xfrm>
+            <a:prstGeom prst="rect">
+              <a:avLst/>
+            </a:prstGeom>
+            <a:noFill/>
+            <a:ln/>
+          </p:spPr>
+          <p:txBody>
+            <a:bodyPr wrap="square" lIns="0" tIns="0" rIns="0" bIns="0" rtlCol="0" anchor="ctr"/>
+            <a:lstStyle/>
+            <a:p>
+              <a:pPr marL="0" indent="0">
+                <a:buNone/>
+              </a:pPr>
+              <a:r>
+                <a:rPr lang="en-US" sz="1100" dirty="0">
+                  <a:solidFill>
+                    <a:srgbClr val="1E293B"/>
+                  </a:solidFill>
+                  <a:latin typeface="Calibri" pitchFamily="34" charset="0"/>
+                  <a:ea typeface="Calibri" pitchFamily="34" charset="-122"/>
+                  <a:cs typeface="Calibri" pitchFamily="34" charset="-120"/>
+                </a:rPr>
+                <a:t>Recommendations ανά μέλος</a:t>
+              </a:r>
+              <a:endParaRPr lang="en-US" sz="1100" dirty="0"/>
+            </a:p>
+          </p:txBody>
+        </p:sp>
+      </p:grpSp>
+      <p:sp>
+        <p:nvSpPr>
+          <p:cNvPr id="24" name="Text 22"/>
           <p:cNvSpPr/>
           <p:nvPr/>
         </p:nvSpPr>
         <p:spPr>
           <a:xfrm>
-            <a:off x="457200" y="2103120"/>
-            <a:ext cx="1874520" cy="1554480"/>
-          </a:xfrm>
-          <a:prstGeom prst="rect">
-            <a:avLst/>
-          </a:prstGeom>
-          <a:solidFill>
-            <a:srgbClr val="FFFFFF"/>
-          </a:solidFill>
-          <a:ln w="12700">
-            <a:solidFill>
-              <a:srgbClr val="E2E8F0"/>
-            </a:solidFill>
-            <a:prstDash val="solid"/>
-          </a:ln>
-          <a:effectLst>
-            <a:outerShdw blurRad="76200" dist="25400" dir="5400000" algn="bl" rotWithShape="0">
-              <a:srgbClr val="000000">
-                <a:alpha val="8000"/>
-              </a:srgbClr>
-            </a:outerShdw>
-          </a:effectLst>
-        </p:spPr>
-        <p:txBody>
-          <a:bodyPr/>
-          <a:lstStyle/>
-          <a:p>
-            <a:endParaRPr lang="en-US"/>
-          </a:p>
-        </p:txBody>
-      </p:sp>
-      <p:sp>
-        <p:nvSpPr>
-          <p:cNvPr id="5" name="Shape 3"/>
-          <p:cNvSpPr/>
-          <p:nvPr/>
-        </p:nvSpPr>
-        <p:spPr>
-          <a:xfrm>
-            <a:off x="457200" y="2103120"/>
-            <a:ext cx="73152" cy="1554480"/>
-          </a:xfrm>
-          <a:prstGeom prst="rect">
-            <a:avLst/>
-          </a:prstGeom>
-          <a:solidFill>
-            <a:srgbClr val="1C7293"/>
-          </a:solidFill>
-          <a:ln/>
-        </p:spPr>
-        <p:txBody>
-          <a:bodyPr/>
-          <a:lstStyle/>
-          <a:p>
-            <a:endParaRPr lang="en-US"/>
-          </a:p>
-        </p:txBody>
-      </p:sp>
-      <p:sp>
-        <p:nvSpPr>
-          <p:cNvPr id="6" name="Text 4"/>
-          <p:cNvSpPr/>
-          <p:nvPr/>
-        </p:nvSpPr>
-        <p:spPr>
-          <a:xfrm>
-            <a:off x="640080" y="2240280"/>
-            <a:ext cx="1600200" cy="365760"/>
+            <a:off x="457200" y="4206240"/>
+            <a:ext cx="8229600" cy="365760"/>
           </a:xfrm>
           <a:prstGeom prst="rect">
             <a:avLst/>
@@ -6111,11 +7090,9 @@
           <a:bodyPr wrap="square" lIns="0" tIns="0" rIns="0" bIns="0" rtlCol="0" anchor="ctr"/>
           <a:lstStyle/>
           <a:p>
-            <a:pPr marL="0" indent="0">
-              <a:buNone/>
-            </a:pPr>
-            <a:r>
-              <a:rPr lang="en-US" sz="1100" b="1" dirty="0">
+            <a:pPr algn="ctr"/>
+            <a:r>
+              <a:rPr lang="en-US" sz="1200" i="1" dirty="0">
                 <a:solidFill>
                   <a:srgbClr val="64748B"/>
                 </a:solidFill>
@@ -6123,678 +7100,300 @@
                 <a:ea typeface="Calibri" pitchFamily="34" charset="-122"/>
                 <a:cs typeface="Calibri" pitchFamily="34" charset="-120"/>
               </a:rPr>
-              <a:t>01</a:t>
-            </a:r>
-            <a:endParaRPr lang="en-US" sz="1100" dirty="0"/>
-          </a:p>
-        </p:txBody>
-      </p:sp>
-      <p:sp>
-        <p:nvSpPr>
-          <p:cNvPr id="7" name="Text 5"/>
-          <p:cNvSpPr/>
-          <p:nvPr/>
-        </p:nvSpPr>
-        <p:spPr>
-          <a:xfrm>
-            <a:off x="640080" y="2606040"/>
-            <a:ext cx="1600200" cy="411480"/>
-          </a:xfrm>
-          <a:prstGeom prst="rect">
-            <a:avLst/>
-          </a:prstGeom>
-          <a:noFill/>
-          <a:ln/>
-        </p:spPr>
-        <p:txBody>
-          <a:bodyPr wrap="square" lIns="0" tIns="0" rIns="0" bIns="0" rtlCol="0" anchor="ctr"/>
-          <a:lstStyle/>
-          <a:p>
-            <a:pPr marL="0" indent="0">
-              <a:buNone/>
-            </a:pPr>
-            <a:r>
-              <a:rPr lang="en-US" sz="1700" b="1" dirty="0">
-                <a:solidFill>
-                  <a:srgbClr val="065A82"/>
+              <a:t>Τεχνολογίες: Python 3 · Tkinter · SQLite 3 · matplotlib · pandas</a:t>
+            </a:r>
+            <a:r>
+              <a:rPr lang="el-GR" sz="1200" i="1" dirty="0">
+                <a:solidFill>
+                  <a:srgbClr val="64748B"/>
                 </a:solidFill>
                 <a:latin typeface="Calibri" pitchFamily="34" charset="0"/>
                 <a:ea typeface="Calibri" pitchFamily="34" charset="-122"/>
                 <a:cs typeface="Calibri" pitchFamily="34" charset="-120"/>
               </a:rPr>
-              <a:t>Κατάλογος</a:t>
-            </a:r>
-            <a:endParaRPr lang="en-US" sz="1700" dirty="0"/>
-          </a:p>
-        </p:txBody>
-      </p:sp>
-      <p:sp>
-        <p:nvSpPr>
-          <p:cNvPr id="8" name="Text 6"/>
-          <p:cNvSpPr/>
-          <p:nvPr/>
-        </p:nvSpPr>
-        <p:spPr>
-          <a:xfrm>
-            <a:off x="640080" y="3063240"/>
-            <a:ext cx="1600200" cy="548640"/>
-          </a:xfrm>
-          <a:prstGeom prst="rect">
-            <a:avLst/>
-          </a:prstGeom>
-          <a:noFill/>
-          <a:ln/>
-        </p:spPr>
-        <p:txBody>
-          <a:bodyPr wrap="square" lIns="0" tIns="0" rIns="0" bIns="0" rtlCol="0" anchor="ctr"/>
-          <a:lstStyle/>
-          <a:p>
-            <a:pPr marL="0" indent="0">
-              <a:buNone/>
-            </a:pPr>
-            <a:r>
-              <a:rPr lang="en-US" sz="1100" dirty="0">
-                <a:solidFill>
-                  <a:srgbClr val="1E293B"/>
+              <a:t> </a:t>
+            </a:r>
+            <a:r>
+              <a:rPr lang="en-US" sz="1200" i="1" dirty="0">
+                <a:solidFill>
+                  <a:srgbClr val="64748B"/>
                 </a:solidFill>
                 <a:latin typeface="Calibri" pitchFamily="34" charset="0"/>
                 <a:ea typeface="Calibri" pitchFamily="34" charset="-122"/>
                 <a:cs typeface="Calibri" pitchFamily="34" charset="-120"/>
               </a:rPr>
-              <a:t>Βιβλία και κατηγορίες, αναζήτηση και φίλτρα</a:t>
-            </a:r>
-            <a:endParaRPr lang="en-US" sz="1100" dirty="0"/>
-          </a:p>
-        </p:txBody>
-      </p:sp>
-      <p:sp>
-        <p:nvSpPr>
-          <p:cNvPr id="9" name="Shape 7"/>
-          <p:cNvSpPr/>
-          <p:nvPr/>
-        </p:nvSpPr>
-        <p:spPr>
-          <a:xfrm>
-            <a:off x="2496312" y="2103120"/>
-            <a:ext cx="1874520" cy="1554480"/>
-          </a:xfrm>
-          <a:prstGeom prst="rect">
-            <a:avLst/>
-          </a:prstGeom>
-          <a:solidFill>
-            <a:srgbClr val="FFFFFF"/>
-          </a:solidFill>
-          <a:ln w="12700">
+              <a:t>·</a:t>
+            </a:r>
+            <a:r>
+              <a:rPr lang="el-GR" sz="1200" i="1" dirty="0">
+                <a:solidFill>
+                  <a:srgbClr val="64748B"/>
+                </a:solidFill>
+                <a:latin typeface="Calibri" pitchFamily="34" charset="0"/>
+                <a:ea typeface="Calibri" pitchFamily="34" charset="-122"/>
+                <a:cs typeface="Calibri" pitchFamily="34" charset="-120"/>
+              </a:rPr>
+              <a:t> </a:t>
+            </a:r>
+            <a:r>
+              <a:rPr lang="en-US" sz="1200" i="1" dirty="0">
+                <a:solidFill>
+                  <a:srgbClr val="64748B"/>
+                </a:solidFill>
+                <a:latin typeface="Calibri" pitchFamily="34" charset="0"/>
+                <a:ea typeface="Calibri" pitchFamily="34" charset="-122"/>
+                <a:cs typeface="Calibri" pitchFamily="34" charset="-120"/>
+              </a:rPr>
+              <a:t>numpy</a:t>
+            </a:r>
+            <a:endParaRPr lang="en-US" sz="1200" dirty="0"/>
+          </a:p>
+        </p:txBody>
+      </p:sp>
+      <p:grpSp>
+        <p:nvGrpSpPr>
+          <p:cNvPr id="33" name="Group 32">
+            <a:extLst>
+              <a:ext uri="{FF2B5EF4-FFF2-40B4-BE49-F238E27FC236}">
+                <a16:creationId xmlns:a16="http://schemas.microsoft.com/office/drawing/2014/main" id="{D28BC441-1F05-878D-45BF-AAA759DE2AE5}"/>
+              </a:ext>
+            </a:extLst>
+          </p:cNvPr>
+          <p:cNvGrpSpPr/>
+          <p:nvPr/>
+        </p:nvGrpSpPr>
+        <p:grpSpPr>
+          <a:xfrm>
+            <a:off x="7306956" y="2236777"/>
+            <a:ext cx="1808604" cy="1423588"/>
+            <a:chOff x="2126422" y="2234012"/>
+            <a:chExt cx="1808604" cy="1423588"/>
+          </a:xfrm>
+        </p:grpSpPr>
+        <p:sp>
+          <p:nvSpPr>
+            <p:cNvPr id="34" name="Shape 7">
+              <a:extLst>
+                <a:ext uri="{FF2B5EF4-FFF2-40B4-BE49-F238E27FC236}">
+                  <a16:creationId xmlns:a16="http://schemas.microsoft.com/office/drawing/2014/main" id="{4439B925-53D3-EFB1-3D28-26A380398845}"/>
+                </a:ext>
+              </a:extLst>
+            </p:cNvPr>
+            <p:cNvSpPr/>
+            <p:nvPr/>
+          </p:nvSpPr>
+          <p:spPr>
+            <a:xfrm>
+              <a:off x="2126422" y="2234012"/>
+              <a:ext cx="1413190" cy="1417320"/>
+            </a:xfrm>
+            <a:prstGeom prst="rect">
+              <a:avLst/>
+            </a:prstGeom>
             <a:solidFill>
-              <a:srgbClr val="E2E8F0"/>
+              <a:srgbClr val="FFFFFF"/>
             </a:solidFill>
-            <a:prstDash val="solid"/>
-          </a:ln>
-          <a:effectLst>
-            <a:outerShdw blurRad="76200" dist="25400" dir="5400000" algn="bl" rotWithShape="0">
-              <a:srgbClr val="000000">
-                <a:alpha val="8000"/>
-              </a:srgbClr>
-            </a:outerShdw>
-          </a:effectLst>
-        </p:spPr>
-        <p:txBody>
-          <a:bodyPr/>
-          <a:lstStyle/>
-          <a:p>
-            <a:endParaRPr lang="en-US"/>
-          </a:p>
-        </p:txBody>
-      </p:sp>
-      <p:sp>
-        <p:nvSpPr>
-          <p:cNvPr id="10" name="Shape 8"/>
-          <p:cNvSpPr/>
-          <p:nvPr/>
-        </p:nvSpPr>
-        <p:spPr>
-          <a:xfrm>
-            <a:off x="2496312" y="2103120"/>
-            <a:ext cx="73152" cy="1554480"/>
-          </a:xfrm>
-          <a:prstGeom prst="rect">
-            <a:avLst/>
-          </a:prstGeom>
-          <a:solidFill>
-            <a:srgbClr val="1C7293"/>
-          </a:solidFill>
-          <a:ln/>
-        </p:spPr>
-        <p:txBody>
-          <a:bodyPr/>
-          <a:lstStyle/>
-          <a:p>
-            <a:endParaRPr lang="en-US"/>
-          </a:p>
-        </p:txBody>
-      </p:sp>
-      <p:sp>
-        <p:nvSpPr>
-          <p:cNvPr id="11" name="Text 9"/>
-          <p:cNvSpPr/>
-          <p:nvPr/>
-        </p:nvSpPr>
-        <p:spPr>
-          <a:xfrm>
-            <a:off x="2679192" y="2240280"/>
-            <a:ext cx="1600200" cy="365760"/>
-          </a:xfrm>
-          <a:prstGeom prst="rect">
-            <a:avLst/>
-          </a:prstGeom>
-          <a:noFill/>
-          <a:ln/>
-        </p:spPr>
-        <p:txBody>
-          <a:bodyPr wrap="square" lIns="0" tIns="0" rIns="0" bIns="0" rtlCol="0" anchor="ctr"/>
-          <a:lstStyle/>
-          <a:p>
-            <a:pPr marL="0" indent="0">
-              <a:buNone/>
-            </a:pPr>
-            <a:r>
-              <a:rPr lang="en-US" sz="1100" b="1" dirty="0">
-                <a:solidFill>
-                  <a:srgbClr val="64748B"/>
-                </a:solidFill>
-                <a:latin typeface="Calibri" pitchFamily="34" charset="0"/>
-                <a:ea typeface="Calibri" pitchFamily="34" charset="-122"/>
-                <a:cs typeface="Calibri" pitchFamily="34" charset="-120"/>
-              </a:rPr>
-              <a:t>02</a:t>
-            </a:r>
-            <a:endParaRPr lang="en-US" sz="1100" dirty="0"/>
-          </a:p>
-        </p:txBody>
-      </p:sp>
-      <p:sp>
-        <p:nvSpPr>
-          <p:cNvPr id="12" name="Text 10"/>
-          <p:cNvSpPr/>
-          <p:nvPr/>
-        </p:nvSpPr>
-        <p:spPr>
-          <a:xfrm>
-            <a:off x="2679192" y="2606040"/>
-            <a:ext cx="1600200" cy="411480"/>
-          </a:xfrm>
-          <a:prstGeom prst="rect">
-            <a:avLst/>
-          </a:prstGeom>
-          <a:noFill/>
-          <a:ln/>
-        </p:spPr>
-        <p:txBody>
-          <a:bodyPr wrap="square" lIns="0" tIns="0" rIns="0" bIns="0" rtlCol="0" anchor="ctr"/>
-          <a:lstStyle/>
-          <a:p>
-            <a:pPr marL="0" indent="0">
-              <a:buNone/>
-            </a:pPr>
-            <a:r>
-              <a:rPr lang="en-US" sz="1700" b="1" dirty="0">
-                <a:solidFill>
-                  <a:srgbClr val="065A82"/>
-                </a:solidFill>
-                <a:latin typeface="Calibri" pitchFamily="34" charset="0"/>
-                <a:ea typeface="Calibri" pitchFamily="34" charset="-122"/>
-                <a:cs typeface="Calibri" pitchFamily="34" charset="-120"/>
-              </a:rPr>
-              <a:t>Μέλη</a:t>
-            </a:r>
-            <a:endParaRPr lang="en-US" sz="1700" dirty="0"/>
-          </a:p>
-        </p:txBody>
-      </p:sp>
-      <p:sp>
-        <p:nvSpPr>
-          <p:cNvPr id="13" name="Text 11"/>
-          <p:cNvSpPr/>
-          <p:nvPr/>
-        </p:nvSpPr>
-        <p:spPr>
-          <a:xfrm>
-            <a:off x="2679192" y="3063240"/>
-            <a:ext cx="1600200" cy="548640"/>
-          </a:xfrm>
-          <a:prstGeom prst="rect">
-            <a:avLst/>
-          </a:prstGeom>
-          <a:noFill/>
-          <a:ln/>
-        </p:spPr>
-        <p:txBody>
-          <a:bodyPr wrap="square" lIns="0" tIns="0" rIns="0" bIns="0" rtlCol="0" anchor="ctr"/>
-          <a:lstStyle/>
-          <a:p>
-            <a:pPr marL="0" indent="0">
-              <a:buNone/>
-            </a:pPr>
-            <a:r>
-              <a:rPr lang="en-US" sz="1100" dirty="0">
-                <a:solidFill>
-                  <a:srgbClr val="1E293B"/>
-                </a:solidFill>
-                <a:latin typeface="Calibri" pitchFamily="34" charset="0"/>
-                <a:ea typeface="Calibri" pitchFamily="34" charset="-122"/>
-                <a:cs typeface="Calibri" pitchFamily="34" charset="-120"/>
-              </a:rPr>
-              <a:t>Πλήρες CRUD και ιστορικό</a:t>
-            </a:r>
-            <a:endParaRPr lang="en-US" sz="1100" dirty="0"/>
-          </a:p>
-        </p:txBody>
-      </p:sp>
-      <p:sp>
-        <p:nvSpPr>
-          <p:cNvPr id="14" name="Shape 12"/>
-          <p:cNvSpPr/>
-          <p:nvPr/>
-        </p:nvSpPr>
-        <p:spPr>
-          <a:xfrm>
-            <a:off x="4535424" y="2103120"/>
-            <a:ext cx="1874520" cy="1554480"/>
-          </a:xfrm>
-          <a:prstGeom prst="rect">
-            <a:avLst/>
-          </a:prstGeom>
-          <a:solidFill>
-            <a:srgbClr val="FFFFFF"/>
-          </a:solidFill>
-          <a:ln w="12700">
+            <a:ln w="12700">
+              <a:solidFill>
+                <a:srgbClr val="E2E8F0"/>
+              </a:solidFill>
+              <a:prstDash val="solid"/>
+            </a:ln>
+            <a:effectLst>
+              <a:outerShdw blurRad="76200" dist="25400" dir="5400000" algn="bl" rotWithShape="0">
+                <a:srgbClr val="000000">
+                  <a:alpha val="8000"/>
+                </a:srgbClr>
+              </a:outerShdw>
+            </a:effectLst>
+          </p:spPr>
+          <p:txBody>
+            <a:bodyPr/>
+            <a:lstStyle/>
+            <a:p>
+              <a:endParaRPr lang="en-US"/>
+            </a:p>
+          </p:txBody>
+        </p:sp>
+        <p:sp>
+          <p:nvSpPr>
+            <p:cNvPr id="35" name="Shape 8">
+              <a:extLst>
+                <a:ext uri="{FF2B5EF4-FFF2-40B4-BE49-F238E27FC236}">
+                  <a16:creationId xmlns:a16="http://schemas.microsoft.com/office/drawing/2014/main" id="{762CB193-D896-F077-381F-3896B9F64ABA}"/>
+                </a:ext>
+              </a:extLst>
+            </p:cNvPr>
+            <p:cNvSpPr/>
+            <p:nvPr/>
+          </p:nvSpPr>
+          <p:spPr>
+            <a:xfrm>
+              <a:off x="2129912" y="2240280"/>
+              <a:ext cx="55149" cy="1417320"/>
+            </a:xfrm>
+            <a:prstGeom prst="rect">
+              <a:avLst/>
+            </a:prstGeom>
             <a:solidFill>
-              <a:srgbClr val="E2E8F0"/>
+              <a:srgbClr val="1C7293"/>
             </a:solidFill>
-            <a:prstDash val="solid"/>
-          </a:ln>
-          <a:effectLst>
-            <a:outerShdw blurRad="76200" dist="25400" dir="5400000" algn="bl" rotWithShape="0">
-              <a:srgbClr val="000000">
-                <a:alpha val="8000"/>
-              </a:srgbClr>
-            </a:outerShdw>
-          </a:effectLst>
-        </p:spPr>
-        <p:txBody>
-          <a:bodyPr/>
-          <a:lstStyle/>
-          <a:p>
-            <a:endParaRPr lang="en-US"/>
-          </a:p>
-        </p:txBody>
-      </p:sp>
-      <p:sp>
-        <p:nvSpPr>
-          <p:cNvPr id="15" name="Shape 13"/>
-          <p:cNvSpPr/>
-          <p:nvPr/>
-        </p:nvSpPr>
-        <p:spPr>
-          <a:xfrm>
-            <a:off x="4535424" y="2103120"/>
-            <a:ext cx="73152" cy="1554480"/>
-          </a:xfrm>
-          <a:prstGeom prst="rect">
-            <a:avLst/>
-          </a:prstGeom>
-          <a:solidFill>
-            <a:srgbClr val="1C7293"/>
-          </a:solidFill>
-          <a:ln/>
-        </p:spPr>
-        <p:txBody>
-          <a:bodyPr/>
-          <a:lstStyle/>
-          <a:p>
-            <a:endParaRPr lang="en-US"/>
-          </a:p>
-        </p:txBody>
-      </p:sp>
-      <p:sp>
-        <p:nvSpPr>
-          <p:cNvPr id="16" name="Text 14"/>
-          <p:cNvSpPr/>
-          <p:nvPr/>
-        </p:nvSpPr>
-        <p:spPr>
-          <a:xfrm>
-            <a:off x="4718304" y="2240280"/>
-            <a:ext cx="1600200" cy="365760"/>
-          </a:xfrm>
-          <a:prstGeom prst="rect">
-            <a:avLst/>
-          </a:prstGeom>
-          <a:noFill/>
-          <a:ln/>
-        </p:spPr>
-        <p:txBody>
-          <a:bodyPr wrap="square" lIns="0" tIns="0" rIns="0" bIns="0" rtlCol="0" anchor="ctr"/>
-          <a:lstStyle/>
-          <a:p>
-            <a:pPr marL="0" indent="0">
-              <a:buNone/>
-            </a:pPr>
-            <a:r>
-              <a:rPr lang="en-US" sz="1100" b="1" dirty="0">
-                <a:solidFill>
-                  <a:srgbClr val="64748B"/>
-                </a:solidFill>
-                <a:latin typeface="Calibri" pitchFamily="34" charset="0"/>
-                <a:ea typeface="Calibri" pitchFamily="34" charset="-122"/>
-                <a:cs typeface="Calibri" pitchFamily="34" charset="-120"/>
-              </a:rPr>
-              <a:t>03</a:t>
-            </a:r>
-            <a:endParaRPr lang="en-US" sz="1100" dirty="0"/>
-          </a:p>
-        </p:txBody>
-      </p:sp>
-      <p:sp>
-        <p:nvSpPr>
-          <p:cNvPr id="17" name="Text 15"/>
-          <p:cNvSpPr/>
-          <p:nvPr/>
-        </p:nvSpPr>
-        <p:spPr>
-          <a:xfrm>
-            <a:off x="4718304" y="2606040"/>
-            <a:ext cx="1600200" cy="411480"/>
-          </a:xfrm>
-          <a:prstGeom prst="rect">
-            <a:avLst/>
-          </a:prstGeom>
-          <a:noFill/>
-          <a:ln/>
-        </p:spPr>
-        <p:txBody>
-          <a:bodyPr wrap="square" lIns="0" tIns="0" rIns="0" bIns="0" rtlCol="0" anchor="ctr"/>
-          <a:lstStyle/>
-          <a:p>
-            <a:pPr marL="0" indent="0">
-              <a:buNone/>
-            </a:pPr>
-            <a:r>
-              <a:rPr lang="en-US" sz="1700" b="1" dirty="0">
-                <a:solidFill>
-                  <a:srgbClr val="065A82"/>
-                </a:solidFill>
-                <a:latin typeface="Calibri" pitchFamily="34" charset="0"/>
-                <a:ea typeface="Calibri" pitchFamily="34" charset="-122"/>
-                <a:cs typeface="Calibri" pitchFamily="34" charset="-120"/>
-              </a:rPr>
-              <a:t>Δανεισμοί</a:t>
-            </a:r>
-            <a:endParaRPr lang="en-US" sz="1700" dirty="0"/>
-          </a:p>
-        </p:txBody>
-      </p:sp>
-      <p:sp>
-        <p:nvSpPr>
-          <p:cNvPr id="18" name="Text 16"/>
-          <p:cNvSpPr/>
-          <p:nvPr/>
-        </p:nvSpPr>
-        <p:spPr>
-          <a:xfrm>
-            <a:off x="4718304" y="3063240"/>
-            <a:ext cx="1600200" cy="548640"/>
-          </a:xfrm>
-          <a:prstGeom prst="rect">
-            <a:avLst/>
-          </a:prstGeom>
-          <a:noFill/>
-          <a:ln/>
-        </p:spPr>
-        <p:txBody>
-          <a:bodyPr wrap="square" lIns="0" tIns="0" rIns="0" bIns="0" rtlCol="0" anchor="ctr"/>
-          <a:lstStyle/>
-          <a:p>
-            <a:pPr marL="0" indent="0">
-              <a:buNone/>
-            </a:pPr>
-            <a:r>
-              <a:rPr lang="en-US" sz="1100" dirty="0">
-                <a:solidFill>
-                  <a:srgbClr val="1E293B"/>
-                </a:solidFill>
-                <a:latin typeface="Calibri" pitchFamily="34" charset="0"/>
-                <a:ea typeface="Calibri" pitchFamily="34" charset="-122"/>
-                <a:cs typeface="Calibri" pitchFamily="34" charset="-120"/>
-              </a:rPr>
-              <a:t>Δανεισμός / επιστροφή με βαθμολόγηση</a:t>
-            </a:r>
-            <a:endParaRPr lang="en-US" sz="1100" dirty="0"/>
-          </a:p>
-        </p:txBody>
-      </p:sp>
-      <p:sp>
-        <p:nvSpPr>
-          <p:cNvPr id="19" name="Shape 17"/>
-          <p:cNvSpPr/>
-          <p:nvPr/>
-        </p:nvSpPr>
-        <p:spPr>
-          <a:xfrm>
-            <a:off x="6574536" y="2103120"/>
-            <a:ext cx="1874520" cy="1554480"/>
-          </a:xfrm>
-          <a:prstGeom prst="rect">
-            <a:avLst/>
-          </a:prstGeom>
-          <a:solidFill>
-            <a:srgbClr val="FFFFFF"/>
-          </a:solidFill>
-          <a:ln w="12700">
-            <a:solidFill>
-              <a:srgbClr val="E2E8F0"/>
-            </a:solidFill>
-            <a:prstDash val="solid"/>
-          </a:ln>
-          <a:effectLst>
-            <a:outerShdw blurRad="76200" dist="25400" dir="5400000" algn="bl" rotWithShape="0">
-              <a:srgbClr val="000000">
-                <a:alpha val="8000"/>
-              </a:srgbClr>
-            </a:outerShdw>
-          </a:effectLst>
-        </p:spPr>
-        <p:txBody>
-          <a:bodyPr/>
-          <a:lstStyle/>
-          <a:p>
-            <a:endParaRPr lang="en-US"/>
-          </a:p>
-        </p:txBody>
-      </p:sp>
-      <p:sp>
-        <p:nvSpPr>
-          <p:cNvPr id="20" name="Shape 18"/>
-          <p:cNvSpPr/>
-          <p:nvPr/>
-        </p:nvSpPr>
-        <p:spPr>
-          <a:xfrm>
-            <a:off x="6574536" y="2103120"/>
-            <a:ext cx="73152" cy="1554480"/>
-          </a:xfrm>
-          <a:prstGeom prst="rect">
-            <a:avLst/>
-          </a:prstGeom>
-          <a:solidFill>
-            <a:srgbClr val="1C7293"/>
-          </a:solidFill>
-          <a:ln/>
-        </p:spPr>
-        <p:txBody>
-          <a:bodyPr/>
-          <a:lstStyle/>
-          <a:p>
-            <a:endParaRPr lang="en-US"/>
-          </a:p>
-        </p:txBody>
-      </p:sp>
-      <p:sp>
-        <p:nvSpPr>
-          <p:cNvPr id="21" name="Text 19"/>
-          <p:cNvSpPr/>
-          <p:nvPr/>
-        </p:nvSpPr>
-        <p:spPr>
-          <a:xfrm>
-            <a:off x="6757416" y="2240280"/>
-            <a:ext cx="1600200" cy="365760"/>
-          </a:xfrm>
-          <a:prstGeom prst="rect">
-            <a:avLst/>
-          </a:prstGeom>
-          <a:noFill/>
-          <a:ln/>
-        </p:spPr>
-        <p:txBody>
-          <a:bodyPr wrap="square" lIns="0" tIns="0" rIns="0" bIns="0" rtlCol="0" anchor="ctr"/>
-          <a:lstStyle/>
-          <a:p>
-            <a:pPr marL="0" indent="0">
-              <a:buNone/>
-            </a:pPr>
-            <a:r>
-              <a:rPr lang="en-US" sz="1100" b="1" dirty="0">
-                <a:solidFill>
-                  <a:srgbClr val="64748B"/>
-                </a:solidFill>
-                <a:latin typeface="Calibri" pitchFamily="34" charset="0"/>
-                <a:ea typeface="Calibri" pitchFamily="34" charset="-122"/>
-                <a:cs typeface="Calibri" pitchFamily="34" charset="-120"/>
-              </a:rPr>
-              <a:t>04</a:t>
-            </a:r>
-            <a:endParaRPr lang="en-US" sz="1100" dirty="0"/>
-          </a:p>
-        </p:txBody>
-      </p:sp>
-      <p:sp>
-        <p:nvSpPr>
-          <p:cNvPr id="22" name="Text 20"/>
-          <p:cNvSpPr/>
-          <p:nvPr/>
-        </p:nvSpPr>
-        <p:spPr>
-          <a:xfrm>
-            <a:off x="6757416" y="2606040"/>
-            <a:ext cx="1600200" cy="411480"/>
-          </a:xfrm>
-          <a:prstGeom prst="rect">
-            <a:avLst/>
-          </a:prstGeom>
-          <a:noFill/>
-          <a:ln/>
-        </p:spPr>
-        <p:txBody>
-          <a:bodyPr wrap="square" lIns="0" tIns="0" rIns="0" bIns="0" rtlCol="0" anchor="ctr"/>
-          <a:lstStyle/>
-          <a:p>
-            <a:pPr marL="0" indent="0">
-              <a:buNone/>
-            </a:pPr>
-            <a:r>
-              <a:rPr lang="en-US" sz="1700" b="1" dirty="0">
-                <a:solidFill>
-                  <a:srgbClr val="065A82"/>
-                </a:solidFill>
-                <a:latin typeface="Calibri" pitchFamily="34" charset="0"/>
-                <a:ea typeface="Calibri" pitchFamily="34" charset="-122"/>
-                <a:cs typeface="Calibri" pitchFamily="34" charset="-120"/>
-              </a:rPr>
-              <a:t>Προτάσεις</a:t>
-            </a:r>
-            <a:endParaRPr lang="en-US" sz="1700" dirty="0"/>
-          </a:p>
-        </p:txBody>
-      </p:sp>
-      <p:sp>
-        <p:nvSpPr>
-          <p:cNvPr id="23" name="Text 21"/>
-          <p:cNvSpPr/>
-          <p:nvPr/>
-        </p:nvSpPr>
-        <p:spPr>
-          <a:xfrm>
-            <a:off x="6757416" y="3063240"/>
-            <a:ext cx="1600200" cy="548640"/>
-          </a:xfrm>
-          <a:prstGeom prst="rect">
-            <a:avLst/>
-          </a:prstGeom>
-          <a:noFill/>
-          <a:ln/>
-        </p:spPr>
-        <p:txBody>
-          <a:bodyPr wrap="square" lIns="0" tIns="0" rIns="0" bIns="0" rtlCol="0" anchor="ctr"/>
-          <a:lstStyle/>
-          <a:p>
-            <a:pPr marL="0" indent="0">
-              <a:buNone/>
-            </a:pPr>
-            <a:r>
-              <a:rPr lang="en-US" sz="1100" dirty="0">
-                <a:solidFill>
-                  <a:srgbClr val="1E293B"/>
-                </a:solidFill>
-                <a:latin typeface="Calibri" pitchFamily="34" charset="0"/>
-                <a:ea typeface="Calibri" pitchFamily="34" charset="-122"/>
-                <a:cs typeface="Calibri" pitchFamily="34" charset="-120"/>
-              </a:rPr>
-              <a:t>Recommendations ανά μέλος</a:t>
-            </a:r>
-            <a:endParaRPr lang="en-US" sz="1100" dirty="0"/>
-          </a:p>
-        </p:txBody>
-      </p:sp>
-      <p:sp>
-        <p:nvSpPr>
-          <p:cNvPr id="24" name="Text 22"/>
-          <p:cNvSpPr/>
-          <p:nvPr/>
-        </p:nvSpPr>
-        <p:spPr>
-          <a:xfrm>
-            <a:off x="457200" y="4206240"/>
-            <a:ext cx="8229600" cy="365760"/>
-          </a:xfrm>
-          <a:prstGeom prst="rect">
-            <a:avLst/>
-          </a:prstGeom>
-          <a:noFill/>
-          <a:ln/>
-        </p:spPr>
-        <p:txBody>
-          <a:bodyPr wrap="square" lIns="0" tIns="0" rIns="0" bIns="0" rtlCol="0" anchor="ctr"/>
-          <a:lstStyle/>
-          <a:p>
-            <a:pPr marL="0" indent="0" algn="ctr">
-              <a:buNone/>
-            </a:pPr>
-            <a:r>
-              <a:rPr lang="en-US" sz="1200" i="1" dirty="0">
-                <a:solidFill>
-                  <a:srgbClr val="64748B"/>
-                </a:solidFill>
-                <a:latin typeface="Calibri" pitchFamily="34" charset="0"/>
-                <a:ea typeface="Calibri" pitchFamily="34" charset="-122"/>
-                <a:cs typeface="Calibri" pitchFamily="34" charset="-120"/>
-              </a:rPr>
-              <a:t>Τεχνολογίες: Python 3 · Tkinter · SQLite 3 · matplotlib · pandas</a:t>
-            </a:r>
-            <a:endParaRPr lang="en-US" sz="1200" dirty="0"/>
-          </a:p>
-        </p:txBody>
-      </p:sp>
+            <a:ln/>
+          </p:spPr>
+          <p:txBody>
+            <a:bodyPr/>
+            <a:lstStyle/>
+            <a:p>
+              <a:endParaRPr lang="en-US"/>
+            </a:p>
+          </p:txBody>
+        </p:sp>
+        <p:sp>
+          <p:nvSpPr>
+            <p:cNvPr id="36" name="Text 9">
+              <a:extLst>
+                <a:ext uri="{FF2B5EF4-FFF2-40B4-BE49-F238E27FC236}">
+                  <a16:creationId xmlns:a16="http://schemas.microsoft.com/office/drawing/2014/main" id="{06FA301B-7581-B14C-7064-9E56594567A2}"/>
+                </a:ext>
+              </a:extLst>
+            </p:cNvPr>
+            <p:cNvSpPr/>
+            <p:nvPr/>
+          </p:nvSpPr>
+          <p:spPr>
+            <a:xfrm>
+              <a:off x="2334826" y="2240280"/>
+              <a:ext cx="1600200" cy="365760"/>
+            </a:xfrm>
+            <a:prstGeom prst="rect">
+              <a:avLst/>
+            </a:prstGeom>
+            <a:noFill/>
+            <a:ln/>
+          </p:spPr>
+          <p:txBody>
+            <a:bodyPr wrap="square" lIns="0" tIns="0" rIns="0" bIns="0" rtlCol="0" anchor="ctr"/>
+            <a:lstStyle/>
+            <a:p>
+              <a:pPr marL="0" indent="0">
+                <a:buNone/>
+              </a:pPr>
+              <a:r>
+                <a:rPr lang="en-US" sz="1100" b="1" dirty="0">
+                  <a:solidFill>
+                    <a:srgbClr val="64748B"/>
+                  </a:solidFill>
+                  <a:latin typeface="Calibri" pitchFamily="34" charset="0"/>
+                  <a:ea typeface="Calibri" pitchFamily="34" charset="-122"/>
+                  <a:cs typeface="Calibri" pitchFamily="34" charset="-120"/>
+                </a:rPr>
+                <a:t>0</a:t>
+              </a:r>
+              <a:r>
+                <a:rPr lang="el-GR" sz="1100" b="1" dirty="0">
+                  <a:solidFill>
+                    <a:srgbClr val="64748B"/>
+                  </a:solidFill>
+                  <a:latin typeface="Calibri" pitchFamily="34" charset="0"/>
+                  <a:ea typeface="Calibri" pitchFamily="34" charset="-122"/>
+                  <a:cs typeface="Calibri" pitchFamily="34" charset="-120"/>
+                </a:rPr>
+                <a:t>5</a:t>
+              </a:r>
+              <a:endParaRPr lang="en-US" sz="1100" dirty="0"/>
+            </a:p>
+          </p:txBody>
+        </p:sp>
+        <p:sp>
+          <p:nvSpPr>
+            <p:cNvPr id="37" name="Text 10">
+              <a:extLst>
+                <a:ext uri="{FF2B5EF4-FFF2-40B4-BE49-F238E27FC236}">
+                  <a16:creationId xmlns:a16="http://schemas.microsoft.com/office/drawing/2014/main" id="{102181FC-4274-1D54-84AE-6465B75963B6}"/>
+                </a:ext>
+              </a:extLst>
+            </p:cNvPr>
+            <p:cNvSpPr/>
+            <p:nvPr/>
+          </p:nvSpPr>
+          <p:spPr>
+            <a:xfrm>
+              <a:off x="2334826" y="2606040"/>
+              <a:ext cx="1600200" cy="411480"/>
+            </a:xfrm>
+            <a:prstGeom prst="rect">
+              <a:avLst/>
+            </a:prstGeom>
+            <a:noFill/>
+            <a:ln/>
+          </p:spPr>
+          <p:txBody>
+            <a:bodyPr wrap="square" lIns="0" tIns="0" rIns="0" bIns="0" rtlCol="0" anchor="ctr"/>
+            <a:lstStyle/>
+            <a:p>
+              <a:pPr marL="0" indent="0">
+                <a:buNone/>
+              </a:pPr>
+              <a:r>
+                <a:rPr lang="el-GR" sz="1700" b="1" dirty="0">
+                  <a:solidFill>
+                    <a:srgbClr val="065A82"/>
+                  </a:solidFill>
+                  <a:latin typeface="Calibri" pitchFamily="34" charset="0"/>
+                  <a:cs typeface="Calibri" pitchFamily="34" charset="-120"/>
+                </a:rPr>
+                <a:t>Στατιστικά</a:t>
+              </a:r>
+              <a:endParaRPr lang="en-US" sz="1700" dirty="0"/>
+            </a:p>
+          </p:txBody>
+        </p:sp>
+        <p:sp>
+          <p:nvSpPr>
+            <p:cNvPr id="38" name="Text 11">
+              <a:extLst>
+                <a:ext uri="{FF2B5EF4-FFF2-40B4-BE49-F238E27FC236}">
+                  <a16:creationId xmlns:a16="http://schemas.microsoft.com/office/drawing/2014/main" id="{5DEBA86E-613C-86D6-2357-3547EFD48300}"/>
+                </a:ext>
+              </a:extLst>
+            </p:cNvPr>
+            <p:cNvSpPr/>
+            <p:nvPr/>
+          </p:nvSpPr>
+          <p:spPr>
+            <a:xfrm>
+              <a:off x="2334826" y="3148412"/>
+              <a:ext cx="1149637" cy="463468"/>
+            </a:xfrm>
+            <a:prstGeom prst="rect">
+              <a:avLst/>
+            </a:prstGeom>
+            <a:noFill/>
+            <a:ln/>
+          </p:spPr>
+          <p:txBody>
+            <a:bodyPr wrap="square" lIns="0" tIns="0" rIns="0" bIns="0" rtlCol="0" anchor="ctr"/>
+            <a:lstStyle/>
+            <a:p>
+              <a:pPr marL="0" indent="0">
+                <a:buNone/>
+              </a:pPr>
+              <a:r>
+                <a:rPr lang="el-GR" sz="1100" dirty="0">
+                  <a:solidFill>
+                    <a:srgbClr val="1E293B"/>
+                  </a:solidFill>
+                  <a:latin typeface="Calibri" pitchFamily="34" charset="0"/>
+                  <a:ea typeface="Calibri" pitchFamily="34" charset="-122"/>
+                  <a:cs typeface="Calibri" pitchFamily="34" charset="-120"/>
+                </a:rPr>
+                <a:t>Στατιστικά μελών και δανεισμών</a:t>
+              </a:r>
+              <a:endParaRPr lang="en-US" sz="1100" dirty="0"/>
+            </a:p>
+          </p:txBody>
+        </p:sp>
+      </p:grpSp>
     </p:spTree>
   </p:cSld>
   <p:clrMapOvr>
@@ -7312,6 +7911,17 @@
               <a:buNone/>
             </a:pPr>
             <a:r>
+              <a:rPr lang="en-US" sz="1000" dirty="0" err="1">
+                <a:solidFill>
+                  <a:srgbClr val="E0F2FE"/>
+                </a:solidFill>
+                <a:latin typeface="Calibri" pitchFamily="34" charset="0"/>
+                <a:ea typeface="Calibri" pitchFamily="34" charset="-122"/>
+                <a:cs typeface="Calibri" pitchFamily="34" charset="-120"/>
+              </a:rPr>
+              <a:t>Χτίζει</a:t>
+            </a:r>
+            <a:r>
               <a:rPr lang="en-US" sz="1000" dirty="0">
                 <a:solidFill>
                   <a:srgbClr val="E0F2FE"/>
@@ -7320,7 +7930,7 @@
                 <a:ea typeface="Calibri" pitchFamily="34" charset="-122"/>
                 <a:cs typeface="Calibri" pitchFamily="34" charset="-120"/>
               </a:rPr>
-              <a:t>Facade. Χτίζει DTOs, καλεί validators, αναθέτει στο DAL.</a:t>
+              <a:t> DTOs, καλεί validators, αναθέτει στο DAL.</a:t>
             </a:r>
             <a:endParaRPr lang="en-US" sz="1000" dirty="0"/>
           </a:p>
@@ -8029,8 +8639,8 @@
           <p:nvPr/>
         </p:nvSpPr>
         <p:spPr>
-          <a:xfrm rot="8100000">
-            <a:off x="7562088" y="4114800"/>
+          <a:xfrm rot="19277385">
+            <a:off x="7596304" y="3977639"/>
             <a:ext cx="384048" cy="329184"/>
           </a:xfrm>
           <a:prstGeom prst="rtTriangle">
@@ -8082,7 +8692,29 @@
                 <a:ea typeface="Calibri" pitchFamily="34" charset="-122"/>
                 <a:cs typeface="Calibri" pitchFamily="34" charset="-120"/>
               </a:rPr>
-              <a:t>One-way data flow. Καμία circular dependency. Κάθε επίπεδο αντικαθίσταται ανεξάρτητα.</a:t>
+              <a:t>One-way data flow. </a:t>
+            </a:r>
+            <a:r>
+              <a:rPr lang="en-US" sz="1000" i="1" dirty="0" err="1">
+                <a:solidFill>
+                  <a:srgbClr val="64748B"/>
+                </a:solidFill>
+                <a:latin typeface="Calibri" pitchFamily="34" charset="0"/>
+                <a:ea typeface="Calibri" pitchFamily="34" charset="-122"/>
+                <a:cs typeface="Calibri" pitchFamily="34" charset="-120"/>
+              </a:rPr>
+              <a:t>Κάθε</a:t>
+            </a:r>
+            <a:r>
+              <a:rPr lang="en-US" sz="1000" i="1" dirty="0">
+                <a:solidFill>
+                  <a:srgbClr val="64748B"/>
+                </a:solidFill>
+                <a:latin typeface="Calibri" pitchFamily="34" charset="0"/>
+                <a:ea typeface="Calibri" pitchFamily="34" charset="-122"/>
+                <a:cs typeface="Calibri" pitchFamily="34" charset="-120"/>
+              </a:rPr>
+              <a:t> επίπεδο αντικαθίσταται ανεξάρτητα.</a:t>
             </a:r>
             <a:endParaRPr lang="en-US" sz="1000" dirty="0"/>
           </a:p>
@@ -8288,7 +8920,29 @@
                 <a:ea typeface="Calibri" pitchFamily="34" charset="-122"/>
                 <a:cs typeface="Calibri" pitchFamily="34" charset="-120"/>
               </a:rPr>
-              <a:t>Παράδειγμα Κώδικα: DTOs + Facade</a:t>
+              <a:t>Πα</a:t>
+            </a:r>
+            <a:r>
+              <a:rPr lang="en-US" sz="2600" b="1" dirty="0" err="1">
+                <a:solidFill>
+                  <a:srgbClr val="065A82"/>
+                </a:solidFill>
+                <a:latin typeface="Calibri" pitchFamily="34" charset="0"/>
+                <a:ea typeface="Calibri" pitchFamily="34" charset="-122"/>
+                <a:cs typeface="Calibri" pitchFamily="34" charset="-120"/>
+              </a:rPr>
+              <a:t>ράδειγμ</a:t>
+            </a:r>
+            <a:r>
+              <a:rPr lang="en-US" sz="2600" b="1" dirty="0">
+                <a:solidFill>
+                  <a:srgbClr val="065A82"/>
+                </a:solidFill>
+                <a:latin typeface="Calibri" pitchFamily="34" charset="0"/>
+                <a:ea typeface="Calibri" pitchFamily="34" charset="-122"/>
+                <a:cs typeface="Calibri" pitchFamily="34" charset="-120"/>
+              </a:rPr>
+              <a:t>α Κώδικα</a:t>
             </a:r>
             <a:endParaRPr lang="en-US" sz="2600" dirty="0"/>
           </a:p>
@@ -8572,45 +9226,6 @@
               </a:rPr>
               <a:t>    self.service.borrow_book(member_id, book_id)
     self.refresh_all()</a:t>
-            </a:r>
-            <a:endParaRPr lang="en-US" sz="1000" dirty="0"/>
-          </a:p>
-        </p:txBody>
-      </p:sp>
-      <p:sp>
-        <p:nvSpPr>
-          <p:cNvPr id="9" name="Text 7"/>
-          <p:cNvSpPr/>
-          <p:nvPr/>
-        </p:nvSpPr>
-        <p:spPr>
-          <a:xfrm>
-            <a:off x="457200" y="4800600"/>
-            <a:ext cx="8229600" cy="274320"/>
-          </a:xfrm>
-          <a:prstGeom prst="rect">
-            <a:avLst/>
-          </a:prstGeom>
-          <a:noFill/>
-          <a:ln/>
-        </p:spPr>
-        <p:txBody>
-          <a:bodyPr wrap="square" lIns="0" tIns="0" rIns="0" bIns="0" rtlCol="0" anchor="ctr"/>
-          <a:lstStyle/>
-          <a:p>
-            <a:pPr marL="0" indent="0">
-              <a:buNone/>
-            </a:pPr>
-            <a:r>
-              <a:rPr lang="en-US" sz="1000" i="1" dirty="0">
-                <a:solidFill>
-                  <a:srgbClr val="64748B"/>
-                </a:solidFill>
-                <a:latin typeface="Calibri" pitchFamily="34" charset="0"/>
-                <a:ea typeface="Calibri" pitchFamily="34" charset="-122"/>
-                <a:cs typeface="Calibri" pitchFamily="34" charset="-120"/>
-              </a:rPr>
-              <a:t>Facade pattern - decoupling GUI ↔ DAL μέσω stateless service interface.</a:t>
             </a:r>
             <a:endParaRPr lang="en-US" sz="1000" dirty="0"/>
           </a:p>
@@ -8998,7 +9613,7 @@
                 <a:ea typeface="Calibri" pitchFamily="34" charset="-122"/>
                 <a:cs typeface="Calibri" pitchFamily="34" charset="-120"/>
               </a:rPr>
-              <a:t>Αν κάποιο βήμα αποτύχει, το transaction κάνει rollback — η βάση δεν αφήνει inconsistent state.</a:t>
+              <a:t>Αν κάποιο βήμα αποτύχει, το transaction κάνει rollback.</a:t>
             </a:r>
             <a:endParaRPr lang="en-US" sz="1000" dirty="0"/>
           </a:p>
@@ -9262,7 +9877,7 @@
                 <a:ea typeface="Calibri" pitchFamily="34" charset="-122"/>
                 <a:cs typeface="Calibri" pitchFamily="34" charset="-120"/>
               </a:rPr>
-              <a:t>4 πεδία αναζήτησης σε ένα round-trip · παραμετροποιημένα queries · ταξινόμηση case-insensitive.</a:t>
+              <a:t>4 πεδία αναζήτησης σε ένα round-trip · παραμετροποιημένα queries</a:t>
             </a:r>
             <a:endParaRPr lang="en-US" sz="1000" dirty="0"/>
           </a:p>
@@ -9373,7 +9988,29 @@
                 <a:ea typeface="Calibri" pitchFamily="34" charset="-122"/>
                 <a:cs typeface="Calibri" pitchFamily="34" charset="-120"/>
               </a:rPr>
-              <a:t>Κάθε μέλος μπορεί να βαθμολογήσει ένα βιβλίο μία φορά. Η βαθμολόγηση εκτελείται με UPSERT — εισαγωγή ή ενημέρωση της υπάρχουσας:</a:t>
+              <a:t>Κάθε μέλος μπορεί να βαθμολογήσει ένα βιβλίο μία φορά </a:t>
+            </a:r>
+            <a:r>
+              <a:rPr lang="el-GR" sz="1200" dirty="0">
+                <a:solidFill>
+                  <a:srgbClr val="1E293B"/>
+                </a:solidFill>
+                <a:latin typeface="Calibri" pitchFamily="34" charset="0"/>
+                <a:ea typeface="Calibri" pitchFamily="34" charset="-122"/>
+                <a:cs typeface="Calibri" pitchFamily="34" charset="-120"/>
+              </a:rPr>
+              <a:t>κατά την επιστροφή του</a:t>
+            </a:r>
+            <a:r>
+              <a:rPr lang="en-US" sz="1200" dirty="0">
+                <a:solidFill>
+                  <a:srgbClr val="1E293B"/>
+                </a:solidFill>
+                <a:latin typeface="Calibri" pitchFamily="34" charset="0"/>
+                <a:ea typeface="Calibri" pitchFamily="34" charset="-122"/>
+                <a:cs typeface="Calibri" pitchFamily="34" charset="-120"/>
+              </a:rPr>
+              <a:t>. Η βαθμολόγηση εκτελείται με UPSERT — εισαγωγή ή ενημέρωση της υπάρχουσας:</a:t>
             </a:r>
             <a:endParaRPr lang="en-US" sz="1200" dirty="0"/>
           </a:p>
